--- a/030_docs/abschlussprojekte_flashcards_bretscher_jan.pptx
+++ b/030_docs/abschlussprojekte_flashcards_bretscher_jan.pptx
@@ -5,10 +5,10 @@
     <p:sldMasterId id="2147483648" r:id="rId1"/>
   </p:sldMasterIdLst>
   <p:notesMasterIdLst>
-    <p:notesMasterId r:id="rId11"/>
+    <p:notesMasterId r:id="rId12"/>
   </p:notesMasterIdLst>
   <p:handoutMasterIdLst>
-    <p:handoutMasterId r:id="rId12"/>
+    <p:handoutMasterId r:id="rId13"/>
   </p:handoutMasterIdLst>
   <p:sldIdLst>
     <p:sldId id="256" r:id="rId2"/>
@@ -20,6 +20,7 @@
     <p:sldId id="260" r:id="rId8"/>
     <p:sldId id="261" r:id="rId9"/>
     <p:sldId id="263" r:id="rId10"/>
+    <p:sldId id="264" r:id="rId11"/>
   </p:sldIdLst>
   <p:sldSz cx="12192000" cy="6858000"/>
   <p:notesSz cx="6858000" cy="9144000"/>
@@ -1605,6 +1606,788 @@
     <dgm:fillClrLst meth="repeat">
       <a:schemeClr val="accent1">
         <a:tint val="60000"/>
+      </a:schemeClr>
+    </dgm:fillClrLst>
+    <dgm:linClrLst meth="repeat">
+      <a:schemeClr val="lt1"/>
+    </dgm:linClrLst>
+    <dgm:effectClrLst/>
+    <dgm:txLinClrLst/>
+    <dgm:txFillClrLst meth="repeat">
+      <a:schemeClr val="dk1"/>
+    </dgm:txFillClrLst>
+    <dgm:txEffectClrLst/>
+  </dgm:styleLbl>
+  <dgm:styleLbl name="revTx">
+    <dgm:fillClrLst meth="repeat">
+      <a:schemeClr val="lt1">
+        <a:alpha val="0"/>
+      </a:schemeClr>
+    </dgm:fillClrLst>
+    <dgm:linClrLst meth="repeat">
+      <a:schemeClr val="dk1">
+        <a:alpha val="0"/>
+      </a:schemeClr>
+    </dgm:linClrLst>
+    <dgm:effectClrLst/>
+    <dgm:txLinClrLst/>
+    <dgm:txFillClrLst meth="repeat">
+      <a:schemeClr val="tx1"/>
+    </dgm:txFillClrLst>
+    <dgm:txEffectClrLst/>
+  </dgm:styleLbl>
+</dgm:colorsDef>
+</file>
+
+<file path=ppt/diagrams/colors3.xml><?xml version="1.0" encoding="utf-8"?>
+<dgm:colorsDef xmlns:dgm="http://schemas.openxmlformats.org/drawingml/2006/diagram" xmlns:a="http://schemas.openxmlformats.org/drawingml/2006/main" uniqueId="urn:microsoft.com/office/officeart/2005/8/colors/colorful5">
+  <dgm:title val=""/>
+  <dgm:desc val=""/>
+  <dgm:catLst>
+    <dgm:cat type="colorful" pri="10500"/>
+  </dgm:catLst>
+  <dgm:styleLbl name="node0">
+    <dgm:fillClrLst meth="repeat">
+      <a:schemeClr val="accent4"/>
+    </dgm:fillClrLst>
+    <dgm:linClrLst meth="repeat">
+      <a:schemeClr val="lt1"/>
+    </dgm:linClrLst>
+    <dgm:effectClrLst/>
+    <dgm:txLinClrLst/>
+    <dgm:txFillClrLst/>
+    <dgm:txEffectClrLst/>
+  </dgm:styleLbl>
+  <dgm:styleLbl name="node1">
+    <dgm:fillClrLst>
+      <a:schemeClr val="accent5"/>
+      <a:schemeClr val="accent6"/>
+    </dgm:fillClrLst>
+    <dgm:linClrLst meth="repeat">
+      <a:schemeClr val="lt1"/>
+    </dgm:linClrLst>
+    <dgm:effectClrLst/>
+    <dgm:txLinClrLst/>
+    <dgm:txFillClrLst/>
+    <dgm:txEffectClrLst/>
+  </dgm:styleLbl>
+  <dgm:styleLbl name="alignNode1">
+    <dgm:fillClrLst>
+      <a:schemeClr val="accent5"/>
+      <a:schemeClr val="accent6"/>
+    </dgm:fillClrLst>
+    <dgm:linClrLst>
+      <a:schemeClr val="accent5"/>
+      <a:schemeClr val="accent6"/>
+    </dgm:linClrLst>
+    <dgm:effectClrLst/>
+    <dgm:txLinClrLst/>
+    <dgm:txFillClrLst/>
+    <dgm:txEffectClrLst/>
+  </dgm:styleLbl>
+  <dgm:styleLbl name="lnNode1">
+    <dgm:fillClrLst>
+      <a:schemeClr val="accent5"/>
+      <a:schemeClr val="accent6"/>
+    </dgm:fillClrLst>
+    <dgm:linClrLst meth="repeat">
+      <a:schemeClr val="lt1"/>
+    </dgm:linClrLst>
+    <dgm:effectClrLst/>
+    <dgm:txLinClrLst/>
+    <dgm:txFillClrLst/>
+    <dgm:txEffectClrLst/>
+  </dgm:styleLbl>
+  <dgm:styleLbl name="vennNode1">
+    <dgm:fillClrLst>
+      <a:schemeClr val="accent5">
+        <a:alpha val="50000"/>
+      </a:schemeClr>
+      <a:schemeClr val="accent6">
+        <a:alpha val="50000"/>
+      </a:schemeClr>
+    </dgm:fillClrLst>
+    <dgm:linClrLst meth="repeat">
+      <a:schemeClr val="lt1"/>
+    </dgm:linClrLst>
+    <dgm:effectClrLst/>
+    <dgm:txLinClrLst/>
+    <dgm:txFillClrLst/>
+    <dgm:txEffectClrLst/>
+  </dgm:styleLbl>
+  <dgm:styleLbl name="node2">
+    <dgm:fillClrLst>
+      <a:schemeClr val="accent6"/>
+    </dgm:fillClrLst>
+    <dgm:linClrLst meth="repeat">
+      <a:schemeClr val="lt1"/>
+    </dgm:linClrLst>
+    <dgm:effectClrLst/>
+    <dgm:txLinClrLst/>
+    <dgm:txFillClrLst/>
+    <dgm:txEffectClrLst/>
+  </dgm:styleLbl>
+  <dgm:styleLbl name="node3">
+    <dgm:fillClrLst>
+      <a:schemeClr val="accent1"/>
+    </dgm:fillClrLst>
+    <dgm:linClrLst meth="repeat">
+      <a:schemeClr val="lt1"/>
+    </dgm:linClrLst>
+    <dgm:effectClrLst/>
+    <dgm:txLinClrLst/>
+    <dgm:txFillClrLst/>
+    <dgm:txEffectClrLst/>
+  </dgm:styleLbl>
+  <dgm:styleLbl name="node4">
+    <dgm:fillClrLst>
+      <a:schemeClr val="accent2"/>
+    </dgm:fillClrLst>
+    <dgm:linClrLst meth="repeat">
+      <a:schemeClr val="lt1"/>
+    </dgm:linClrLst>
+    <dgm:effectClrLst/>
+    <dgm:txLinClrLst/>
+    <dgm:txFillClrLst/>
+    <dgm:txEffectClrLst/>
+  </dgm:styleLbl>
+  <dgm:styleLbl name="fgImgPlace1">
+    <dgm:fillClrLst>
+      <a:schemeClr val="accent5">
+        <a:tint val="50000"/>
+      </a:schemeClr>
+      <a:schemeClr val="accent6">
+        <a:tint val="50000"/>
+      </a:schemeClr>
+    </dgm:fillClrLst>
+    <dgm:linClrLst meth="repeat">
+      <a:schemeClr val="lt1"/>
+    </dgm:linClrLst>
+    <dgm:effectClrLst/>
+    <dgm:txLinClrLst/>
+    <dgm:txFillClrLst meth="repeat">
+      <a:schemeClr val="lt1"/>
+    </dgm:txFillClrLst>
+    <dgm:txEffectClrLst/>
+  </dgm:styleLbl>
+  <dgm:styleLbl name="alignImgPlace1">
+    <dgm:fillClrLst>
+      <a:schemeClr val="accent5">
+        <a:tint val="50000"/>
+      </a:schemeClr>
+      <a:schemeClr val="accent6">
+        <a:tint val="20000"/>
+      </a:schemeClr>
+    </dgm:fillClrLst>
+    <dgm:linClrLst meth="repeat">
+      <a:schemeClr val="lt1"/>
+    </dgm:linClrLst>
+    <dgm:effectClrLst/>
+    <dgm:txLinClrLst/>
+    <dgm:txFillClrLst meth="repeat">
+      <a:schemeClr val="lt1"/>
+    </dgm:txFillClrLst>
+    <dgm:txEffectClrLst/>
+  </dgm:styleLbl>
+  <dgm:styleLbl name="bgImgPlace1">
+    <dgm:fillClrLst>
+      <a:schemeClr val="accent5">
+        <a:tint val="50000"/>
+      </a:schemeClr>
+      <a:schemeClr val="accent6">
+        <a:tint val="20000"/>
+      </a:schemeClr>
+    </dgm:fillClrLst>
+    <dgm:linClrLst meth="repeat">
+      <a:schemeClr val="lt1"/>
+    </dgm:linClrLst>
+    <dgm:effectClrLst/>
+    <dgm:txLinClrLst/>
+    <dgm:txFillClrLst meth="repeat">
+      <a:schemeClr val="lt1"/>
+    </dgm:txFillClrLst>
+    <dgm:txEffectClrLst/>
+  </dgm:styleLbl>
+  <dgm:styleLbl name="sibTrans2D1">
+    <dgm:fillClrLst>
+      <a:schemeClr val="accent5"/>
+      <a:schemeClr val="accent6"/>
+    </dgm:fillClrLst>
+    <dgm:linClrLst meth="repeat">
+      <a:schemeClr val="lt1"/>
+    </dgm:linClrLst>
+    <dgm:effectClrLst/>
+    <dgm:txLinClrLst/>
+    <dgm:txFillClrLst/>
+    <dgm:txEffectClrLst/>
+  </dgm:styleLbl>
+  <dgm:styleLbl name="fgSibTrans2D1">
+    <dgm:fillClrLst>
+      <a:schemeClr val="accent5"/>
+      <a:schemeClr val="accent6"/>
+    </dgm:fillClrLst>
+    <dgm:linClrLst meth="repeat">
+      <a:schemeClr val="lt1"/>
+    </dgm:linClrLst>
+    <dgm:effectClrLst/>
+    <dgm:txLinClrLst/>
+    <dgm:txFillClrLst meth="repeat">
+      <a:schemeClr val="lt1"/>
+    </dgm:txFillClrLst>
+    <dgm:txEffectClrLst/>
+  </dgm:styleLbl>
+  <dgm:styleLbl name="bgSibTrans2D1">
+    <dgm:fillClrLst>
+      <a:schemeClr val="accent5"/>
+      <a:schemeClr val="accent6"/>
+    </dgm:fillClrLst>
+    <dgm:linClrLst meth="repeat">
+      <a:schemeClr val="lt1"/>
+    </dgm:linClrLst>
+    <dgm:effectClrLst/>
+    <dgm:txLinClrLst/>
+    <dgm:txFillClrLst meth="repeat">
+      <a:schemeClr val="lt1"/>
+    </dgm:txFillClrLst>
+    <dgm:txEffectClrLst/>
+  </dgm:styleLbl>
+  <dgm:styleLbl name="sibTrans1D1">
+    <dgm:fillClrLst/>
+    <dgm:linClrLst>
+      <a:schemeClr val="accent5"/>
+      <a:schemeClr val="accent6"/>
+    </dgm:linClrLst>
+    <dgm:effectClrLst/>
+    <dgm:txLinClrLst/>
+    <dgm:txFillClrLst meth="repeat">
+      <a:schemeClr val="tx1"/>
+    </dgm:txFillClrLst>
+    <dgm:txEffectClrLst/>
+  </dgm:styleLbl>
+  <dgm:styleLbl name="callout">
+    <dgm:fillClrLst meth="repeat">
+      <a:schemeClr val="accent5"/>
+    </dgm:fillClrLst>
+    <dgm:linClrLst meth="repeat">
+      <a:schemeClr val="accent5">
+        <a:tint val="50000"/>
+      </a:schemeClr>
+    </dgm:linClrLst>
+    <dgm:effectClrLst/>
+    <dgm:txLinClrLst/>
+    <dgm:txFillClrLst meth="repeat">
+      <a:schemeClr val="tx1"/>
+    </dgm:txFillClrLst>
+    <dgm:txEffectClrLst/>
+  </dgm:styleLbl>
+  <dgm:styleLbl name="asst0">
+    <dgm:fillClrLst meth="repeat">
+      <a:schemeClr val="accent5"/>
+    </dgm:fillClrLst>
+    <dgm:linClrLst meth="repeat">
+      <a:schemeClr val="lt1">
+        <a:shade val="80000"/>
+      </a:schemeClr>
+    </dgm:linClrLst>
+    <dgm:effectClrLst/>
+    <dgm:txLinClrLst/>
+    <dgm:txFillClrLst/>
+    <dgm:txEffectClrLst/>
+  </dgm:styleLbl>
+  <dgm:styleLbl name="asst1">
+    <dgm:fillClrLst meth="repeat">
+      <a:schemeClr val="accent6"/>
+    </dgm:fillClrLst>
+    <dgm:linClrLst meth="repeat">
+      <a:schemeClr val="lt1">
+        <a:shade val="80000"/>
+      </a:schemeClr>
+    </dgm:linClrLst>
+    <dgm:effectClrLst/>
+    <dgm:txLinClrLst/>
+    <dgm:txFillClrLst/>
+    <dgm:txEffectClrLst/>
+  </dgm:styleLbl>
+  <dgm:styleLbl name="asst2">
+    <dgm:fillClrLst>
+      <a:schemeClr val="accent1"/>
+    </dgm:fillClrLst>
+    <dgm:linClrLst meth="repeat">
+      <a:schemeClr val="lt1"/>
+    </dgm:linClrLst>
+    <dgm:effectClrLst/>
+    <dgm:txLinClrLst/>
+    <dgm:txFillClrLst/>
+    <dgm:txEffectClrLst/>
+  </dgm:styleLbl>
+  <dgm:styleLbl name="asst3">
+    <dgm:fillClrLst>
+      <a:schemeClr val="accent2"/>
+    </dgm:fillClrLst>
+    <dgm:linClrLst meth="repeat">
+      <a:schemeClr val="lt1"/>
+    </dgm:linClrLst>
+    <dgm:effectClrLst/>
+    <dgm:txLinClrLst/>
+    <dgm:txFillClrLst/>
+    <dgm:txEffectClrLst/>
+  </dgm:styleLbl>
+  <dgm:styleLbl name="asst4">
+    <dgm:fillClrLst>
+      <a:schemeClr val="accent3"/>
+    </dgm:fillClrLst>
+    <dgm:linClrLst meth="repeat">
+      <a:schemeClr val="lt1"/>
+    </dgm:linClrLst>
+    <dgm:effectClrLst/>
+    <dgm:txLinClrLst/>
+    <dgm:txFillClrLst/>
+    <dgm:txEffectClrLst/>
+  </dgm:styleLbl>
+  <dgm:styleLbl name="parChTrans2D1">
+    <dgm:fillClrLst meth="repeat">
+      <a:schemeClr val="accent5"/>
+    </dgm:fillClrLst>
+    <dgm:linClrLst meth="repeat">
+      <a:schemeClr val="lt1"/>
+    </dgm:linClrLst>
+    <dgm:effectClrLst/>
+    <dgm:txLinClrLst/>
+    <dgm:txFillClrLst meth="repeat">
+      <a:schemeClr val="lt1"/>
+    </dgm:txFillClrLst>
+    <dgm:txEffectClrLst/>
+  </dgm:styleLbl>
+  <dgm:styleLbl name="parChTrans2D2">
+    <dgm:fillClrLst meth="repeat">
+      <a:schemeClr val="accent6"/>
+    </dgm:fillClrLst>
+    <dgm:linClrLst meth="repeat">
+      <a:schemeClr val="lt1"/>
+    </dgm:linClrLst>
+    <dgm:effectClrLst/>
+    <dgm:txLinClrLst/>
+    <dgm:txFillClrLst/>
+    <dgm:txEffectClrLst/>
+  </dgm:styleLbl>
+  <dgm:styleLbl name="parChTrans2D3">
+    <dgm:fillClrLst meth="repeat">
+      <a:schemeClr val="accent6"/>
+    </dgm:fillClrLst>
+    <dgm:linClrLst meth="repeat">
+      <a:schemeClr val="lt1"/>
+    </dgm:linClrLst>
+    <dgm:effectClrLst/>
+    <dgm:txLinClrLst/>
+    <dgm:txFillClrLst/>
+    <dgm:txEffectClrLst/>
+  </dgm:styleLbl>
+  <dgm:styleLbl name="parChTrans2D4">
+    <dgm:fillClrLst meth="repeat">
+      <a:schemeClr val="accent1"/>
+    </dgm:fillClrLst>
+    <dgm:linClrLst meth="repeat">
+      <a:schemeClr val="lt1"/>
+    </dgm:linClrLst>
+    <dgm:effectClrLst/>
+    <dgm:txLinClrLst/>
+    <dgm:txFillClrLst meth="repeat">
+      <a:schemeClr val="lt1"/>
+    </dgm:txFillClrLst>
+    <dgm:txEffectClrLst/>
+  </dgm:styleLbl>
+  <dgm:styleLbl name="parChTrans1D1">
+    <dgm:fillClrLst meth="repeat">
+      <a:schemeClr val="accent5"/>
+    </dgm:fillClrLst>
+    <dgm:linClrLst meth="repeat">
+      <a:schemeClr val="accent5"/>
+    </dgm:linClrLst>
+    <dgm:effectClrLst/>
+    <dgm:txLinClrLst/>
+    <dgm:txFillClrLst meth="repeat">
+      <a:schemeClr val="tx1"/>
+    </dgm:txFillClrLst>
+    <dgm:txEffectClrLst/>
+  </dgm:styleLbl>
+  <dgm:styleLbl name="parChTrans1D2">
+    <dgm:fillClrLst meth="repeat">
+      <a:schemeClr val="accent6">
+        <a:tint val="90000"/>
+      </a:schemeClr>
+    </dgm:fillClrLst>
+    <dgm:linClrLst meth="repeat">
+      <a:schemeClr val="accent6"/>
+    </dgm:linClrLst>
+    <dgm:effectClrLst/>
+    <dgm:txLinClrLst/>
+    <dgm:txFillClrLst meth="repeat">
+      <a:schemeClr val="tx1"/>
+    </dgm:txFillClrLst>
+    <dgm:txEffectClrLst/>
+  </dgm:styleLbl>
+  <dgm:styleLbl name="parChTrans1D3">
+    <dgm:fillClrLst meth="repeat">
+      <a:schemeClr val="accent6">
+        <a:tint val="70000"/>
+      </a:schemeClr>
+    </dgm:fillClrLst>
+    <dgm:linClrLst meth="repeat">
+      <a:schemeClr val="accent1"/>
+    </dgm:linClrLst>
+    <dgm:effectClrLst/>
+    <dgm:txLinClrLst/>
+    <dgm:txFillClrLst meth="repeat">
+      <a:schemeClr val="tx1"/>
+    </dgm:txFillClrLst>
+    <dgm:txEffectClrLst/>
+  </dgm:styleLbl>
+  <dgm:styleLbl name="parChTrans1D4">
+    <dgm:fillClrLst meth="repeat">
+      <a:schemeClr val="accent6">
+        <a:tint val="50000"/>
+      </a:schemeClr>
+    </dgm:fillClrLst>
+    <dgm:linClrLst meth="repeat">
+      <a:schemeClr val="accent2"/>
+    </dgm:linClrLst>
+    <dgm:effectClrLst/>
+    <dgm:txLinClrLst/>
+    <dgm:txFillClrLst meth="repeat">
+      <a:schemeClr val="tx1"/>
+    </dgm:txFillClrLst>
+    <dgm:txEffectClrLst/>
+  </dgm:styleLbl>
+  <dgm:styleLbl name="fgAcc1">
+    <dgm:fillClrLst meth="repeat">
+      <a:schemeClr val="lt1">
+        <a:alpha val="90000"/>
+      </a:schemeClr>
+    </dgm:fillClrLst>
+    <dgm:linClrLst>
+      <a:schemeClr val="accent5"/>
+      <a:schemeClr val="accent6"/>
+    </dgm:linClrLst>
+    <dgm:effectClrLst/>
+    <dgm:txLinClrLst/>
+    <dgm:txFillClrLst meth="repeat">
+      <a:schemeClr val="dk1"/>
+    </dgm:txFillClrLst>
+    <dgm:txEffectClrLst/>
+  </dgm:styleLbl>
+  <dgm:styleLbl name="conFgAcc1">
+    <dgm:fillClrLst meth="repeat">
+      <a:schemeClr val="lt1">
+        <a:alpha val="90000"/>
+      </a:schemeClr>
+    </dgm:fillClrLst>
+    <dgm:linClrLst>
+      <a:schemeClr val="accent5"/>
+      <a:schemeClr val="accent6"/>
+    </dgm:linClrLst>
+    <dgm:effectClrLst/>
+    <dgm:txLinClrLst/>
+    <dgm:txFillClrLst meth="repeat">
+      <a:schemeClr val="dk1"/>
+    </dgm:txFillClrLst>
+    <dgm:txEffectClrLst/>
+  </dgm:styleLbl>
+  <dgm:styleLbl name="alignAcc1">
+    <dgm:fillClrLst meth="repeat">
+      <a:schemeClr val="lt1">
+        <a:alpha val="90000"/>
+      </a:schemeClr>
+    </dgm:fillClrLst>
+    <dgm:linClrLst>
+      <a:schemeClr val="accent5"/>
+      <a:schemeClr val="accent6"/>
+    </dgm:linClrLst>
+    <dgm:effectClrLst/>
+    <dgm:txLinClrLst/>
+    <dgm:txFillClrLst meth="repeat">
+      <a:schemeClr val="dk1"/>
+    </dgm:txFillClrLst>
+    <dgm:txEffectClrLst/>
+  </dgm:styleLbl>
+  <dgm:styleLbl name="trAlignAcc1">
+    <dgm:fillClrLst meth="repeat">
+      <a:schemeClr val="lt1">
+        <a:alpha val="40000"/>
+      </a:schemeClr>
+    </dgm:fillClrLst>
+    <dgm:linClrLst meth="repeat">
+      <a:schemeClr val="accent5"/>
+    </dgm:linClrLst>
+    <dgm:effectClrLst/>
+    <dgm:txLinClrLst/>
+    <dgm:txFillClrLst meth="repeat">
+      <a:schemeClr val="dk1"/>
+    </dgm:txFillClrLst>
+    <dgm:txEffectClrLst/>
+  </dgm:styleLbl>
+  <dgm:styleLbl name="bgAcc1">
+    <dgm:fillClrLst meth="repeat">
+      <a:schemeClr val="lt1">
+        <a:alpha val="90000"/>
+      </a:schemeClr>
+    </dgm:fillClrLst>
+    <dgm:linClrLst>
+      <a:schemeClr val="accent5"/>
+      <a:schemeClr val="accent6"/>
+    </dgm:linClrLst>
+    <dgm:effectClrLst/>
+    <dgm:txLinClrLst/>
+    <dgm:txFillClrLst meth="repeat">
+      <a:schemeClr val="dk1"/>
+    </dgm:txFillClrLst>
+    <dgm:txEffectClrLst/>
+  </dgm:styleLbl>
+  <dgm:styleLbl name="solidFgAcc1">
+    <dgm:fillClrLst meth="repeat">
+      <a:schemeClr val="lt1"/>
+    </dgm:fillClrLst>
+    <dgm:linClrLst>
+      <a:schemeClr val="accent5"/>
+      <a:schemeClr val="accent6"/>
+    </dgm:linClrLst>
+    <dgm:effectClrLst/>
+    <dgm:txLinClrLst/>
+    <dgm:txFillClrLst meth="repeat">
+      <a:schemeClr val="dk1"/>
+    </dgm:txFillClrLst>
+    <dgm:txEffectClrLst/>
+  </dgm:styleLbl>
+  <dgm:styleLbl name="solidAlignAcc1">
+    <dgm:fillClrLst meth="repeat">
+      <a:schemeClr val="lt1"/>
+    </dgm:fillClrLst>
+    <dgm:linClrLst>
+      <a:schemeClr val="accent5"/>
+      <a:schemeClr val="accent6"/>
+    </dgm:linClrLst>
+    <dgm:effectClrLst/>
+    <dgm:txLinClrLst/>
+    <dgm:txFillClrLst meth="repeat">
+      <a:schemeClr val="dk1"/>
+    </dgm:txFillClrLst>
+    <dgm:txEffectClrLst/>
+  </dgm:styleLbl>
+  <dgm:styleLbl name="solidBgAcc1">
+    <dgm:fillClrLst meth="repeat">
+      <a:schemeClr val="lt1"/>
+    </dgm:fillClrLst>
+    <dgm:linClrLst>
+      <a:schemeClr val="accent5"/>
+      <a:schemeClr val="accent6"/>
+    </dgm:linClrLst>
+    <dgm:effectClrLst/>
+    <dgm:txLinClrLst/>
+    <dgm:txFillClrLst meth="repeat">
+      <a:schemeClr val="dk1"/>
+    </dgm:txFillClrLst>
+    <dgm:txEffectClrLst/>
+  </dgm:styleLbl>
+  <dgm:styleLbl name="fgAccFollowNode1">
+    <dgm:fillClrLst>
+      <a:schemeClr val="accent5">
+        <a:tint val="40000"/>
+        <a:alpha val="90000"/>
+      </a:schemeClr>
+      <a:schemeClr val="accent6">
+        <a:tint val="40000"/>
+        <a:alpha val="90000"/>
+      </a:schemeClr>
+    </dgm:fillClrLst>
+    <dgm:linClrLst>
+      <a:schemeClr val="accent5">
+        <a:tint val="40000"/>
+        <a:alpha val="90000"/>
+      </a:schemeClr>
+      <a:schemeClr val="accent5">
+        <a:tint val="40000"/>
+        <a:alpha val="90000"/>
+      </a:schemeClr>
+    </dgm:linClrLst>
+    <dgm:effectClrLst/>
+    <dgm:txLinClrLst/>
+    <dgm:txFillClrLst meth="repeat">
+      <a:schemeClr val="dk1"/>
+    </dgm:txFillClrLst>
+    <dgm:txEffectClrLst/>
+  </dgm:styleLbl>
+  <dgm:styleLbl name="alignAccFollowNode1">
+    <dgm:fillClrLst>
+      <a:schemeClr val="accent5">
+        <a:tint val="40000"/>
+        <a:alpha val="90000"/>
+      </a:schemeClr>
+      <a:schemeClr val="accent6">
+        <a:tint val="40000"/>
+        <a:alpha val="90000"/>
+      </a:schemeClr>
+    </dgm:fillClrLst>
+    <dgm:linClrLst>
+      <a:schemeClr val="accent5">
+        <a:tint val="40000"/>
+        <a:alpha val="90000"/>
+      </a:schemeClr>
+      <a:schemeClr val="accent6">
+        <a:tint val="40000"/>
+        <a:alpha val="90000"/>
+      </a:schemeClr>
+    </dgm:linClrLst>
+    <dgm:effectClrLst/>
+    <dgm:txLinClrLst/>
+    <dgm:txFillClrLst meth="repeat">
+      <a:schemeClr val="dk1"/>
+    </dgm:txFillClrLst>
+    <dgm:txEffectClrLst/>
+  </dgm:styleLbl>
+  <dgm:styleLbl name="bgAccFollowNode1">
+    <dgm:fillClrLst>
+      <a:schemeClr val="accent5">
+        <a:tint val="40000"/>
+        <a:alpha val="90000"/>
+      </a:schemeClr>
+      <a:schemeClr val="accent6">
+        <a:tint val="40000"/>
+        <a:alpha val="90000"/>
+      </a:schemeClr>
+    </dgm:fillClrLst>
+    <dgm:linClrLst>
+      <a:schemeClr val="accent5">
+        <a:tint val="40000"/>
+        <a:alpha val="90000"/>
+      </a:schemeClr>
+      <a:schemeClr val="accent6">
+        <a:tint val="40000"/>
+        <a:alpha val="90000"/>
+      </a:schemeClr>
+    </dgm:linClrLst>
+    <dgm:effectClrLst/>
+    <dgm:txLinClrLst/>
+    <dgm:txFillClrLst meth="repeat">
+      <a:schemeClr val="dk1"/>
+    </dgm:txFillClrLst>
+    <dgm:txEffectClrLst/>
+  </dgm:styleLbl>
+  <dgm:styleLbl name="fgAcc0">
+    <dgm:fillClrLst meth="repeat">
+      <a:schemeClr val="lt1">
+        <a:alpha val="90000"/>
+      </a:schemeClr>
+    </dgm:fillClrLst>
+    <dgm:linClrLst>
+      <a:schemeClr val="accent4"/>
+    </dgm:linClrLst>
+    <dgm:effectClrLst/>
+    <dgm:txLinClrLst/>
+    <dgm:txFillClrLst meth="repeat">
+      <a:schemeClr val="dk1"/>
+    </dgm:txFillClrLst>
+    <dgm:txEffectClrLst/>
+  </dgm:styleLbl>
+  <dgm:styleLbl name="fgAcc2">
+    <dgm:fillClrLst meth="repeat">
+      <a:schemeClr val="lt1">
+        <a:alpha val="90000"/>
+      </a:schemeClr>
+    </dgm:fillClrLst>
+    <dgm:linClrLst>
+      <a:schemeClr val="accent6"/>
+    </dgm:linClrLst>
+    <dgm:effectClrLst/>
+    <dgm:txLinClrLst/>
+    <dgm:txFillClrLst meth="repeat">
+      <a:schemeClr val="dk1"/>
+    </dgm:txFillClrLst>
+    <dgm:txEffectClrLst/>
+  </dgm:styleLbl>
+  <dgm:styleLbl name="fgAcc3">
+    <dgm:fillClrLst meth="repeat">
+      <a:schemeClr val="lt1">
+        <a:alpha val="90000"/>
+      </a:schemeClr>
+    </dgm:fillClrLst>
+    <dgm:linClrLst>
+      <a:schemeClr val="accent1"/>
+    </dgm:linClrLst>
+    <dgm:effectClrLst/>
+    <dgm:txLinClrLst/>
+    <dgm:txFillClrLst meth="repeat">
+      <a:schemeClr val="dk1"/>
+    </dgm:txFillClrLst>
+    <dgm:txEffectClrLst/>
+  </dgm:styleLbl>
+  <dgm:styleLbl name="fgAcc4">
+    <dgm:fillClrLst meth="repeat">
+      <a:schemeClr val="lt1">
+        <a:alpha val="90000"/>
+      </a:schemeClr>
+    </dgm:fillClrLst>
+    <dgm:linClrLst>
+      <a:schemeClr val="accent2"/>
+    </dgm:linClrLst>
+    <dgm:effectClrLst/>
+    <dgm:txLinClrLst/>
+    <dgm:txFillClrLst meth="repeat">
+      <a:schemeClr val="dk1"/>
+    </dgm:txFillClrLst>
+    <dgm:txEffectClrLst/>
+  </dgm:styleLbl>
+  <dgm:styleLbl name="bgShp">
+    <dgm:fillClrLst meth="repeat">
+      <a:schemeClr val="accent5">
+        <a:tint val="40000"/>
+      </a:schemeClr>
+    </dgm:fillClrLst>
+    <dgm:linClrLst meth="repeat">
+      <a:schemeClr val="dk1"/>
+    </dgm:linClrLst>
+    <dgm:effectClrLst/>
+    <dgm:txLinClrLst/>
+    <dgm:txFillClrLst meth="repeat">
+      <a:schemeClr val="dk1"/>
+    </dgm:txFillClrLst>
+    <dgm:txEffectClrLst/>
+  </dgm:styleLbl>
+  <dgm:styleLbl name="dkBgShp">
+    <dgm:fillClrLst meth="repeat">
+      <a:schemeClr val="accent5">
+        <a:shade val="90000"/>
+      </a:schemeClr>
+    </dgm:fillClrLst>
+    <dgm:linClrLst meth="repeat">
+      <a:schemeClr val="dk1"/>
+    </dgm:linClrLst>
+    <dgm:effectClrLst/>
+    <dgm:txLinClrLst/>
+    <dgm:txFillClrLst meth="repeat">
+      <a:schemeClr val="lt1"/>
+    </dgm:txFillClrLst>
+    <dgm:txEffectClrLst/>
+  </dgm:styleLbl>
+  <dgm:styleLbl name="trBgShp">
+    <dgm:fillClrLst meth="repeat">
+      <a:schemeClr val="accent5">
+        <a:tint val="50000"/>
+        <a:alpha val="40000"/>
+      </a:schemeClr>
+    </dgm:fillClrLst>
+    <dgm:linClrLst meth="repeat">
+      <a:schemeClr val="accent5"/>
+    </dgm:linClrLst>
+    <dgm:effectClrLst/>
+    <dgm:txLinClrLst/>
+    <dgm:txFillClrLst meth="repeat">
+      <a:schemeClr val="lt1"/>
+    </dgm:txFillClrLst>
+    <dgm:txEffectClrLst/>
+  </dgm:styleLbl>
+  <dgm:styleLbl name="fgShp">
+    <dgm:fillClrLst meth="repeat">
+      <a:schemeClr val="accent5">
+        <a:tint val="40000"/>
       </a:schemeClr>
     </dgm:fillClrLst>
     <dgm:linClrLst meth="repeat">
@@ -1779,8 +2562,20 @@
         <a:lstStyle/>
         <a:p>
           <a:r>
+            <a:rPr lang="en-US" dirty="0"/>
+            <a:t>PHP </a:t>
+          </a:r>
+          <a:r>
             <a:rPr lang="en-US" dirty="0" err="1"/>
-            <a:t>Registrierungsfunktion</a:t>
+            <a:t>nicht</a:t>
+          </a:r>
+          <a:r>
+            <a:rPr lang="en-US" dirty="0"/>
+            <a:t> </a:t>
+          </a:r>
+          <a:r>
+            <a:rPr lang="en-US" dirty="0" err="1"/>
+            <a:t>sauber</a:t>
           </a:r>
           <a:endParaRPr lang="en-US" dirty="0"/>
         </a:p>
@@ -2295,6 +3090,422 @@
 </dgm:dataModel>
 </file>
 
+<file path=ppt/diagrams/data3.xml><?xml version="1.0" encoding="utf-8"?>
+<dgm:dataModel xmlns:dgm="http://schemas.openxmlformats.org/drawingml/2006/diagram" xmlns:a="http://schemas.openxmlformats.org/drawingml/2006/main">
+  <dgm:ptLst>
+    <dgm:pt modelId="{D0780575-06BE-4DCB-B4F9-2123D2534180}" type="doc">
+      <dgm:prSet loTypeId="urn:microsoft.com/office/officeart/2008/layout/LinedList" loCatId="list" qsTypeId="urn:microsoft.com/office/officeart/2005/8/quickstyle/simple4" qsCatId="simple" csTypeId="urn:microsoft.com/office/officeart/2005/8/colors/colorful5" csCatId="colorful" phldr="1"/>
+      <dgm:spPr/>
+      <dgm:t>
+        <a:bodyPr/>
+        <a:lstStyle/>
+        <a:p>
+          <a:endParaRPr lang="en-US"/>
+        </a:p>
+      </dgm:t>
+    </dgm:pt>
+    <dgm:pt modelId="{83439E4E-44F5-4B66-BE54-EDBB748A3FB0}">
+      <dgm:prSet/>
+      <dgm:spPr/>
+      <dgm:t>
+        <a:bodyPr/>
+        <a:lstStyle/>
+        <a:p>
+          <a:r>
+            <a:rPr lang="de-DE" dirty="0"/>
+            <a:t>Stack Overflow 		</a:t>
+          </a:r>
+          <a:r>
+            <a:rPr lang="de-DE" dirty="0">
+              <a:sym typeface="Wingdings" panose="05000000000000000000" pitchFamily="2" charset="2"/>
+            </a:rPr>
+            <a:t> </a:t>
+          </a:r>
+          <a:r>
+            <a:rPr lang="de-CH" dirty="0">
+              <a:hlinkClick xmlns:r="http://schemas.openxmlformats.org/officeDocument/2006/relationships" r:id="rId1"/>
+            </a:rPr>
+            <a:t>https://stackoverflow.com</a:t>
+          </a:r>
+          <a:endParaRPr lang="de-CH" dirty="0"/>
+        </a:p>
+      </dgm:t>
+    </dgm:pt>
+    <dgm:pt modelId="{7F5F6480-17A0-4BD9-AB34-64F773203997}" type="parTrans" cxnId="{30A886AB-8D08-496F-AB89-F983B5BCF7B1}">
+      <dgm:prSet/>
+      <dgm:spPr/>
+      <dgm:t>
+        <a:bodyPr/>
+        <a:lstStyle/>
+        <a:p>
+          <a:endParaRPr lang="de-CH"/>
+        </a:p>
+      </dgm:t>
+    </dgm:pt>
+    <dgm:pt modelId="{66C626B4-3F52-469A-ABC9-1FB2B91433D9}" type="sibTrans" cxnId="{30A886AB-8D08-496F-AB89-F983B5BCF7B1}">
+      <dgm:prSet/>
+      <dgm:spPr/>
+      <dgm:t>
+        <a:bodyPr/>
+        <a:lstStyle/>
+        <a:p>
+          <a:endParaRPr lang="de-CH"/>
+        </a:p>
+      </dgm:t>
+    </dgm:pt>
+    <dgm:pt modelId="{A064DCAF-EE9F-44EA-9A03-6CAEB426C706}">
+      <dgm:prSet/>
+      <dgm:spPr/>
+      <dgm:t>
+        <a:bodyPr/>
+        <a:lstStyle/>
+        <a:p>
+          <a:r>
+            <a:rPr lang="de-DE" dirty="0"/>
+            <a:t>Microsoft Dokumentation </a:t>
+          </a:r>
+          <a:r>
+            <a:rPr lang="de-DE" dirty="0">
+              <a:sym typeface="Wingdings" panose="05000000000000000000" pitchFamily="2" charset="2"/>
+            </a:rPr>
+            <a:t> </a:t>
+          </a:r>
+          <a:r>
+            <a:rPr lang="de-CH" dirty="0">
+              <a:hlinkClick xmlns:r="http://schemas.openxmlformats.org/officeDocument/2006/relationships" r:id="rId2"/>
+            </a:rPr>
+            <a:t>https://docs.microsoft.com</a:t>
+          </a:r>
+          <a:r>
+            <a:rPr lang="de-CH" dirty="0"/>
+            <a:t> </a:t>
+          </a:r>
+          <a:r>
+            <a:rPr lang="de-DE" dirty="0">
+              <a:sym typeface="Wingdings" panose="05000000000000000000" pitchFamily="2" charset="2"/>
+            </a:rPr>
+            <a:t> </a:t>
+          </a:r>
+          <a:endParaRPr lang="de-CH" dirty="0"/>
+        </a:p>
+      </dgm:t>
+    </dgm:pt>
+    <dgm:pt modelId="{9757004B-5686-4242-913D-F2BC95C0D6D1}" type="parTrans" cxnId="{43EA1174-7FA0-418B-8A0C-1C2396861626}">
+      <dgm:prSet/>
+      <dgm:spPr/>
+      <dgm:t>
+        <a:bodyPr/>
+        <a:lstStyle/>
+        <a:p>
+          <a:endParaRPr lang="de-CH"/>
+        </a:p>
+      </dgm:t>
+    </dgm:pt>
+    <dgm:pt modelId="{577287AE-B128-468E-9E6A-82D1D83F936C}" type="sibTrans" cxnId="{43EA1174-7FA0-418B-8A0C-1C2396861626}">
+      <dgm:prSet/>
+      <dgm:spPr/>
+      <dgm:t>
+        <a:bodyPr/>
+        <a:lstStyle/>
+        <a:p>
+          <a:endParaRPr lang="de-CH"/>
+        </a:p>
+      </dgm:t>
+    </dgm:pt>
+    <dgm:pt modelId="{0C128FDE-8D45-469E-BFE8-AF9BDD829549}">
+      <dgm:prSet/>
+      <dgm:spPr/>
+      <dgm:t>
+        <a:bodyPr/>
+        <a:lstStyle/>
+        <a:p>
+          <a:r>
+            <a:rPr lang="de-CH" dirty="0"/>
+            <a:t>GitHub 			</a:t>
+          </a:r>
+          <a:r>
+            <a:rPr lang="de-CH" dirty="0">
+              <a:sym typeface="Wingdings" panose="05000000000000000000" pitchFamily="2" charset="2"/>
+            </a:rPr>
+            <a:t> </a:t>
+          </a:r>
+          <a:r>
+            <a:rPr lang="de-CH" dirty="0">
+              <a:hlinkClick xmlns:r="http://schemas.openxmlformats.org/officeDocument/2006/relationships" r:id="rId3"/>
+            </a:rPr>
+            <a:t>https://github.com</a:t>
+          </a:r>
+          <a:r>
+            <a:rPr lang="de-CH" dirty="0"/>
+            <a:t> </a:t>
+          </a:r>
+        </a:p>
+      </dgm:t>
+    </dgm:pt>
+    <dgm:pt modelId="{FCBD32E3-ECA5-4850-92CA-28E424525B41}" type="parTrans" cxnId="{430C6A05-9EDC-450E-B933-08E65E290B46}">
+      <dgm:prSet/>
+      <dgm:spPr/>
+      <dgm:t>
+        <a:bodyPr/>
+        <a:lstStyle/>
+        <a:p>
+          <a:endParaRPr lang="de-CH"/>
+        </a:p>
+      </dgm:t>
+    </dgm:pt>
+    <dgm:pt modelId="{D7AA0C0A-78D0-4D19-BDD3-C4F3DC32272F}" type="sibTrans" cxnId="{430C6A05-9EDC-450E-B933-08E65E290B46}">
+      <dgm:prSet/>
+      <dgm:spPr/>
+      <dgm:t>
+        <a:bodyPr/>
+        <a:lstStyle/>
+        <a:p>
+          <a:endParaRPr lang="de-CH"/>
+        </a:p>
+      </dgm:t>
+    </dgm:pt>
+    <dgm:pt modelId="{CD5B50B2-C93C-4811-BB7E-37F30F456237}">
+      <dgm:prSet/>
+      <dgm:spPr/>
+      <dgm:t>
+        <a:bodyPr/>
+        <a:lstStyle/>
+        <a:p>
+          <a:r>
+            <a:rPr lang="de-DE" dirty="0"/>
+            <a:t>PHP-Dokumentation 	</a:t>
+          </a:r>
+          <a:r>
+            <a:rPr lang="de-DE" dirty="0">
+              <a:sym typeface="Wingdings" panose="05000000000000000000" pitchFamily="2" charset="2"/>
+            </a:rPr>
+            <a:t> </a:t>
+          </a:r>
+          <a:r>
+            <a:rPr lang="de-CH" dirty="0">
+              <a:hlinkClick xmlns:r="http://schemas.openxmlformats.org/officeDocument/2006/relationships" r:id="rId4"/>
+            </a:rPr>
+            <a:t>https://www.php.net/docs.php</a:t>
+          </a:r>
+          <a:r>
+            <a:rPr lang="de-CH" dirty="0"/>
+            <a:t> </a:t>
+          </a:r>
+        </a:p>
+      </dgm:t>
+    </dgm:pt>
+    <dgm:pt modelId="{450D38C1-F2E2-4FD2-B452-4AE77F8B60F6}" type="parTrans" cxnId="{9D870FD8-E9FB-4BC1-BAD2-D34D89BC03AD}">
+      <dgm:prSet/>
+      <dgm:spPr/>
+      <dgm:t>
+        <a:bodyPr/>
+        <a:lstStyle/>
+        <a:p>
+          <a:endParaRPr lang="de-CH"/>
+        </a:p>
+      </dgm:t>
+    </dgm:pt>
+    <dgm:pt modelId="{517772AE-B0A2-4A50-840D-BDDE8BBAEBA4}" type="sibTrans" cxnId="{9D870FD8-E9FB-4BC1-BAD2-D34D89BC03AD}">
+      <dgm:prSet/>
+      <dgm:spPr/>
+      <dgm:t>
+        <a:bodyPr/>
+        <a:lstStyle/>
+        <a:p>
+          <a:endParaRPr lang="de-CH"/>
+        </a:p>
+      </dgm:t>
+    </dgm:pt>
+    <dgm:pt modelId="{D18937EE-AE6B-4AF8-B4A9-3F921E121684}">
+      <dgm:prSet/>
+      <dgm:spPr/>
+      <dgm:t>
+        <a:bodyPr/>
+        <a:lstStyle/>
+        <a:p>
+          <a:r>
+            <a:rPr lang="de-CH" dirty="0"/>
+            <a:t>Gemini 			</a:t>
+          </a:r>
+          <a:r>
+            <a:rPr lang="de-CH" dirty="0">
+              <a:sym typeface="Wingdings" panose="05000000000000000000" pitchFamily="2" charset="2"/>
+            </a:rPr>
+            <a:t> </a:t>
+          </a:r>
+          <a:r>
+            <a:rPr lang="de-CH" dirty="0">
+              <a:sym typeface="Wingdings" panose="05000000000000000000" pitchFamily="2" charset="2"/>
+              <a:hlinkClick xmlns:r="http://schemas.openxmlformats.org/officeDocument/2006/relationships" r:id="rId5"/>
+            </a:rPr>
+            <a:t>https://gemini.google.com</a:t>
+          </a:r>
+          <a:r>
+            <a:rPr lang="de-CH" dirty="0">
+              <a:sym typeface="Wingdings" panose="05000000000000000000" pitchFamily="2" charset="2"/>
+            </a:rPr>
+            <a:t> </a:t>
+          </a:r>
+          <a:endParaRPr lang="de-CH" dirty="0"/>
+        </a:p>
+      </dgm:t>
+    </dgm:pt>
+    <dgm:pt modelId="{60C16312-8DC9-45DB-A139-615E7FB86DAB}" type="parTrans" cxnId="{46A5B6E3-FDB1-4DF8-90B3-3899C51A7D44}">
+      <dgm:prSet/>
+      <dgm:spPr/>
+      <dgm:t>
+        <a:bodyPr/>
+        <a:lstStyle/>
+        <a:p>
+          <a:endParaRPr lang="de-CH"/>
+        </a:p>
+      </dgm:t>
+    </dgm:pt>
+    <dgm:pt modelId="{ADE0D32F-CE9E-418C-8920-698E1D36E03F}" type="sibTrans" cxnId="{46A5B6E3-FDB1-4DF8-90B3-3899C51A7D44}">
+      <dgm:prSet/>
+      <dgm:spPr/>
+      <dgm:t>
+        <a:bodyPr/>
+        <a:lstStyle/>
+        <a:p>
+          <a:endParaRPr lang="de-CH"/>
+        </a:p>
+      </dgm:t>
+    </dgm:pt>
+    <dgm:pt modelId="{6ACA2947-2116-4A08-99E1-173B8F55FFF6}" type="pres">
+      <dgm:prSet presAssocID="{D0780575-06BE-4DCB-B4F9-2123D2534180}" presName="vert0" presStyleCnt="0">
+        <dgm:presLayoutVars>
+          <dgm:dir/>
+          <dgm:animOne val="branch"/>
+          <dgm:animLvl val="lvl"/>
+        </dgm:presLayoutVars>
+      </dgm:prSet>
+      <dgm:spPr/>
+    </dgm:pt>
+    <dgm:pt modelId="{C84EBEAF-8B4B-45DC-A614-217E0D3891E6}" type="pres">
+      <dgm:prSet presAssocID="{83439E4E-44F5-4B66-BE54-EDBB748A3FB0}" presName="thickLine" presStyleLbl="alignNode1" presStyleIdx="0" presStyleCnt="5"/>
+      <dgm:spPr/>
+    </dgm:pt>
+    <dgm:pt modelId="{49640A91-3EAC-411A-AB2D-AE5D64844ED5}" type="pres">
+      <dgm:prSet presAssocID="{83439E4E-44F5-4B66-BE54-EDBB748A3FB0}" presName="horz1" presStyleCnt="0"/>
+      <dgm:spPr/>
+    </dgm:pt>
+    <dgm:pt modelId="{B1BEDD63-A24B-4B4C-BE63-43F789EE5A9B}" type="pres">
+      <dgm:prSet presAssocID="{83439E4E-44F5-4B66-BE54-EDBB748A3FB0}" presName="tx1" presStyleLbl="revTx" presStyleIdx="0" presStyleCnt="5"/>
+      <dgm:spPr/>
+    </dgm:pt>
+    <dgm:pt modelId="{BE552D50-76E9-4723-B737-8598BE66CA60}" type="pres">
+      <dgm:prSet presAssocID="{83439E4E-44F5-4B66-BE54-EDBB748A3FB0}" presName="vert1" presStyleCnt="0"/>
+      <dgm:spPr/>
+    </dgm:pt>
+    <dgm:pt modelId="{974648E8-C7C6-407D-A088-0F3AC4500E26}" type="pres">
+      <dgm:prSet presAssocID="{A064DCAF-EE9F-44EA-9A03-6CAEB426C706}" presName="thickLine" presStyleLbl="alignNode1" presStyleIdx="1" presStyleCnt="5"/>
+      <dgm:spPr/>
+    </dgm:pt>
+    <dgm:pt modelId="{7934C6A5-669E-4E31-8341-C172377C0C57}" type="pres">
+      <dgm:prSet presAssocID="{A064DCAF-EE9F-44EA-9A03-6CAEB426C706}" presName="horz1" presStyleCnt="0"/>
+      <dgm:spPr/>
+    </dgm:pt>
+    <dgm:pt modelId="{11741146-DF03-47EA-BBB9-1CC165BA3294}" type="pres">
+      <dgm:prSet presAssocID="{A064DCAF-EE9F-44EA-9A03-6CAEB426C706}" presName="tx1" presStyleLbl="revTx" presStyleIdx="1" presStyleCnt="5"/>
+      <dgm:spPr/>
+    </dgm:pt>
+    <dgm:pt modelId="{D9BECD35-A21F-41BF-A32F-3792BAA969D9}" type="pres">
+      <dgm:prSet presAssocID="{A064DCAF-EE9F-44EA-9A03-6CAEB426C706}" presName="vert1" presStyleCnt="0"/>
+      <dgm:spPr/>
+    </dgm:pt>
+    <dgm:pt modelId="{D2ECB220-B136-4EE6-84E5-80855960187B}" type="pres">
+      <dgm:prSet presAssocID="{0C128FDE-8D45-469E-BFE8-AF9BDD829549}" presName="thickLine" presStyleLbl="alignNode1" presStyleIdx="2" presStyleCnt="5"/>
+      <dgm:spPr/>
+    </dgm:pt>
+    <dgm:pt modelId="{6B879357-31A7-4B3E-AE61-ED6D0B68A098}" type="pres">
+      <dgm:prSet presAssocID="{0C128FDE-8D45-469E-BFE8-AF9BDD829549}" presName="horz1" presStyleCnt="0"/>
+      <dgm:spPr/>
+    </dgm:pt>
+    <dgm:pt modelId="{08CBD920-D51E-4968-8C99-100C302C9B28}" type="pres">
+      <dgm:prSet presAssocID="{0C128FDE-8D45-469E-BFE8-AF9BDD829549}" presName="tx1" presStyleLbl="revTx" presStyleIdx="2" presStyleCnt="5"/>
+      <dgm:spPr/>
+    </dgm:pt>
+    <dgm:pt modelId="{E16F828E-5AEF-4E6F-97DD-21683383D5C5}" type="pres">
+      <dgm:prSet presAssocID="{0C128FDE-8D45-469E-BFE8-AF9BDD829549}" presName="vert1" presStyleCnt="0"/>
+      <dgm:spPr/>
+    </dgm:pt>
+    <dgm:pt modelId="{CD5DEFA4-FC9E-4E50-B6D5-6F9A430C09C0}" type="pres">
+      <dgm:prSet presAssocID="{CD5B50B2-C93C-4811-BB7E-37F30F456237}" presName="thickLine" presStyleLbl="alignNode1" presStyleIdx="3" presStyleCnt="5"/>
+      <dgm:spPr/>
+    </dgm:pt>
+    <dgm:pt modelId="{B2BFD470-C9DA-4476-AC97-2246D5E9F5BD}" type="pres">
+      <dgm:prSet presAssocID="{CD5B50B2-C93C-4811-BB7E-37F30F456237}" presName="horz1" presStyleCnt="0"/>
+      <dgm:spPr/>
+    </dgm:pt>
+    <dgm:pt modelId="{19B43A0B-B17A-42C3-8262-2D3BD76AF095}" type="pres">
+      <dgm:prSet presAssocID="{CD5B50B2-C93C-4811-BB7E-37F30F456237}" presName="tx1" presStyleLbl="revTx" presStyleIdx="3" presStyleCnt="5"/>
+      <dgm:spPr/>
+    </dgm:pt>
+    <dgm:pt modelId="{A68805D8-75A3-4874-B448-FB96522BEC6C}" type="pres">
+      <dgm:prSet presAssocID="{CD5B50B2-C93C-4811-BB7E-37F30F456237}" presName="vert1" presStyleCnt="0"/>
+      <dgm:spPr/>
+    </dgm:pt>
+    <dgm:pt modelId="{BCDD0124-E17E-43B1-83E3-EAC231157F40}" type="pres">
+      <dgm:prSet presAssocID="{D18937EE-AE6B-4AF8-B4A9-3F921E121684}" presName="thickLine" presStyleLbl="alignNode1" presStyleIdx="4" presStyleCnt="5"/>
+      <dgm:spPr/>
+    </dgm:pt>
+    <dgm:pt modelId="{097A0F8E-2311-48C7-B711-947B76B739F9}" type="pres">
+      <dgm:prSet presAssocID="{D18937EE-AE6B-4AF8-B4A9-3F921E121684}" presName="horz1" presStyleCnt="0"/>
+      <dgm:spPr/>
+    </dgm:pt>
+    <dgm:pt modelId="{36B3A5B8-B50C-4E40-B3EC-3A2B52649CAA}" type="pres">
+      <dgm:prSet presAssocID="{D18937EE-AE6B-4AF8-B4A9-3F921E121684}" presName="tx1" presStyleLbl="revTx" presStyleIdx="4" presStyleCnt="5"/>
+      <dgm:spPr/>
+    </dgm:pt>
+    <dgm:pt modelId="{E67BBE67-6BA8-4FA4-B498-654A90BF6DBB}" type="pres">
+      <dgm:prSet presAssocID="{D18937EE-AE6B-4AF8-B4A9-3F921E121684}" presName="vert1" presStyleCnt="0"/>
+      <dgm:spPr/>
+    </dgm:pt>
+  </dgm:ptLst>
+  <dgm:cxnLst>
+    <dgm:cxn modelId="{430C6A05-9EDC-450E-B933-08E65E290B46}" srcId="{D0780575-06BE-4DCB-B4F9-2123D2534180}" destId="{0C128FDE-8D45-469E-BFE8-AF9BDD829549}" srcOrd="2" destOrd="0" parTransId="{FCBD32E3-ECA5-4850-92CA-28E424525B41}" sibTransId="{D7AA0C0A-78D0-4D19-BDD3-C4F3DC32272F}"/>
+    <dgm:cxn modelId="{38DC2A15-2464-4062-9961-155B7A7875D1}" type="presOf" srcId="{D0780575-06BE-4DCB-B4F9-2123D2534180}" destId="{6ACA2947-2116-4A08-99E1-173B8F55FFF6}" srcOrd="0" destOrd="0" presId="urn:microsoft.com/office/officeart/2008/layout/LinedList"/>
+    <dgm:cxn modelId="{1AA0A332-28D2-414B-94A8-E2992DCFF9D1}" type="presOf" srcId="{CD5B50B2-C93C-4811-BB7E-37F30F456237}" destId="{19B43A0B-B17A-42C3-8262-2D3BD76AF095}" srcOrd="0" destOrd="0" presId="urn:microsoft.com/office/officeart/2008/layout/LinedList"/>
+    <dgm:cxn modelId="{DC34C672-A046-423A-A436-C2C0E7DBDA40}" type="presOf" srcId="{0C128FDE-8D45-469E-BFE8-AF9BDD829549}" destId="{08CBD920-D51E-4968-8C99-100C302C9B28}" srcOrd="0" destOrd="0" presId="urn:microsoft.com/office/officeart/2008/layout/LinedList"/>
+    <dgm:cxn modelId="{43EA1174-7FA0-418B-8A0C-1C2396861626}" srcId="{D0780575-06BE-4DCB-B4F9-2123D2534180}" destId="{A064DCAF-EE9F-44EA-9A03-6CAEB426C706}" srcOrd="1" destOrd="0" parTransId="{9757004B-5686-4242-913D-F2BC95C0D6D1}" sibTransId="{577287AE-B128-468E-9E6A-82D1D83F936C}"/>
+    <dgm:cxn modelId="{D0A3D57E-865D-4796-96DB-B29690564BA3}" type="presOf" srcId="{83439E4E-44F5-4B66-BE54-EDBB748A3FB0}" destId="{B1BEDD63-A24B-4B4C-BE63-43F789EE5A9B}" srcOrd="0" destOrd="0" presId="urn:microsoft.com/office/officeart/2008/layout/LinedList"/>
+    <dgm:cxn modelId="{B7588F96-DAF4-45A4-8CA6-129BCFFEC37F}" type="presOf" srcId="{A064DCAF-EE9F-44EA-9A03-6CAEB426C706}" destId="{11741146-DF03-47EA-BBB9-1CC165BA3294}" srcOrd="0" destOrd="0" presId="urn:microsoft.com/office/officeart/2008/layout/LinedList"/>
+    <dgm:cxn modelId="{30A886AB-8D08-496F-AB89-F983B5BCF7B1}" srcId="{D0780575-06BE-4DCB-B4F9-2123D2534180}" destId="{83439E4E-44F5-4B66-BE54-EDBB748A3FB0}" srcOrd="0" destOrd="0" parTransId="{7F5F6480-17A0-4BD9-AB34-64F773203997}" sibTransId="{66C626B4-3F52-469A-ABC9-1FB2B91433D9}"/>
+    <dgm:cxn modelId="{F8A085B7-E509-4C50-9311-14A4673AA9AD}" type="presOf" srcId="{D18937EE-AE6B-4AF8-B4A9-3F921E121684}" destId="{36B3A5B8-B50C-4E40-B3EC-3A2B52649CAA}" srcOrd="0" destOrd="0" presId="urn:microsoft.com/office/officeart/2008/layout/LinedList"/>
+    <dgm:cxn modelId="{9D870FD8-E9FB-4BC1-BAD2-D34D89BC03AD}" srcId="{D0780575-06BE-4DCB-B4F9-2123D2534180}" destId="{CD5B50B2-C93C-4811-BB7E-37F30F456237}" srcOrd="3" destOrd="0" parTransId="{450D38C1-F2E2-4FD2-B452-4AE77F8B60F6}" sibTransId="{517772AE-B0A2-4A50-840D-BDDE8BBAEBA4}"/>
+    <dgm:cxn modelId="{46A5B6E3-FDB1-4DF8-90B3-3899C51A7D44}" srcId="{D0780575-06BE-4DCB-B4F9-2123D2534180}" destId="{D18937EE-AE6B-4AF8-B4A9-3F921E121684}" srcOrd="4" destOrd="0" parTransId="{60C16312-8DC9-45DB-A139-615E7FB86DAB}" sibTransId="{ADE0D32F-CE9E-418C-8920-698E1D36E03F}"/>
+    <dgm:cxn modelId="{2AF04196-C553-4408-BF2E-7E22261A5B2A}" type="presParOf" srcId="{6ACA2947-2116-4A08-99E1-173B8F55FFF6}" destId="{C84EBEAF-8B4B-45DC-A614-217E0D3891E6}" srcOrd="0" destOrd="0" presId="urn:microsoft.com/office/officeart/2008/layout/LinedList"/>
+    <dgm:cxn modelId="{C5D39652-6E48-4012-9599-73988A9EA861}" type="presParOf" srcId="{6ACA2947-2116-4A08-99E1-173B8F55FFF6}" destId="{49640A91-3EAC-411A-AB2D-AE5D64844ED5}" srcOrd="1" destOrd="0" presId="urn:microsoft.com/office/officeart/2008/layout/LinedList"/>
+    <dgm:cxn modelId="{86DBA080-9003-4331-85E1-01E31BCA0D51}" type="presParOf" srcId="{49640A91-3EAC-411A-AB2D-AE5D64844ED5}" destId="{B1BEDD63-A24B-4B4C-BE63-43F789EE5A9B}" srcOrd="0" destOrd="0" presId="urn:microsoft.com/office/officeart/2008/layout/LinedList"/>
+    <dgm:cxn modelId="{74E66B90-FC67-4F73-B4DC-8A7301D99C14}" type="presParOf" srcId="{49640A91-3EAC-411A-AB2D-AE5D64844ED5}" destId="{BE552D50-76E9-4723-B737-8598BE66CA60}" srcOrd="1" destOrd="0" presId="urn:microsoft.com/office/officeart/2008/layout/LinedList"/>
+    <dgm:cxn modelId="{EB5722B2-0F19-404A-BE15-64E0E4A409CF}" type="presParOf" srcId="{6ACA2947-2116-4A08-99E1-173B8F55FFF6}" destId="{974648E8-C7C6-407D-A088-0F3AC4500E26}" srcOrd="2" destOrd="0" presId="urn:microsoft.com/office/officeart/2008/layout/LinedList"/>
+    <dgm:cxn modelId="{C5FC8D5C-BD2A-444F-BC6F-377AC418E828}" type="presParOf" srcId="{6ACA2947-2116-4A08-99E1-173B8F55FFF6}" destId="{7934C6A5-669E-4E31-8341-C172377C0C57}" srcOrd="3" destOrd="0" presId="urn:microsoft.com/office/officeart/2008/layout/LinedList"/>
+    <dgm:cxn modelId="{AB564131-E5FA-41CE-A3BD-B36E3919ECAE}" type="presParOf" srcId="{7934C6A5-669E-4E31-8341-C172377C0C57}" destId="{11741146-DF03-47EA-BBB9-1CC165BA3294}" srcOrd="0" destOrd="0" presId="urn:microsoft.com/office/officeart/2008/layout/LinedList"/>
+    <dgm:cxn modelId="{C9FC81CA-75DD-4C2D-A39B-7585A3934CF7}" type="presParOf" srcId="{7934C6A5-669E-4E31-8341-C172377C0C57}" destId="{D9BECD35-A21F-41BF-A32F-3792BAA969D9}" srcOrd="1" destOrd="0" presId="urn:microsoft.com/office/officeart/2008/layout/LinedList"/>
+    <dgm:cxn modelId="{34803BC7-412D-437A-A2D4-6D7835F60D3B}" type="presParOf" srcId="{6ACA2947-2116-4A08-99E1-173B8F55FFF6}" destId="{D2ECB220-B136-4EE6-84E5-80855960187B}" srcOrd="4" destOrd="0" presId="urn:microsoft.com/office/officeart/2008/layout/LinedList"/>
+    <dgm:cxn modelId="{60499177-CDCD-454B-B471-D4B23C30606E}" type="presParOf" srcId="{6ACA2947-2116-4A08-99E1-173B8F55FFF6}" destId="{6B879357-31A7-4B3E-AE61-ED6D0B68A098}" srcOrd="5" destOrd="0" presId="urn:microsoft.com/office/officeart/2008/layout/LinedList"/>
+    <dgm:cxn modelId="{A3F05CDD-CA97-4BEE-A53E-6C00B8C4F6FC}" type="presParOf" srcId="{6B879357-31A7-4B3E-AE61-ED6D0B68A098}" destId="{08CBD920-D51E-4968-8C99-100C302C9B28}" srcOrd="0" destOrd="0" presId="urn:microsoft.com/office/officeart/2008/layout/LinedList"/>
+    <dgm:cxn modelId="{F54325B5-2F07-4965-9D37-27A087F9626D}" type="presParOf" srcId="{6B879357-31A7-4B3E-AE61-ED6D0B68A098}" destId="{E16F828E-5AEF-4E6F-97DD-21683383D5C5}" srcOrd="1" destOrd="0" presId="urn:microsoft.com/office/officeart/2008/layout/LinedList"/>
+    <dgm:cxn modelId="{7E8D78D5-BFD5-40B3-8A49-E9FD90B5A14D}" type="presParOf" srcId="{6ACA2947-2116-4A08-99E1-173B8F55FFF6}" destId="{CD5DEFA4-FC9E-4E50-B6D5-6F9A430C09C0}" srcOrd="6" destOrd="0" presId="urn:microsoft.com/office/officeart/2008/layout/LinedList"/>
+    <dgm:cxn modelId="{01D5C117-FC32-46A9-BBD5-E794993AA7E3}" type="presParOf" srcId="{6ACA2947-2116-4A08-99E1-173B8F55FFF6}" destId="{B2BFD470-C9DA-4476-AC97-2246D5E9F5BD}" srcOrd="7" destOrd="0" presId="urn:microsoft.com/office/officeart/2008/layout/LinedList"/>
+    <dgm:cxn modelId="{F241A731-4095-4558-B5DC-EBBA1438F594}" type="presParOf" srcId="{B2BFD470-C9DA-4476-AC97-2246D5E9F5BD}" destId="{19B43A0B-B17A-42C3-8262-2D3BD76AF095}" srcOrd="0" destOrd="0" presId="urn:microsoft.com/office/officeart/2008/layout/LinedList"/>
+    <dgm:cxn modelId="{B914E981-D040-42A6-A118-E84185941D49}" type="presParOf" srcId="{B2BFD470-C9DA-4476-AC97-2246D5E9F5BD}" destId="{A68805D8-75A3-4874-B448-FB96522BEC6C}" srcOrd="1" destOrd="0" presId="urn:microsoft.com/office/officeart/2008/layout/LinedList"/>
+    <dgm:cxn modelId="{BD35800A-3130-4EDC-A6D1-A70A932F1593}" type="presParOf" srcId="{6ACA2947-2116-4A08-99E1-173B8F55FFF6}" destId="{BCDD0124-E17E-43B1-83E3-EAC231157F40}" srcOrd="8" destOrd="0" presId="urn:microsoft.com/office/officeart/2008/layout/LinedList"/>
+    <dgm:cxn modelId="{E1785C16-36F8-4FA2-85C7-B5F65AF7E2F0}" type="presParOf" srcId="{6ACA2947-2116-4A08-99E1-173B8F55FFF6}" destId="{097A0F8E-2311-48C7-B711-947B76B739F9}" srcOrd="9" destOrd="0" presId="urn:microsoft.com/office/officeart/2008/layout/LinedList"/>
+    <dgm:cxn modelId="{314F6656-9A5D-49BB-86D8-25D0F34AAB5E}" type="presParOf" srcId="{097A0F8E-2311-48C7-B711-947B76B739F9}" destId="{36B3A5B8-B50C-4E40-B3EC-3A2B52649CAA}" srcOrd="0" destOrd="0" presId="urn:microsoft.com/office/officeart/2008/layout/LinedList"/>
+    <dgm:cxn modelId="{370D4864-E91C-4726-A17D-EFEB0CCFA6EA}" type="presParOf" srcId="{097A0F8E-2311-48C7-B711-947B76B739F9}" destId="{E67BBE67-6BA8-4FA4-B498-654A90BF6DBB}" srcOrd="1" destOrd="0" presId="urn:microsoft.com/office/officeart/2008/layout/LinedList"/>
+  </dgm:cxnLst>
+  <dgm:bg/>
+  <dgm:whole/>
+  <dgm:extLst>
+    <a:ext uri="http://schemas.microsoft.com/office/drawing/2008/diagram">
+      <dsp:dataModelExt xmlns:dsp="http://schemas.microsoft.com/office/drawing/2008/diagram" relId="rId7" minVer="http://schemas.openxmlformats.org/drawingml/2006/diagram"/>
+    </a:ext>
+  </dgm:extLst>
+</dgm:dataModel>
+</file>
+
 <file path=ppt/diagrams/drawing1.xml><?xml version="1.0" encoding="utf-8"?>
 <dsp:drawing xmlns:dgm="http://schemas.openxmlformats.org/drawingml/2006/diagram" xmlns:dsp="http://schemas.microsoft.com/office/drawing/2008/diagram" xmlns:a="http://schemas.openxmlformats.org/drawingml/2006/main">
   <dsp:spTree>
@@ -2689,8 +3900,20 @@
             <a:buChar char="•"/>
           </a:pPr>
           <a:r>
+            <a:rPr lang="en-US" sz="3000" kern="1200" dirty="0"/>
+            <a:t>PHP </a:t>
+          </a:r>
+          <a:r>
             <a:rPr lang="en-US" sz="3000" kern="1200" dirty="0" err="1"/>
-            <a:t>Registrierungsfunktion</a:t>
+            <a:t>nicht</a:t>
+          </a:r>
+          <a:r>
+            <a:rPr lang="en-US" sz="3000" kern="1200" dirty="0"/>
+            <a:t> </a:t>
+          </a:r>
+          <a:r>
+            <a:rPr lang="en-US" sz="3000" kern="1200" dirty="0" err="1"/>
+            <a:t>sauber</a:t>
           </a:r>
           <a:endParaRPr lang="en-US" sz="3000" kern="1200" dirty="0"/>
         </a:p>
@@ -3153,6 +4376,766 @@
       <dsp:txXfrm>
         <a:off x="7171754" y="1008002"/>
         <a:ext cx="2682428" cy="1665515"/>
+      </dsp:txXfrm>
+    </dsp:sp>
+  </dsp:spTree>
+</dsp:drawing>
+</file>
+
+<file path=ppt/diagrams/drawing3.xml><?xml version="1.0" encoding="utf-8"?>
+<dsp:drawing xmlns:dgm="http://schemas.openxmlformats.org/drawingml/2006/diagram" xmlns:dsp="http://schemas.microsoft.com/office/drawing/2008/diagram" xmlns:a="http://schemas.openxmlformats.org/drawingml/2006/main">
+  <dsp:spTree>
+    <dsp:nvGrpSpPr>
+      <dsp:cNvPr id="0" name=""/>
+      <dsp:cNvGrpSpPr/>
+    </dsp:nvGrpSpPr>
+    <dsp:grpSpPr/>
+    <dsp:sp modelId="{C84EBEAF-8B4B-45DC-A614-217E0D3891E6}">
+      <dsp:nvSpPr>
+        <dsp:cNvPr id="0" name=""/>
+        <dsp:cNvSpPr/>
+      </dsp:nvSpPr>
+      <dsp:spPr>
+        <a:xfrm>
+          <a:off x="0" y="392"/>
+          <a:ext cx="9982992" cy="0"/>
+        </a:xfrm>
+        <a:prstGeom prst="line">
+          <a:avLst/>
+        </a:prstGeom>
+        <a:gradFill rotWithShape="0">
+          <a:gsLst>
+            <a:gs pos="0">
+              <a:schemeClr val="accent5">
+                <a:hueOff val="0"/>
+                <a:satOff val="0"/>
+                <a:lumOff val="0"/>
+                <a:alphaOff val="0"/>
+                <a:tint val="96000"/>
+                <a:lumMod val="104000"/>
+              </a:schemeClr>
+            </a:gs>
+            <a:gs pos="100000">
+              <a:schemeClr val="accent5">
+                <a:hueOff val="0"/>
+                <a:satOff val="0"/>
+                <a:lumOff val="0"/>
+                <a:alphaOff val="0"/>
+                <a:shade val="84000"/>
+                <a:lumMod val="84000"/>
+              </a:schemeClr>
+            </a:gs>
+          </a:gsLst>
+          <a:lin ang="5400000" scaled="0"/>
+        </a:gradFill>
+        <a:ln w="9525" cap="rnd" cmpd="sng" algn="ctr">
+          <a:solidFill>
+            <a:schemeClr val="accent5">
+              <a:hueOff val="0"/>
+              <a:satOff val="0"/>
+              <a:lumOff val="0"/>
+              <a:alphaOff val="0"/>
+            </a:schemeClr>
+          </a:solidFill>
+          <a:prstDash val="solid"/>
+        </a:ln>
+        <a:effectLst>
+          <a:innerShdw blurRad="50800" dist="25400" dir="13500000">
+            <a:srgbClr val="000000">
+              <a:alpha val="55000"/>
+            </a:srgbClr>
+          </a:innerShdw>
+        </a:effectLst>
+      </dsp:spPr>
+      <dsp:style>
+        <a:lnRef idx="1">
+          <a:scrgbClr r="0" g="0" b="0"/>
+        </a:lnRef>
+        <a:fillRef idx="3">
+          <a:scrgbClr r="0" g="0" b="0"/>
+        </a:fillRef>
+        <a:effectRef idx="2">
+          <a:scrgbClr r="0" g="0" b="0"/>
+        </a:effectRef>
+        <a:fontRef idx="minor">
+          <a:schemeClr val="lt1"/>
+        </a:fontRef>
+      </dsp:style>
+    </dsp:sp>
+    <dsp:sp modelId="{B1BEDD63-A24B-4B4C-BE63-43F789EE5A9B}">
+      <dsp:nvSpPr>
+        <dsp:cNvPr id="0" name=""/>
+        <dsp:cNvSpPr/>
+      </dsp:nvSpPr>
+      <dsp:spPr>
+        <a:xfrm>
+          <a:off x="0" y="392"/>
+          <a:ext cx="9982992" cy="643732"/>
+        </a:xfrm>
+        <a:prstGeom prst="rect">
+          <a:avLst/>
+        </a:prstGeom>
+        <a:noFill/>
+        <a:ln>
+          <a:noFill/>
+        </a:ln>
+        <a:effectLst/>
+      </dsp:spPr>
+      <dsp:style>
+        <a:lnRef idx="0">
+          <a:scrgbClr r="0" g="0" b="0"/>
+        </a:lnRef>
+        <a:fillRef idx="0">
+          <a:scrgbClr r="0" g="0" b="0"/>
+        </a:fillRef>
+        <a:effectRef idx="0">
+          <a:scrgbClr r="0" g="0" b="0"/>
+        </a:effectRef>
+        <a:fontRef idx="minor"/>
+      </dsp:style>
+      <dsp:txBody>
+        <a:bodyPr spcFirstLastPara="0" vert="horz" wrap="square" lIns="110490" tIns="110490" rIns="110490" bIns="110490" numCol="1" spcCol="1270" anchor="t" anchorCtr="0">
+          <a:noAutofit/>
+        </a:bodyPr>
+        <a:lstStyle/>
+        <a:p>
+          <a:pPr marL="0" lvl="0" indent="0" algn="l" defTabSz="1289050">
+            <a:lnSpc>
+              <a:spcPct val="90000"/>
+            </a:lnSpc>
+            <a:spcBef>
+              <a:spcPct val="0"/>
+            </a:spcBef>
+            <a:spcAft>
+              <a:spcPct val="35000"/>
+            </a:spcAft>
+            <a:buNone/>
+          </a:pPr>
+          <a:r>
+            <a:rPr lang="de-DE" sz="2900" kern="1200" dirty="0"/>
+            <a:t>Stack Overflow 		</a:t>
+          </a:r>
+          <a:r>
+            <a:rPr lang="de-DE" sz="2900" kern="1200" dirty="0">
+              <a:sym typeface="Wingdings" panose="05000000000000000000" pitchFamily="2" charset="2"/>
+            </a:rPr>
+            <a:t> </a:t>
+          </a:r>
+          <a:r>
+            <a:rPr lang="de-CH" sz="2900" kern="1200" dirty="0">
+              <a:hlinkClick xmlns:r="http://schemas.openxmlformats.org/officeDocument/2006/relationships" r:id="rId1"/>
+            </a:rPr>
+            <a:t>https://stackoverflow.com</a:t>
+          </a:r>
+          <a:endParaRPr lang="de-CH" sz="2900" kern="1200" dirty="0"/>
+        </a:p>
+      </dsp:txBody>
+      <dsp:txXfrm>
+        <a:off x="0" y="392"/>
+        <a:ext cx="9982992" cy="643732"/>
+      </dsp:txXfrm>
+    </dsp:sp>
+    <dsp:sp modelId="{974648E8-C7C6-407D-A088-0F3AC4500E26}">
+      <dsp:nvSpPr>
+        <dsp:cNvPr id="0" name=""/>
+        <dsp:cNvSpPr/>
+      </dsp:nvSpPr>
+      <dsp:spPr>
+        <a:xfrm>
+          <a:off x="0" y="644125"/>
+          <a:ext cx="9982992" cy="0"/>
+        </a:xfrm>
+        <a:prstGeom prst="line">
+          <a:avLst/>
+        </a:prstGeom>
+        <a:gradFill rotWithShape="0">
+          <a:gsLst>
+            <a:gs pos="0">
+              <a:schemeClr val="accent5">
+                <a:hueOff val="398089"/>
+                <a:satOff val="-3493"/>
+                <a:lumOff val="2745"/>
+                <a:alphaOff val="0"/>
+                <a:tint val="96000"/>
+                <a:lumMod val="104000"/>
+              </a:schemeClr>
+            </a:gs>
+            <a:gs pos="100000">
+              <a:schemeClr val="accent5">
+                <a:hueOff val="398089"/>
+                <a:satOff val="-3493"/>
+                <a:lumOff val="2745"/>
+                <a:alphaOff val="0"/>
+                <a:shade val="84000"/>
+                <a:lumMod val="84000"/>
+              </a:schemeClr>
+            </a:gs>
+          </a:gsLst>
+          <a:lin ang="5400000" scaled="0"/>
+        </a:gradFill>
+        <a:ln w="9525" cap="rnd" cmpd="sng" algn="ctr">
+          <a:solidFill>
+            <a:schemeClr val="accent5">
+              <a:hueOff val="398089"/>
+              <a:satOff val="-3493"/>
+              <a:lumOff val="2745"/>
+              <a:alphaOff val="0"/>
+            </a:schemeClr>
+          </a:solidFill>
+          <a:prstDash val="solid"/>
+        </a:ln>
+        <a:effectLst>
+          <a:innerShdw blurRad="50800" dist="25400" dir="13500000">
+            <a:srgbClr val="000000">
+              <a:alpha val="55000"/>
+            </a:srgbClr>
+          </a:innerShdw>
+        </a:effectLst>
+      </dsp:spPr>
+      <dsp:style>
+        <a:lnRef idx="1">
+          <a:scrgbClr r="0" g="0" b="0"/>
+        </a:lnRef>
+        <a:fillRef idx="3">
+          <a:scrgbClr r="0" g="0" b="0"/>
+        </a:fillRef>
+        <a:effectRef idx="2">
+          <a:scrgbClr r="0" g="0" b="0"/>
+        </a:effectRef>
+        <a:fontRef idx="minor">
+          <a:schemeClr val="lt1"/>
+        </a:fontRef>
+      </dsp:style>
+    </dsp:sp>
+    <dsp:sp modelId="{11741146-DF03-47EA-BBB9-1CC165BA3294}">
+      <dsp:nvSpPr>
+        <dsp:cNvPr id="0" name=""/>
+        <dsp:cNvSpPr/>
+      </dsp:nvSpPr>
+      <dsp:spPr>
+        <a:xfrm>
+          <a:off x="0" y="644125"/>
+          <a:ext cx="9982992" cy="643732"/>
+        </a:xfrm>
+        <a:prstGeom prst="rect">
+          <a:avLst/>
+        </a:prstGeom>
+        <a:noFill/>
+        <a:ln>
+          <a:noFill/>
+        </a:ln>
+        <a:effectLst/>
+      </dsp:spPr>
+      <dsp:style>
+        <a:lnRef idx="0">
+          <a:scrgbClr r="0" g="0" b="0"/>
+        </a:lnRef>
+        <a:fillRef idx="0">
+          <a:scrgbClr r="0" g="0" b="0"/>
+        </a:fillRef>
+        <a:effectRef idx="0">
+          <a:scrgbClr r="0" g="0" b="0"/>
+        </a:effectRef>
+        <a:fontRef idx="minor"/>
+      </dsp:style>
+      <dsp:txBody>
+        <a:bodyPr spcFirstLastPara="0" vert="horz" wrap="square" lIns="110490" tIns="110490" rIns="110490" bIns="110490" numCol="1" spcCol="1270" anchor="t" anchorCtr="0">
+          <a:noAutofit/>
+        </a:bodyPr>
+        <a:lstStyle/>
+        <a:p>
+          <a:pPr marL="0" lvl="0" indent="0" algn="l" defTabSz="1289050">
+            <a:lnSpc>
+              <a:spcPct val="90000"/>
+            </a:lnSpc>
+            <a:spcBef>
+              <a:spcPct val="0"/>
+            </a:spcBef>
+            <a:spcAft>
+              <a:spcPct val="35000"/>
+            </a:spcAft>
+            <a:buNone/>
+          </a:pPr>
+          <a:r>
+            <a:rPr lang="de-DE" sz="2900" kern="1200" dirty="0"/>
+            <a:t>Microsoft Dokumentation </a:t>
+          </a:r>
+          <a:r>
+            <a:rPr lang="de-DE" sz="2900" kern="1200" dirty="0">
+              <a:sym typeface="Wingdings" panose="05000000000000000000" pitchFamily="2" charset="2"/>
+            </a:rPr>
+            <a:t> </a:t>
+          </a:r>
+          <a:r>
+            <a:rPr lang="de-CH" sz="2900" kern="1200" dirty="0">
+              <a:hlinkClick xmlns:r="http://schemas.openxmlformats.org/officeDocument/2006/relationships" r:id="rId2"/>
+            </a:rPr>
+            <a:t>https://docs.microsoft.com</a:t>
+          </a:r>
+          <a:r>
+            <a:rPr lang="de-CH" sz="2900" kern="1200" dirty="0"/>
+            <a:t> </a:t>
+          </a:r>
+          <a:r>
+            <a:rPr lang="de-DE" sz="2900" kern="1200" dirty="0">
+              <a:sym typeface="Wingdings" panose="05000000000000000000" pitchFamily="2" charset="2"/>
+            </a:rPr>
+            <a:t> </a:t>
+          </a:r>
+          <a:endParaRPr lang="de-CH" sz="2900" kern="1200" dirty="0"/>
+        </a:p>
+      </dsp:txBody>
+      <dsp:txXfrm>
+        <a:off x="0" y="644125"/>
+        <a:ext cx="9982992" cy="643732"/>
+      </dsp:txXfrm>
+    </dsp:sp>
+    <dsp:sp modelId="{D2ECB220-B136-4EE6-84E5-80855960187B}">
+      <dsp:nvSpPr>
+        <dsp:cNvPr id="0" name=""/>
+        <dsp:cNvSpPr/>
+      </dsp:nvSpPr>
+      <dsp:spPr>
+        <a:xfrm>
+          <a:off x="0" y="1287858"/>
+          <a:ext cx="9982992" cy="0"/>
+        </a:xfrm>
+        <a:prstGeom prst="line">
+          <a:avLst/>
+        </a:prstGeom>
+        <a:gradFill rotWithShape="0">
+          <a:gsLst>
+            <a:gs pos="0">
+              <a:schemeClr val="accent5">
+                <a:hueOff val="796177"/>
+                <a:satOff val="-6986"/>
+                <a:lumOff val="5490"/>
+                <a:alphaOff val="0"/>
+                <a:tint val="96000"/>
+                <a:lumMod val="104000"/>
+              </a:schemeClr>
+            </a:gs>
+            <a:gs pos="100000">
+              <a:schemeClr val="accent5">
+                <a:hueOff val="796177"/>
+                <a:satOff val="-6986"/>
+                <a:lumOff val="5490"/>
+                <a:alphaOff val="0"/>
+                <a:shade val="84000"/>
+                <a:lumMod val="84000"/>
+              </a:schemeClr>
+            </a:gs>
+          </a:gsLst>
+          <a:lin ang="5400000" scaled="0"/>
+        </a:gradFill>
+        <a:ln w="9525" cap="rnd" cmpd="sng" algn="ctr">
+          <a:solidFill>
+            <a:schemeClr val="accent5">
+              <a:hueOff val="796177"/>
+              <a:satOff val="-6986"/>
+              <a:lumOff val="5490"/>
+              <a:alphaOff val="0"/>
+            </a:schemeClr>
+          </a:solidFill>
+          <a:prstDash val="solid"/>
+        </a:ln>
+        <a:effectLst>
+          <a:innerShdw blurRad="50800" dist="25400" dir="13500000">
+            <a:srgbClr val="000000">
+              <a:alpha val="55000"/>
+            </a:srgbClr>
+          </a:innerShdw>
+        </a:effectLst>
+      </dsp:spPr>
+      <dsp:style>
+        <a:lnRef idx="1">
+          <a:scrgbClr r="0" g="0" b="0"/>
+        </a:lnRef>
+        <a:fillRef idx="3">
+          <a:scrgbClr r="0" g="0" b="0"/>
+        </a:fillRef>
+        <a:effectRef idx="2">
+          <a:scrgbClr r="0" g="0" b="0"/>
+        </a:effectRef>
+        <a:fontRef idx="minor">
+          <a:schemeClr val="lt1"/>
+        </a:fontRef>
+      </dsp:style>
+    </dsp:sp>
+    <dsp:sp modelId="{08CBD920-D51E-4968-8C99-100C302C9B28}">
+      <dsp:nvSpPr>
+        <dsp:cNvPr id="0" name=""/>
+        <dsp:cNvSpPr/>
+      </dsp:nvSpPr>
+      <dsp:spPr>
+        <a:xfrm>
+          <a:off x="0" y="1287858"/>
+          <a:ext cx="9982992" cy="643732"/>
+        </a:xfrm>
+        <a:prstGeom prst="rect">
+          <a:avLst/>
+        </a:prstGeom>
+        <a:noFill/>
+        <a:ln>
+          <a:noFill/>
+        </a:ln>
+        <a:effectLst/>
+      </dsp:spPr>
+      <dsp:style>
+        <a:lnRef idx="0">
+          <a:scrgbClr r="0" g="0" b="0"/>
+        </a:lnRef>
+        <a:fillRef idx="0">
+          <a:scrgbClr r="0" g="0" b="0"/>
+        </a:fillRef>
+        <a:effectRef idx="0">
+          <a:scrgbClr r="0" g="0" b="0"/>
+        </a:effectRef>
+        <a:fontRef idx="minor"/>
+      </dsp:style>
+      <dsp:txBody>
+        <a:bodyPr spcFirstLastPara="0" vert="horz" wrap="square" lIns="110490" tIns="110490" rIns="110490" bIns="110490" numCol="1" spcCol="1270" anchor="t" anchorCtr="0">
+          <a:noAutofit/>
+        </a:bodyPr>
+        <a:lstStyle/>
+        <a:p>
+          <a:pPr marL="0" lvl="0" indent="0" algn="l" defTabSz="1289050">
+            <a:lnSpc>
+              <a:spcPct val="90000"/>
+            </a:lnSpc>
+            <a:spcBef>
+              <a:spcPct val="0"/>
+            </a:spcBef>
+            <a:spcAft>
+              <a:spcPct val="35000"/>
+            </a:spcAft>
+            <a:buNone/>
+          </a:pPr>
+          <a:r>
+            <a:rPr lang="de-CH" sz="2900" kern="1200" dirty="0"/>
+            <a:t>GitHub 			</a:t>
+          </a:r>
+          <a:r>
+            <a:rPr lang="de-CH" sz="2900" kern="1200" dirty="0">
+              <a:sym typeface="Wingdings" panose="05000000000000000000" pitchFamily="2" charset="2"/>
+            </a:rPr>
+            <a:t> </a:t>
+          </a:r>
+          <a:r>
+            <a:rPr lang="de-CH" sz="2900" kern="1200" dirty="0">
+              <a:hlinkClick xmlns:r="http://schemas.openxmlformats.org/officeDocument/2006/relationships" r:id="rId3"/>
+            </a:rPr>
+            <a:t>https://github.com</a:t>
+          </a:r>
+          <a:r>
+            <a:rPr lang="de-CH" sz="2900" kern="1200" dirty="0"/>
+            <a:t> </a:t>
+          </a:r>
+        </a:p>
+      </dsp:txBody>
+      <dsp:txXfrm>
+        <a:off x="0" y="1287858"/>
+        <a:ext cx="9982992" cy="643732"/>
+      </dsp:txXfrm>
+    </dsp:sp>
+    <dsp:sp modelId="{CD5DEFA4-FC9E-4E50-B6D5-6F9A430C09C0}">
+      <dsp:nvSpPr>
+        <dsp:cNvPr id="0" name=""/>
+        <dsp:cNvSpPr/>
+      </dsp:nvSpPr>
+      <dsp:spPr>
+        <a:xfrm>
+          <a:off x="0" y="1931591"/>
+          <a:ext cx="9982992" cy="0"/>
+        </a:xfrm>
+        <a:prstGeom prst="line">
+          <a:avLst/>
+        </a:prstGeom>
+        <a:gradFill rotWithShape="0">
+          <a:gsLst>
+            <a:gs pos="0">
+              <a:schemeClr val="accent5">
+                <a:hueOff val="1194266"/>
+                <a:satOff val="-10480"/>
+                <a:lumOff val="8235"/>
+                <a:alphaOff val="0"/>
+                <a:tint val="96000"/>
+                <a:lumMod val="104000"/>
+              </a:schemeClr>
+            </a:gs>
+            <a:gs pos="100000">
+              <a:schemeClr val="accent5">
+                <a:hueOff val="1194266"/>
+                <a:satOff val="-10480"/>
+                <a:lumOff val="8235"/>
+                <a:alphaOff val="0"/>
+                <a:shade val="84000"/>
+                <a:lumMod val="84000"/>
+              </a:schemeClr>
+            </a:gs>
+          </a:gsLst>
+          <a:lin ang="5400000" scaled="0"/>
+        </a:gradFill>
+        <a:ln w="9525" cap="rnd" cmpd="sng" algn="ctr">
+          <a:solidFill>
+            <a:schemeClr val="accent5">
+              <a:hueOff val="1194266"/>
+              <a:satOff val="-10480"/>
+              <a:lumOff val="8235"/>
+              <a:alphaOff val="0"/>
+            </a:schemeClr>
+          </a:solidFill>
+          <a:prstDash val="solid"/>
+        </a:ln>
+        <a:effectLst>
+          <a:innerShdw blurRad="50800" dist="25400" dir="13500000">
+            <a:srgbClr val="000000">
+              <a:alpha val="55000"/>
+            </a:srgbClr>
+          </a:innerShdw>
+        </a:effectLst>
+      </dsp:spPr>
+      <dsp:style>
+        <a:lnRef idx="1">
+          <a:scrgbClr r="0" g="0" b="0"/>
+        </a:lnRef>
+        <a:fillRef idx="3">
+          <a:scrgbClr r="0" g="0" b="0"/>
+        </a:fillRef>
+        <a:effectRef idx="2">
+          <a:scrgbClr r="0" g="0" b="0"/>
+        </a:effectRef>
+        <a:fontRef idx="minor">
+          <a:schemeClr val="lt1"/>
+        </a:fontRef>
+      </dsp:style>
+    </dsp:sp>
+    <dsp:sp modelId="{19B43A0B-B17A-42C3-8262-2D3BD76AF095}">
+      <dsp:nvSpPr>
+        <dsp:cNvPr id="0" name=""/>
+        <dsp:cNvSpPr/>
+      </dsp:nvSpPr>
+      <dsp:spPr>
+        <a:xfrm>
+          <a:off x="0" y="1931591"/>
+          <a:ext cx="9982992" cy="643732"/>
+        </a:xfrm>
+        <a:prstGeom prst="rect">
+          <a:avLst/>
+        </a:prstGeom>
+        <a:noFill/>
+        <a:ln>
+          <a:noFill/>
+        </a:ln>
+        <a:effectLst/>
+      </dsp:spPr>
+      <dsp:style>
+        <a:lnRef idx="0">
+          <a:scrgbClr r="0" g="0" b="0"/>
+        </a:lnRef>
+        <a:fillRef idx="0">
+          <a:scrgbClr r="0" g="0" b="0"/>
+        </a:fillRef>
+        <a:effectRef idx="0">
+          <a:scrgbClr r="0" g="0" b="0"/>
+        </a:effectRef>
+        <a:fontRef idx="minor"/>
+      </dsp:style>
+      <dsp:txBody>
+        <a:bodyPr spcFirstLastPara="0" vert="horz" wrap="square" lIns="110490" tIns="110490" rIns="110490" bIns="110490" numCol="1" spcCol="1270" anchor="t" anchorCtr="0">
+          <a:noAutofit/>
+        </a:bodyPr>
+        <a:lstStyle/>
+        <a:p>
+          <a:pPr marL="0" lvl="0" indent="0" algn="l" defTabSz="1289050">
+            <a:lnSpc>
+              <a:spcPct val="90000"/>
+            </a:lnSpc>
+            <a:spcBef>
+              <a:spcPct val="0"/>
+            </a:spcBef>
+            <a:spcAft>
+              <a:spcPct val="35000"/>
+            </a:spcAft>
+            <a:buNone/>
+          </a:pPr>
+          <a:r>
+            <a:rPr lang="de-DE" sz="2900" kern="1200" dirty="0"/>
+            <a:t>PHP-Dokumentation 	</a:t>
+          </a:r>
+          <a:r>
+            <a:rPr lang="de-DE" sz="2900" kern="1200" dirty="0">
+              <a:sym typeface="Wingdings" panose="05000000000000000000" pitchFamily="2" charset="2"/>
+            </a:rPr>
+            <a:t> </a:t>
+          </a:r>
+          <a:r>
+            <a:rPr lang="de-CH" sz="2900" kern="1200" dirty="0">
+              <a:hlinkClick xmlns:r="http://schemas.openxmlformats.org/officeDocument/2006/relationships" r:id="rId4"/>
+            </a:rPr>
+            <a:t>https://www.php.net/docs.php</a:t>
+          </a:r>
+          <a:r>
+            <a:rPr lang="de-CH" sz="2900" kern="1200" dirty="0"/>
+            <a:t> </a:t>
+          </a:r>
+        </a:p>
+      </dsp:txBody>
+      <dsp:txXfrm>
+        <a:off x="0" y="1931591"/>
+        <a:ext cx="9982992" cy="643732"/>
+      </dsp:txXfrm>
+    </dsp:sp>
+    <dsp:sp modelId="{BCDD0124-E17E-43B1-83E3-EAC231157F40}">
+      <dsp:nvSpPr>
+        <dsp:cNvPr id="0" name=""/>
+        <dsp:cNvSpPr/>
+      </dsp:nvSpPr>
+      <dsp:spPr>
+        <a:xfrm>
+          <a:off x="0" y="2575324"/>
+          <a:ext cx="9982992" cy="0"/>
+        </a:xfrm>
+        <a:prstGeom prst="line">
+          <a:avLst/>
+        </a:prstGeom>
+        <a:gradFill rotWithShape="0">
+          <a:gsLst>
+            <a:gs pos="0">
+              <a:schemeClr val="accent5">
+                <a:hueOff val="1592355"/>
+                <a:satOff val="-13973"/>
+                <a:lumOff val="10980"/>
+                <a:alphaOff val="0"/>
+                <a:tint val="96000"/>
+                <a:lumMod val="104000"/>
+              </a:schemeClr>
+            </a:gs>
+            <a:gs pos="100000">
+              <a:schemeClr val="accent5">
+                <a:hueOff val="1592355"/>
+                <a:satOff val="-13973"/>
+                <a:lumOff val="10980"/>
+                <a:alphaOff val="0"/>
+                <a:shade val="84000"/>
+                <a:lumMod val="84000"/>
+              </a:schemeClr>
+            </a:gs>
+          </a:gsLst>
+          <a:lin ang="5400000" scaled="0"/>
+        </a:gradFill>
+        <a:ln w="9525" cap="rnd" cmpd="sng" algn="ctr">
+          <a:solidFill>
+            <a:schemeClr val="accent5">
+              <a:hueOff val="1592355"/>
+              <a:satOff val="-13973"/>
+              <a:lumOff val="10980"/>
+              <a:alphaOff val="0"/>
+            </a:schemeClr>
+          </a:solidFill>
+          <a:prstDash val="solid"/>
+        </a:ln>
+        <a:effectLst>
+          <a:innerShdw blurRad="50800" dist="25400" dir="13500000">
+            <a:srgbClr val="000000">
+              <a:alpha val="55000"/>
+            </a:srgbClr>
+          </a:innerShdw>
+        </a:effectLst>
+      </dsp:spPr>
+      <dsp:style>
+        <a:lnRef idx="1">
+          <a:scrgbClr r="0" g="0" b="0"/>
+        </a:lnRef>
+        <a:fillRef idx="3">
+          <a:scrgbClr r="0" g="0" b="0"/>
+        </a:fillRef>
+        <a:effectRef idx="2">
+          <a:scrgbClr r="0" g="0" b="0"/>
+        </a:effectRef>
+        <a:fontRef idx="minor">
+          <a:schemeClr val="lt1"/>
+        </a:fontRef>
+      </dsp:style>
+    </dsp:sp>
+    <dsp:sp modelId="{36B3A5B8-B50C-4E40-B3EC-3A2B52649CAA}">
+      <dsp:nvSpPr>
+        <dsp:cNvPr id="0" name=""/>
+        <dsp:cNvSpPr/>
+      </dsp:nvSpPr>
+      <dsp:spPr>
+        <a:xfrm>
+          <a:off x="0" y="2575324"/>
+          <a:ext cx="9982992" cy="643732"/>
+        </a:xfrm>
+        <a:prstGeom prst="rect">
+          <a:avLst/>
+        </a:prstGeom>
+        <a:noFill/>
+        <a:ln>
+          <a:noFill/>
+        </a:ln>
+        <a:effectLst/>
+      </dsp:spPr>
+      <dsp:style>
+        <a:lnRef idx="0">
+          <a:scrgbClr r="0" g="0" b="0"/>
+        </a:lnRef>
+        <a:fillRef idx="0">
+          <a:scrgbClr r="0" g="0" b="0"/>
+        </a:fillRef>
+        <a:effectRef idx="0">
+          <a:scrgbClr r="0" g="0" b="0"/>
+        </a:effectRef>
+        <a:fontRef idx="minor"/>
+      </dsp:style>
+      <dsp:txBody>
+        <a:bodyPr spcFirstLastPara="0" vert="horz" wrap="square" lIns="110490" tIns="110490" rIns="110490" bIns="110490" numCol="1" spcCol="1270" anchor="t" anchorCtr="0">
+          <a:noAutofit/>
+        </a:bodyPr>
+        <a:lstStyle/>
+        <a:p>
+          <a:pPr marL="0" lvl="0" indent="0" algn="l" defTabSz="1289050">
+            <a:lnSpc>
+              <a:spcPct val="90000"/>
+            </a:lnSpc>
+            <a:spcBef>
+              <a:spcPct val="0"/>
+            </a:spcBef>
+            <a:spcAft>
+              <a:spcPct val="35000"/>
+            </a:spcAft>
+            <a:buNone/>
+          </a:pPr>
+          <a:r>
+            <a:rPr lang="de-CH" sz="2900" kern="1200" dirty="0"/>
+            <a:t>Gemini 			</a:t>
+          </a:r>
+          <a:r>
+            <a:rPr lang="de-CH" sz="2900" kern="1200" dirty="0">
+              <a:sym typeface="Wingdings" panose="05000000000000000000" pitchFamily="2" charset="2"/>
+            </a:rPr>
+            <a:t> </a:t>
+          </a:r>
+          <a:r>
+            <a:rPr lang="de-CH" sz="2900" kern="1200" dirty="0">
+              <a:sym typeface="Wingdings" panose="05000000000000000000" pitchFamily="2" charset="2"/>
+              <a:hlinkClick xmlns:r="http://schemas.openxmlformats.org/officeDocument/2006/relationships" r:id="rId5"/>
+            </a:rPr>
+            <a:t>https://gemini.google.com</a:t>
+          </a:r>
+          <a:r>
+            <a:rPr lang="de-CH" sz="2900" kern="1200" dirty="0">
+              <a:sym typeface="Wingdings" panose="05000000000000000000" pitchFamily="2" charset="2"/>
+            </a:rPr>
+            <a:t> </a:t>
+          </a:r>
+          <a:endParaRPr lang="de-CH" sz="2900" kern="1200" dirty="0"/>
+        </a:p>
+      </dsp:txBody>
+      <dsp:txXfrm>
+        <a:off x="0" y="2575324"/>
+        <a:ext cx="9982992" cy="643732"/>
       </dsp:txXfrm>
     </dsp:sp>
   </dsp:spTree>
@@ -3939,6 +5922,472 @@
 </dgm:layoutDef>
 </file>
 
+<file path=ppt/diagrams/layout3.xml><?xml version="1.0" encoding="utf-8"?>
+<dgm:layoutDef xmlns:dgm="http://schemas.openxmlformats.org/drawingml/2006/diagram" xmlns:a="http://schemas.openxmlformats.org/drawingml/2006/main" uniqueId="urn:microsoft.com/office/officeart/2008/layout/LinedList">
+  <dgm:title val=""/>
+  <dgm:desc val=""/>
+  <dgm:catLst>
+    <dgm:cat type="hierarchy" pri="8000"/>
+    <dgm:cat type="list" pri="2500"/>
+  </dgm:catLst>
+  <dgm:sampData>
+    <dgm:dataModel>
+      <dgm:ptLst>
+        <dgm:pt modelId="0" type="doc"/>
+        <dgm:pt modelId="1">
+          <dgm:prSet phldr="1"/>
+        </dgm:pt>
+        <dgm:pt modelId="11">
+          <dgm:prSet phldr="1"/>
+        </dgm:pt>
+        <dgm:pt modelId="12">
+          <dgm:prSet phldr="1"/>
+        </dgm:pt>
+        <dgm:pt modelId="13">
+          <dgm:prSet phldr="1"/>
+        </dgm:pt>
+      </dgm:ptLst>
+      <dgm:cxnLst>
+        <dgm:cxn modelId="2" srcId="0" destId="1" srcOrd="0" destOrd="0"/>
+        <dgm:cxn modelId="3" srcId="1" destId="11" srcOrd="0" destOrd="0"/>
+        <dgm:cxn modelId="4" srcId="1" destId="12" srcOrd="1" destOrd="0"/>
+        <dgm:cxn modelId="5" srcId="1" destId="13" srcOrd="2" destOrd="0"/>
+      </dgm:cxnLst>
+      <dgm:bg/>
+      <dgm:whole/>
+    </dgm:dataModel>
+  </dgm:sampData>
+  <dgm:styleData>
+    <dgm:dataModel>
+      <dgm:ptLst>
+        <dgm:pt modelId="0" type="doc"/>
+        <dgm:pt modelId="1">
+          <dgm:prSet phldr="1"/>
+        </dgm:pt>
+        <dgm:pt modelId="11">
+          <dgm:prSet phldr="1"/>
+        </dgm:pt>
+        <dgm:pt modelId="12">
+          <dgm:prSet phldr="1"/>
+        </dgm:pt>
+      </dgm:ptLst>
+      <dgm:cxnLst>
+        <dgm:cxn modelId="2" srcId="0" destId="1" srcOrd="0" destOrd="0"/>
+        <dgm:cxn modelId="3" srcId="1" destId="11" srcOrd="0" destOrd="0"/>
+        <dgm:cxn modelId="4" srcId="1" destId="12" srcOrd="1" destOrd="0"/>
+      </dgm:cxnLst>
+      <dgm:bg/>
+      <dgm:whole/>
+    </dgm:dataModel>
+  </dgm:styleData>
+  <dgm:clrData>
+    <dgm:dataModel>
+      <dgm:ptLst>
+        <dgm:pt modelId="0" type="doc"/>
+        <dgm:pt modelId="1">
+          <dgm:prSet phldr="1"/>
+        </dgm:pt>
+        <dgm:pt modelId="11">
+          <dgm:prSet phldr="1"/>
+        </dgm:pt>
+        <dgm:pt modelId="12">
+          <dgm:prSet phldr="1"/>
+        </dgm:pt>
+      </dgm:ptLst>
+      <dgm:cxnLst>
+        <dgm:cxn modelId="2" srcId="0" destId="1" srcOrd="0" destOrd="0"/>
+        <dgm:cxn modelId="3" srcId="1" destId="11" srcOrd="0" destOrd="0"/>
+        <dgm:cxn modelId="4" srcId="1" destId="12" srcOrd="1" destOrd="0"/>
+      </dgm:cxnLst>
+      <dgm:bg/>
+      <dgm:whole/>
+    </dgm:dataModel>
+  </dgm:clrData>
+  <dgm:layoutNode name="vert0">
+    <dgm:varLst>
+      <dgm:dir/>
+      <dgm:animOne val="branch"/>
+      <dgm:animLvl val="lvl"/>
+    </dgm:varLst>
+    <dgm:choose name="Name0">
+      <dgm:if name="Name1" func="var" arg="dir" op="equ" val="norm">
+        <dgm:alg type="lin">
+          <dgm:param type="linDir" val="fromT"/>
+          <dgm:param type="nodeHorzAlign" val="l"/>
+        </dgm:alg>
+      </dgm:if>
+      <dgm:else name="Name2">
+        <dgm:alg type="lin">
+          <dgm:param type="linDir" val="fromT"/>
+          <dgm:param type="nodeHorzAlign" val="r"/>
+        </dgm:alg>
+      </dgm:else>
+    </dgm:choose>
+    <dgm:shape xmlns:r="http://schemas.openxmlformats.org/officeDocument/2006/relationships" r:blip="">
+      <dgm:adjLst/>
+    </dgm:shape>
+    <dgm:presOf/>
+    <dgm:constrLst>
+      <dgm:constr type="w" for="ch" forName="horz1" refType="w"/>
+      <dgm:constr type="h" for="ch" forName="horz1" refType="h"/>
+      <dgm:constr type="h" for="des" forName="vert1" refType="h"/>
+      <dgm:constr type="h" for="des" forName="tx1" refType="h"/>
+      <dgm:constr type="h" for="des" forName="horz2" refType="h"/>
+      <dgm:constr type="h" for="des" forName="vert2" refType="h"/>
+      <dgm:constr type="h" for="des" forName="horz3" refType="h"/>
+      <dgm:constr type="h" for="des" forName="vert3" refType="h"/>
+      <dgm:constr type="h" for="des" forName="horz4" refType="h"/>
+      <dgm:constr type="h" for="des" ptType="node" refType="h"/>
+      <dgm:constr type="primFontSz" for="des" forName="tx1" op="equ" val="65"/>
+      <dgm:constr type="primFontSz" for="des" forName="tx2" op="equ" val="65"/>
+      <dgm:constr type="primFontSz" for="des" forName="tx3" op="equ" val="65"/>
+      <dgm:constr type="primFontSz" for="des" forName="tx4" op="equ" val="65"/>
+      <dgm:constr type="w" for="des" forName="thickLine" refType="w"/>
+      <dgm:constr type="h" for="des" forName="thickLine"/>
+      <dgm:constr type="h" for="des" forName="thinLine1"/>
+      <dgm:constr type="h" for="des" forName="thinLine2b"/>
+      <dgm:constr type="h" for="des" forName="thinLine3"/>
+      <dgm:constr type="h" for="des" forName="vertSpace2a" refType="h" fact="0.05"/>
+      <dgm:constr type="h" for="des" forName="vertSpace2b" refType="h" refFor="des" refForName="vertSpace2a"/>
+    </dgm:constrLst>
+    <dgm:forEach name="Name3" axis="ch" ptType="node">
+      <dgm:layoutNode name="thickLine" styleLbl="alignNode1">
+        <dgm:alg type="sp"/>
+        <dgm:shape xmlns:r="http://schemas.openxmlformats.org/officeDocument/2006/relationships" type="line" r:blip="">
+          <dgm:adjLst/>
+        </dgm:shape>
+        <dgm:presOf/>
+      </dgm:layoutNode>
+      <dgm:layoutNode name="horz1">
+        <dgm:choose name="Name4">
+          <dgm:if name="Name5" func="var" arg="dir" op="equ" val="norm">
+            <dgm:alg type="lin">
+              <dgm:param type="linDir" val="fromL"/>
+              <dgm:param type="nodeVertAlign" val="t"/>
+            </dgm:alg>
+          </dgm:if>
+          <dgm:else name="Name6">
+            <dgm:alg type="lin">
+              <dgm:param type="linDir" val="fromR"/>
+              <dgm:param type="nodeVertAlign" val="t"/>
+            </dgm:alg>
+          </dgm:else>
+        </dgm:choose>
+        <dgm:shape xmlns:r="http://schemas.openxmlformats.org/officeDocument/2006/relationships" r:blip="">
+          <dgm:adjLst/>
+        </dgm:shape>
+        <dgm:presOf/>
+        <dgm:choose name="Name7">
+          <dgm:if name="Name8" axis="root des" func="maxDepth" op="equ" val="1">
+            <dgm:constrLst>
+              <dgm:constr type="w" for="ch" forName="tx1" refType="w"/>
+            </dgm:constrLst>
+          </dgm:if>
+          <dgm:if name="Name9" axis="root des" func="maxDepth" op="equ" val="2">
+            <dgm:constrLst>
+              <dgm:constr type="w" for="ch" forName="tx1" refType="w" fact="0.2"/>
+              <dgm:constr type="w" for="des" forName="tx2" refType="w" fact="0.785"/>
+              <dgm:constr type="w" for="des" forName="horzSpace2" refType="w" fact="0.015"/>
+              <dgm:constr type="w" for="des" forName="thinLine2b" refType="w" fact="0.8"/>
+            </dgm:constrLst>
+          </dgm:if>
+          <dgm:if name="Name10" axis="root des" func="maxDepth" op="equ" val="3">
+            <dgm:constrLst>
+              <dgm:constr type="w" for="ch" forName="tx1" refType="w" fact="0.2"/>
+              <dgm:constr type="w" for="des" forName="tx2" refType="w" fact="0.385"/>
+              <dgm:constr type="w" for="des" forName="tx3" refType="w" fact="0.385"/>
+              <dgm:constr type="w" for="des" forName="horzSpace2" refType="w" fact="0.015"/>
+              <dgm:constr type="w" for="des" forName="horzSpace3" refType="w" fact="0.015"/>
+              <dgm:constr type="w" for="des" forName="thinLine2b" refType="w" fact="0.8"/>
+              <dgm:constr type="w" for="des" forName="thinLine3" refType="w" fact="0.385"/>
+            </dgm:constrLst>
+          </dgm:if>
+          <dgm:if name="Name11" axis="root des" func="maxDepth" op="gte" val="4">
+            <dgm:constrLst>
+              <dgm:constr type="w" for="ch" forName="tx1" refType="w" fact="0.2"/>
+              <dgm:constr type="w" for="des" forName="tx2" refType="w" fact="0.2516"/>
+              <dgm:constr type="w" for="des" forName="tx3" refType="w" fact="0.2516"/>
+              <dgm:constr type="w" for="des" forName="tx4" refType="w" fact="0.2516"/>
+              <dgm:constr type="w" for="des" forName="horzSpace2" refType="w" fact="0.015"/>
+              <dgm:constr type="w" for="des" forName="horzSpace3" refType="w" fact="0.015"/>
+              <dgm:constr type="w" for="des" forName="horzSpace4" refType="w" fact="0.015"/>
+              <dgm:constr type="w" for="des" forName="thinLine2b" refType="w" fact="0.8"/>
+              <dgm:constr type="w" for="des" forName="thinLine3" refType="w" fact="0.5332"/>
+            </dgm:constrLst>
+          </dgm:if>
+          <dgm:else name="Name12"/>
+        </dgm:choose>
+        <dgm:layoutNode name="tx1" styleLbl="revTx">
+          <dgm:alg type="tx">
+            <dgm:param type="parTxLTRAlign" val="l"/>
+            <dgm:param type="parTxRTLAlign" val="r"/>
+            <dgm:param type="txAnchorVert" val="t"/>
+          </dgm:alg>
+          <dgm:shape xmlns:r="http://schemas.openxmlformats.org/officeDocument/2006/relationships" type="rect" r:blip="">
+            <dgm:adjLst/>
+          </dgm:shape>
+          <dgm:presOf axis="self"/>
+          <dgm:constrLst>
+            <dgm:constr type="tMarg" refType="primFontSz" fact="0.3"/>
+            <dgm:constr type="bMarg" refType="primFontSz" fact="0.3"/>
+            <dgm:constr type="lMarg" refType="primFontSz" fact="0.3"/>
+            <dgm:constr type="rMarg" refType="primFontSz" fact="0.3"/>
+          </dgm:constrLst>
+          <dgm:ruleLst>
+            <dgm:rule type="primFontSz" val="5" fact="NaN" max="NaN"/>
+          </dgm:ruleLst>
+        </dgm:layoutNode>
+        <dgm:layoutNode name="vert1">
+          <dgm:choose name="Name13">
+            <dgm:if name="Name14" func="var" arg="dir" op="equ" val="norm">
+              <dgm:alg type="lin">
+                <dgm:param type="linDir" val="fromT"/>
+                <dgm:param type="nodeHorzAlign" val="l"/>
+              </dgm:alg>
+            </dgm:if>
+            <dgm:else name="Name15">
+              <dgm:alg type="lin">
+                <dgm:param type="linDir" val="fromT"/>
+                <dgm:param type="nodeHorzAlign" val="r"/>
+              </dgm:alg>
+            </dgm:else>
+          </dgm:choose>
+          <dgm:shape xmlns:r="http://schemas.openxmlformats.org/officeDocument/2006/relationships" r:blip="">
+            <dgm:adjLst/>
+          </dgm:shape>
+          <dgm:presOf/>
+          <dgm:forEach name="Name16" axis="ch" ptType="node">
+            <dgm:choose name="Name17">
+              <dgm:if name="Name18" axis="self" ptType="node" func="pos" op="equ" val="1">
+                <dgm:layoutNode name="vertSpace2a">
+                  <dgm:alg type="sp"/>
+                  <dgm:shape xmlns:r="http://schemas.openxmlformats.org/officeDocument/2006/relationships" r:blip="">
+                    <dgm:adjLst/>
+                  </dgm:shape>
+                  <dgm:presOf/>
+                </dgm:layoutNode>
+              </dgm:if>
+              <dgm:else name="Name19"/>
+            </dgm:choose>
+            <dgm:layoutNode name="horz2">
+              <dgm:choose name="Name20">
+                <dgm:if name="Name21" func="var" arg="dir" op="equ" val="norm">
+                  <dgm:alg type="lin">
+                    <dgm:param type="linDir" val="fromL"/>
+                    <dgm:param type="nodeVertAlign" val="t"/>
+                  </dgm:alg>
+                </dgm:if>
+                <dgm:else name="Name22">
+                  <dgm:alg type="lin">
+                    <dgm:param type="linDir" val="fromR"/>
+                    <dgm:param type="nodeVertAlign" val="t"/>
+                  </dgm:alg>
+                </dgm:else>
+              </dgm:choose>
+              <dgm:shape xmlns:r="http://schemas.openxmlformats.org/officeDocument/2006/relationships" r:blip="">
+                <dgm:adjLst/>
+              </dgm:shape>
+              <dgm:presOf/>
+              <dgm:layoutNode name="horzSpace2">
+                <dgm:alg type="sp"/>
+                <dgm:shape xmlns:r="http://schemas.openxmlformats.org/officeDocument/2006/relationships" r:blip="">
+                  <dgm:adjLst/>
+                </dgm:shape>
+                <dgm:presOf/>
+              </dgm:layoutNode>
+              <dgm:layoutNode name="tx2" styleLbl="revTx">
+                <dgm:alg type="tx">
+                  <dgm:param type="parTxLTRAlign" val="l"/>
+                  <dgm:param type="parTxRTLAlign" val="r"/>
+                  <dgm:param type="txAnchorVert" val="t"/>
+                </dgm:alg>
+                <dgm:shape xmlns:r="http://schemas.openxmlformats.org/officeDocument/2006/relationships" type="rect" r:blip="">
+                  <dgm:adjLst/>
+                </dgm:shape>
+                <dgm:presOf axis="self"/>
+                <dgm:constrLst>
+                  <dgm:constr type="tMarg" refType="primFontSz" fact="0.3"/>
+                  <dgm:constr type="bMarg" refType="primFontSz" fact="0.3"/>
+                  <dgm:constr type="lMarg" refType="primFontSz" fact="0.3"/>
+                  <dgm:constr type="rMarg" refType="primFontSz" fact="0.3"/>
+                </dgm:constrLst>
+                <dgm:ruleLst>
+                  <dgm:rule type="primFontSz" val="5" fact="NaN" max="NaN"/>
+                </dgm:ruleLst>
+              </dgm:layoutNode>
+              <dgm:layoutNode name="vert2">
+                <dgm:choose name="Name23">
+                  <dgm:if name="Name24" func="var" arg="dir" op="equ" val="norm">
+                    <dgm:alg type="lin">
+                      <dgm:param type="linDir" val="fromT"/>
+                      <dgm:param type="nodeHorzAlign" val="l"/>
+                    </dgm:alg>
+                  </dgm:if>
+                  <dgm:else name="Name25">
+                    <dgm:alg type="lin">
+                      <dgm:param type="linDir" val="fromT"/>
+                      <dgm:param type="nodeHorzAlign" val="r"/>
+                    </dgm:alg>
+                  </dgm:else>
+                </dgm:choose>
+                <dgm:shape xmlns:r="http://schemas.openxmlformats.org/officeDocument/2006/relationships" r:blip="">
+                  <dgm:adjLst/>
+                </dgm:shape>
+                <dgm:presOf/>
+                <dgm:forEach name="Name26" axis="ch" ptType="node">
+                  <dgm:layoutNode name="horz3">
+                    <dgm:choose name="Name27">
+                      <dgm:if name="Name28" func="var" arg="dir" op="equ" val="norm">
+                        <dgm:alg type="lin">
+                          <dgm:param type="linDir" val="fromL"/>
+                          <dgm:param type="nodeVertAlign" val="t"/>
+                        </dgm:alg>
+                      </dgm:if>
+                      <dgm:else name="Name29">
+                        <dgm:alg type="lin">
+                          <dgm:param type="linDir" val="fromR"/>
+                          <dgm:param type="nodeVertAlign" val="t"/>
+                        </dgm:alg>
+                      </dgm:else>
+                    </dgm:choose>
+                    <dgm:shape xmlns:r="http://schemas.openxmlformats.org/officeDocument/2006/relationships" r:blip="">
+                      <dgm:adjLst/>
+                    </dgm:shape>
+                    <dgm:presOf/>
+                    <dgm:layoutNode name="horzSpace3">
+                      <dgm:alg type="sp"/>
+                      <dgm:shape xmlns:r="http://schemas.openxmlformats.org/officeDocument/2006/relationships" r:blip="">
+                        <dgm:adjLst/>
+                      </dgm:shape>
+                      <dgm:presOf/>
+                    </dgm:layoutNode>
+                    <dgm:layoutNode name="tx3" styleLbl="revTx">
+                      <dgm:alg type="tx">
+                        <dgm:param type="parTxLTRAlign" val="l"/>
+                        <dgm:param type="parTxRTLAlign" val="r"/>
+                        <dgm:param type="txAnchorVert" val="t"/>
+                      </dgm:alg>
+                      <dgm:shape xmlns:r="http://schemas.openxmlformats.org/officeDocument/2006/relationships" type="rect" r:blip="">
+                        <dgm:adjLst/>
+                      </dgm:shape>
+                      <dgm:presOf axis="self"/>
+                      <dgm:constrLst>
+                        <dgm:constr type="tMarg" refType="primFontSz" fact="0.3"/>
+                        <dgm:constr type="bMarg" refType="primFontSz" fact="0.3"/>
+                        <dgm:constr type="lMarg" refType="primFontSz" fact="0.3"/>
+                        <dgm:constr type="rMarg" refType="primFontSz" fact="0.3"/>
+                      </dgm:constrLst>
+                      <dgm:ruleLst>
+                        <dgm:rule type="primFontSz" val="5" fact="NaN" max="NaN"/>
+                      </dgm:ruleLst>
+                    </dgm:layoutNode>
+                    <dgm:layoutNode name="vert3">
+                      <dgm:choose name="Name30">
+                        <dgm:if name="Name31" func="var" arg="dir" op="equ" val="norm">
+                          <dgm:alg type="lin">
+                            <dgm:param type="linDir" val="fromT"/>
+                            <dgm:param type="nodeHorzAlign" val="l"/>
+                          </dgm:alg>
+                        </dgm:if>
+                        <dgm:else name="Name32">
+                          <dgm:alg type="lin">
+                            <dgm:param type="linDir" val="fromT"/>
+                            <dgm:param type="nodeHorzAlign" val="r"/>
+                          </dgm:alg>
+                        </dgm:else>
+                      </dgm:choose>
+                      <dgm:shape xmlns:r="http://schemas.openxmlformats.org/officeDocument/2006/relationships" r:blip="">
+                        <dgm:adjLst/>
+                      </dgm:shape>
+                      <dgm:presOf/>
+                      <dgm:forEach name="Name33" axis="ch" ptType="node">
+                        <dgm:layoutNode name="horz4">
+                          <dgm:choose name="Name34">
+                            <dgm:if name="Name35" func="var" arg="dir" op="equ" val="norm">
+                              <dgm:alg type="lin">
+                                <dgm:param type="linDir" val="fromL"/>
+                                <dgm:param type="nodeVertAlign" val="t"/>
+                              </dgm:alg>
+                            </dgm:if>
+                            <dgm:else name="Name36">
+                              <dgm:alg type="lin">
+                                <dgm:param type="linDir" val="fromR"/>
+                                <dgm:param type="nodeVertAlign" val="t"/>
+                              </dgm:alg>
+                            </dgm:else>
+                          </dgm:choose>
+                          <dgm:shape xmlns:r="http://schemas.openxmlformats.org/officeDocument/2006/relationships" r:blip="">
+                            <dgm:adjLst/>
+                          </dgm:shape>
+                          <dgm:presOf/>
+                          <dgm:layoutNode name="horzSpace4">
+                            <dgm:alg type="sp"/>
+                            <dgm:shape xmlns:r="http://schemas.openxmlformats.org/officeDocument/2006/relationships" r:blip="">
+                              <dgm:adjLst/>
+                            </dgm:shape>
+                            <dgm:presOf/>
+                          </dgm:layoutNode>
+                          <dgm:layoutNode name="tx4" styleLbl="revTx">
+                            <dgm:varLst>
+                              <dgm:bulletEnabled val="1"/>
+                            </dgm:varLst>
+                            <dgm:alg type="tx">
+                              <dgm:param type="parTxLTRAlign" val="l"/>
+                              <dgm:param type="parTxRTLAlign" val="r"/>
+                              <dgm:param type="txAnchorVert" val="t"/>
+                            </dgm:alg>
+                            <dgm:shape xmlns:r="http://schemas.openxmlformats.org/officeDocument/2006/relationships" type="rect" r:blip="">
+                              <dgm:adjLst/>
+                            </dgm:shape>
+                            <dgm:presOf axis="desOrSelf" ptType="node"/>
+                            <dgm:constrLst>
+                              <dgm:constr type="tMarg" refType="primFontSz" fact="0.3"/>
+                              <dgm:constr type="bMarg" refType="primFontSz" fact="0.3"/>
+                              <dgm:constr type="lMarg" refType="primFontSz" fact="0.3"/>
+                              <dgm:constr type="rMarg" refType="primFontSz" fact="0.3"/>
+                            </dgm:constrLst>
+                            <dgm:ruleLst>
+                              <dgm:rule type="primFontSz" val="5" fact="NaN" max="NaN"/>
+                            </dgm:ruleLst>
+                          </dgm:layoutNode>
+                        </dgm:layoutNode>
+                      </dgm:forEach>
+                    </dgm:layoutNode>
+                  </dgm:layoutNode>
+                  <dgm:forEach name="Name37" axis="followSib" ptType="sibTrans" cnt="1">
+                    <dgm:layoutNode name="thinLine3" styleLbl="callout">
+                      <dgm:alg type="sp"/>
+                      <dgm:shape xmlns:r="http://schemas.openxmlformats.org/officeDocument/2006/relationships" type="line" r:blip="">
+                        <dgm:adjLst/>
+                      </dgm:shape>
+                      <dgm:presOf/>
+                    </dgm:layoutNode>
+                  </dgm:forEach>
+                </dgm:forEach>
+              </dgm:layoutNode>
+            </dgm:layoutNode>
+            <dgm:layoutNode name="thinLine2b" styleLbl="callout">
+              <dgm:alg type="sp"/>
+              <dgm:shape xmlns:r="http://schemas.openxmlformats.org/officeDocument/2006/relationships" type="line" r:blip="">
+                <dgm:adjLst/>
+              </dgm:shape>
+              <dgm:presOf/>
+            </dgm:layoutNode>
+            <dgm:layoutNode name="vertSpace2b">
+              <dgm:alg type="sp"/>
+              <dgm:shape xmlns:r="http://schemas.openxmlformats.org/officeDocument/2006/relationships" r:blip="">
+                <dgm:adjLst/>
+              </dgm:shape>
+              <dgm:presOf/>
+            </dgm:layoutNode>
+          </dgm:forEach>
+        </dgm:layoutNode>
+      </dgm:layoutNode>
+    </dgm:forEach>
+  </dgm:layoutNode>
+</dgm:layoutDef>
+</file>
+
 <file path=ppt/diagrams/quickStyle1.xml><?xml version="1.0" encoding="utf-8"?>
 <dgm:styleDef xmlns:dgm="http://schemas.openxmlformats.org/drawingml/2006/diagram" xmlns:a="http://schemas.openxmlformats.org/drawingml/2006/main" uniqueId="urn:microsoft.com/office/officeart/2005/8/quickstyle/simple2">
   <dgm:title val=""/>
@@ -5979,6 +8428,1040 @@
         <a:scrgbClr r="0" g="0" b="0"/>
       </a:fillRef>
       <a:effectRef idx="1">
+        <a:scrgbClr r="0" g="0" b="0"/>
+      </a:effectRef>
+      <a:fontRef idx="minor"/>
+    </dgm:style>
+  </dgm:styleLbl>
+  <dgm:styleLbl name="revTx">
+    <dgm:scene3d>
+      <a:camera prst="orthographicFront"/>
+      <a:lightRig rig="threePt" dir="t"/>
+    </dgm:scene3d>
+    <dgm:sp3d/>
+    <dgm:txPr/>
+    <dgm:style>
+      <a:lnRef idx="0">
+        <a:scrgbClr r="0" g="0" b="0"/>
+      </a:lnRef>
+      <a:fillRef idx="0">
+        <a:scrgbClr r="0" g="0" b="0"/>
+      </a:fillRef>
+      <a:effectRef idx="0">
+        <a:scrgbClr r="0" g="0" b="0"/>
+      </a:effectRef>
+      <a:fontRef idx="minor"/>
+    </dgm:style>
+  </dgm:styleLbl>
+</dgm:styleDef>
+</file>
+
+<file path=ppt/diagrams/quickStyle3.xml><?xml version="1.0" encoding="utf-8"?>
+<dgm:styleDef xmlns:dgm="http://schemas.openxmlformats.org/drawingml/2006/diagram" xmlns:a="http://schemas.openxmlformats.org/drawingml/2006/main" uniqueId="urn:microsoft.com/office/officeart/2005/8/quickstyle/simple4">
+  <dgm:title val=""/>
+  <dgm:desc val=""/>
+  <dgm:catLst>
+    <dgm:cat type="simple" pri="10400"/>
+  </dgm:catLst>
+  <dgm:scene3d>
+    <a:camera prst="orthographicFront"/>
+    <a:lightRig rig="threePt" dir="t"/>
+  </dgm:scene3d>
+  <dgm:styleLbl name="node0">
+    <dgm:scene3d>
+      <a:camera prst="orthographicFront"/>
+      <a:lightRig rig="threePt" dir="t"/>
+    </dgm:scene3d>
+    <dgm:sp3d/>
+    <dgm:txPr/>
+    <dgm:style>
+      <a:lnRef idx="0">
+        <a:scrgbClr r="0" g="0" b="0"/>
+      </a:lnRef>
+      <a:fillRef idx="3">
+        <a:scrgbClr r="0" g="0" b="0"/>
+      </a:fillRef>
+      <a:effectRef idx="2">
+        <a:scrgbClr r="0" g="0" b="0"/>
+      </a:effectRef>
+      <a:fontRef idx="minor">
+        <a:schemeClr val="lt1"/>
+      </a:fontRef>
+    </dgm:style>
+  </dgm:styleLbl>
+  <dgm:styleLbl name="lnNode1">
+    <dgm:scene3d>
+      <a:camera prst="orthographicFront"/>
+      <a:lightRig rig="threePt" dir="t"/>
+    </dgm:scene3d>
+    <dgm:sp3d/>
+    <dgm:txPr/>
+    <dgm:style>
+      <a:lnRef idx="1">
+        <a:scrgbClr r="0" g="0" b="0"/>
+      </a:lnRef>
+      <a:fillRef idx="3">
+        <a:scrgbClr r="0" g="0" b="0"/>
+      </a:fillRef>
+      <a:effectRef idx="2">
+        <a:scrgbClr r="0" g="0" b="0"/>
+      </a:effectRef>
+      <a:fontRef idx="minor">
+        <a:schemeClr val="lt1"/>
+      </a:fontRef>
+    </dgm:style>
+  </dgm:styleLbl>
+  <dgm:styleLbl name="vennNode1">
+    <dgm:scene3d>
+      <a:camera prst="orthographicFront"/>
+      <a:lightRig rig="threePt" dir="t"/>
+    </dgm:scene3d>
+    <dgm:sp3d/>
+    <dgm:txPr/>
+    <dgm:style>
+      <a:lnRef idx="0">
+        <a:scrgbClr r="0" g="0" b="0"/>
+      </a:lnRef>
+      <a:fillRef idx="3">
+        <a:scrgbClr r="0" g="0" b="0"/>
+      </a:fillRef>
+      <a:effectRef idx="0">
+        <a:scrgbClr r="0" g="0" b="0"/>
+      </a:effectRef>
+      <a:fontRef idx="minor">
+        <a:schemeClr val="tx1"/>
+      </a:fontRef>
+    </dgm:style>
+  </dgm:styleLbl>
+  <dgm:styleLbl name="alignNode1">
+    <dgm:scene3d>
+      <a:camera prst="orthographicFront"/>
+      <a:lightRig rig="threePt" dir="t"/>
+    </dgm:scene3d>
+    <dgm:sp3d/>
+    <dgm:txPr/>
+    <dgm:style>
+      <a:lnRef idx="1">
+        <a:scrgbClr r="0" g="0" b="0"/>
+      </a:lnRef>
+      <a:fillRef idx="3">
+        <a:scrgbClr r="0" g="0" b="0"/>
+      </a:fillRef>
+      <a:effectRef idx="2">
+        <a:scrgbClr r="0" g="0" b="0"/>
+      </a:effectRef>
+      <a:fontRef idx="minor">
+        <a:schemeClr val="lt1"/>
+      </a:fontRef>
+    </dgm:style>
+  </dgm:styleLbl>
+  <dgm:styleLbl name="node1">
+    <dgm:scene3d>
+      <a:camera prst="orthographicFront"/>
+      <a:lightRig rig="threePt" dir="t"/>
+    </dgm:scene3d>
+    <dgm:sp3d/>
+    <dgm:txPr/>
+    <dgm:style>
+      <a:lnRef idx="0">
+        <a:scrgbClr r="0" g="0" b="0"/>
+      </a:lnRef>
+      <a:fillRef idx="3">
+        <a:scrgbClr r="0" g="0" b="0"/>
+      </a:fillRef>
+      <a:effectRef idx="2">
+        <a:scrgbClr r="0" g="0" b="0"/>
+      </a:effectRef>
+      <a:fontRef idx="minor">
+        <a:schemeClr val="lt1"/>
+      </a:fontRef>
+    </dgm:style>
+  </dgm:styleLbl>
+  <dgm:styleLbl name="node2">
+    <dgm:scene3d>
+      <a:camera prst="orthographicFront"/>
+      <a:lightRig rig="threePt" dir="t"/>
+    </dgm:scene3d>
+    <dgm:sp3d/>
+    <dgm:txPr/>
+    <dgm:style>
+      <a:lnRef idx="0">
+        <a:scrgbClr r="0" g="0" b="0"/>
+      </a:lnRef>
+      <a:fillRef idx="3">
+        <a:scrgbClr r="0" g="0" b="0"/>
+      </a:fillRef>
+      <a:effectRef idx="2">
+        <a:scrgbClr r="0" g="0" b="0"/>
+      </a:effectRef>
+      <a:fontRef idx="minor">
+        <a:schemeClr val="lt1"/>
+      </a:fontRef>
+    </dgm:style>
+  </dgm:styleLbl>
+  <dgm:styleLbl name="node3">
+    <dgm:scene3d>
+      <a:camera prst="orthographicFront"/>
+      <a:lightRig rig="threePt" dir="t"/>
+    </dgm:scene3d>
+    <dgm:sp3d/>
+    <dgm:txPr/>
+    <dgm:style>
+      <a:lnRef idx="0">
+        <a:scrgbClr r="0" g="0" b="0"/>
+      </a:lnRef>
+      <a:fillRef idx="3">
+        <a:scrgbClr r="0" g="0" b="0"/>
+      </a:fillRef>
+      <a:effectRef idx="2">
+        <a:scrgbClr r="0" g="0" b="0"/>
+      </a:effectRef>
+      <a:fontRef idx="minor">
+        <a:schemeClr val="lt1"/>
+      </a:fontRef>
+    </dgm:style>
+  </dgm:styleLbl>
+  <dgm:styleLbl name="node4">
+    <dgm:scene3d>
+      <a:camera prst="orthographicFront"/>
+      <a:lightRig rig="threePt" dir="t"/>
+    </dgm:scene3d>
+    <dgm:sp3d/>
+    <dgm:txPr/>
+    <dgm:style>
+      <a:lnRef idx="0">
+        <a:scrgbClr r="0" g="0" b="0"/>
+      </a:lnRef>
+      <a:fillRef idx="3">
+        <a:scrgbClr r="0" g="0" b="0"/>
+      </a:fillRef>
+      <a:effectRef idx="2">
+        <a:scrgbClr r="0" g="0" b="0"/>
+      </a:effectRef>
+      <a:fontRef idx="minor">
+        <a:schemeClr val="lt1"/>
+      </a:fontRef>
+    </dgm:style>
+  </dgm:styleLbl>
+  <dgm:styleLbl name="fgImgPlace1">
+    <dgm:scene3d>
+      <a:camera prst="orthographicFront"/>
+      <a:lightRig rig="threePt" dir="t"/>
+    </dgm:scene3d>
+    <dgm:sp3d/>
+    <dgm:txPr/>
+    <dgm:style>
+      <a:lnRef idx="0">
+        <a:scrgbClr r="0" g="0" b="0"/>
+      </a:lnRef>
+      <a:fillRef idx="1">
+        <a:scrgbClr r="0" g="0" b="0"/>
+      </a:fillRef>
+      <a:effectRef idx="2">
+        <a:scrgbClr r="0" g="0" b="0"/>
+      </a:effectRef>
+      <a:fontRef idx="minor"/>
+    </dgm:style>
+  </dgm:styleLbl>
+  <dgm:styleLbl name="alignImgPlace1">
+    <dgm:scene3d>
+      <a:camera prst="orthographicFront"/>
+      <a:lightRig rig="threePt" dir="t"/>
+    </dgm:scene3d>
+    <dgm:sp3d/>
+    <dgm:txPr/>
+    <dgm:style>
+      <a:lnRef idx="0">
+        <a:scrgbClr r="0" g="0" b="0"/>
+      </a:lnRef>
+      <a:fillRef idx="1">
+        <a:scrgbClr r="0" g="0" b="0"/>
+      </a:fillRef>
+      <a:effectRef idx="2">
+        <a:scrgbClr r="0" g="0" b="0"/>
+      </a:effectRef>
+      <a:fontRef idx="minor"/>
+    </dgm:style>
+  </dgm:styleLbl>
+  <dgm:styleLbl name="bgImgPlace1">
+    <dgm:scene3d>
+      <a:camera prst="orthographicFront"/>
+      <a:lightRig rig="threePt" dir="t"/>
+    </dgm:scene3d>
+    <dgm:sp3d/>
+    <dgm:txPr/>
+    <dgm:style>
+      <a:lnRef idx="0">
+        <a:scrgbClr r="0" g="0" b="0"/>
+      </a:lnRef>
+      <a:fillRef idx="1">
+        <a:scrgbClr r="0" g="0" b="0"/>
+      </a:fillRef>
+      <a:effectRef idx="2">
+        <a:scrgbClr r="0" g="0" b="0"/>
+      </a:effectRef>
+      <a:fontRef idx="minor"/>
+    </dgm:style>
+  </dgm:styleLbl>
+  <dgm:styleLbl name="sibTrans2D1">
+    <dgm:scene3d>
+      <a:camera prst="orthographicFront"/>
+      <a:lightRig rig="threePt" dir="t"/>
+    </dgm:scene3d>
+    <dgm:sp3d/>
+    <dgm:txPr/>
+    <dgm:style>
+      <a:lnRef idx="0">
+        <a:scrgbClr r="0" g="0" b="0"/>
+      </a:lnRef>
+      <a:fillRef idx="3">
+        <a:scrgbClr r="0" g="0" b="0"/>
+      </a:fillRef>
+      <a:effectRef idx="2">
+        <a:scrgbClr r="0" g="0" b="0"/>
+      </a:effectRef>
+      <a:fontRef idx="minor">
+        <a:schemeClr val="lt1"/>
+      </a:fontRef>
+    </dgm:style>
+  </dgm:styleLbl>
+  <dgm:styleLbl name="fgSibTrans2D1">
+    <dgm:scene3d>
+      <a:camera prst="orthographicFront"/>
+      <a:lightRig rig="threePt" dir="t"/>
+    </dgm:scene3d>
+    <dgm:sp3d/>
+    <dgm:txPr/>
+    <dgm:style>
+      <a:lnRef idx="0">
+        <a:scrgbClr r="0" g="0" b="0"/>
+      </a:lnRef>
+      <a:fillRef idx="3">
+        <a:scrgbClr r="0" g="0" b="0"/>
+      </a:fillRef>
+      <a:effectRef idx="2">
+        <a:scrgbClr r="0" g="0" b="0"/>
+      </a:effectRef>
+      <a:fontRef idx="minor">
+        <a:schemeClr val="lt1"/>
+      </a:fontRef>
+    </dgm:style>
+  </dgm:styleLbl>
+  <dgm:styleLbl name="bgSibTrans2D1">
+    <dgm:scene3d>
+      <a:camera prst="orthographicFront"/>
+      <a:lightRig rig="threePt" dir="t"/>
+    </dgm:scene3d>
+    <dgm:sp3d/>
+    <dgm:txPr/>
+    <dgm:style>
+      <a:lnRef idx="0">
+        <a:scrgbClr r="0" g="0" b="0"/>
+      </a:lnRef>
+      <a:fillRef idx="3">
+        <a:scrgbClr r="0" g="0" b="0"/>
+      </a:fillRef>
+      <a:effectRef idx="2">
+        <a:scrgbClr r="0" g="0" b="0"/>
+      </a:effectRef>
+      <a:fontRef idx="minor">
+        <a:schemeClr val="lt1"/>
+      </a:fontRef>
+    </dgm:style>
+  </dgm:styleLbl>
+  <dgm:styleLbl name="sibTrans1D1">
+    <dgm:scene3d>
+      <a:camera prst="orthographicFront"/>
+      <a:lightRig rig="threePt" dir="t"/>
+    </dgm:scene3d>
+    <dgm:sp3d/>
+    <dgm:txPr/>
+    <dgm:style>
+      <a:lnRef idx="1">
+        <a:scrgbClr r="0" g="0" b="0"/>
+      </a:lnRef>
+      <a:fillRef idx="0">
+        <a:scrgbClr r="0" g="0" b="0"/>
+      </a:fillRef>
+      <a:effectRef idx="0">
+        <a:scrgbClr r="0" g="0" b="0"/>
+      </a:effectRef>
+      <a:fontRef idx="minor"/>
+    </dgm:style>
+  </dgm:styleLbl>
+  <dgm:styleLbl name="callout">
+    <dgm:scene3d>
+      <a:camera prst="orthographicFront"/>
+      <a:lightRig rig="threePt" dir="t"/>
+    </dgm:scene3d>
+    <dgm:sp3d/>
+    <dgm:txPr/>
+    <dgm:style>
+      <a:lnRef idx="2">
+        <a:scrgbClr r="0" g="0" b="0"/>
+      </a:lnRef>
+      <a:fillRef idx="1">
+        <a:scrgbClr r="0" g="0" b="0"/>
+      </a:fillRef>
+      <a:effectRef idx="1">
+        <a:scrgbClr r="0" g="0" b="0"/>
+      </a:effectRef>
+      <a:fontRef idx="minor"/>
+    </dgm:style>
+  </dgm:styleLbl>
+  <dgm:styleLbl name="asst0">
+    <dgm:scene3d>
+      <a:camera prst="orthographicFront"/>
+      <a:lightRig rig="threePt" dir="t"/>
+    </dgm:scene3d>
+    <dgm:sp3d/>
+    <dgm:txPr/>
+    <dgm:style>
+      <a:lnRef idx="0">
+        <a:scrgbClr r="0" g="0" b="0"/>
+      </a:lnRef>
+      <a:fillRef idx="3">
+        <a:scrgbClr r="0" g="0" b="0"/>
+      </a:fillRef>
+      <a:effectRef idx="2">
+        <a:scrgbClr r="0" g="0" b="0"/>
+      </a:effectRef>
+      <a:fontRef idx="minor">
+        <a:schemeClr val="lt1"/>
+      </a:fontRef>
+    </dgm:style>
+  </dgm:styleLbl>
+  <dgm:styleLbl name="asst1">
+    <dgm:scene3d>
+      <a:camera prst="orthographicFront"/>
+      <a:lightRig rig="threePt" dir="t"/>
+    </dgm:scene3d>
+    <dgm:sp3d/>
+    <dgm:txPr/>
+    <dgm:style>
+      <a:lnRef idx="0">
+        <a:scrgbClr r="0" g="0" b="0"/>
+      </a:lnRef>
+      <a:fillRef idx="3">
+        <a:scrgbClr r="0" g="0" b="0"/>
+      </a:fillRef>
+      <a:effectRef idx="2">
+        <a:scrgbClr r="0" g="0" b="0"/>
+      </a:effectRef>
+      <a:fontRef idx="minor">
+        <a:schemeClr val="lt1"/>
+      </a:fontRef>
+    </dgm:style>
+  </dgm:styleLbl>
+  <dgm:styleLbl name="asst2">
+    <dgm:scene3d>
+      <a:camera prst="orthographicFront"/>
+      <a:lightRig rig="threePt" dir="t"/>
+    </dgm:scene3d>
+    <dgm:sp3d/>
+    <dgm:txPr/>
+    <dgm:style>
+      <a:lnRef idx="0">
+        <a:scrgbClr r="0" g="0" b="0"/>
+      </a:lnRef>
+      <a:fillRef idx="3">
+        <a:scrgbClr r="0" g="0" b="0"/>
+      </a:fillRef>
+      <a:effectRef idx="2">
+        <a:scrgbClr r="0" g="0" b="0"/>
+      </a:effectRef>
+      <a:fontRef idx="minor">
+        <a:schemeClr val="lt1"/>
+      </a:fontRef>
+    </dgm:style>
+  </dgm:styleLbl>
+  <dgm:styleLbl name="asst3">
+    <dgm:scene3d>
+      <a:camera prst="orthographicFront"/>
+      <a:lightRig rig="threePt" dir="t"/>
+    </dgm:scene3d>
+    <dgm:sp3d/>
+    <dgm:txPr/>
+    <dgm:style>
+      <a:lnRef idx="0">
+        <a:scrgbClr r="0" g="0" b="0"/>
+      </a:lnRef>
+      <a:fillRef idx="3">
+        <a:scrgbClr r="0" g="0" b="0"/>
+      </a:fillRef>
+      <a:effectRef idx="2">
+        <a:scrgbClr r="0" g="0" b="0"/>
+      </a:effectRef>
+      <a:fontRef idx="minor">
+        <a:schemeClr val="lt1"/>
+      </a:fontRef>
+    </dgm:style>
+  </dgm:styleLbl>
+  <dgm:styleLbl name="asst4">
+    <dgm:scene3d>
+      <a:camera prst="orthographicFront"/>
+      <a:lightRig rig="threePt" dir="t"/>
+    </dgm:scene3d>
+    <dgm:sp3d/>
+    <dgm:txPr/>
+    <dgm:style>
+      <a:lnRef idx="0">
+        <a:scrgbClr r="0" g="0" b="0"/>
+      </a:lnRef>
+      <a:fillRef idx="3">
+        <a:scrgbClr r="0" g="0" b="0"/>
+      </a:fillRef>
+      <a:effectRef idx="2">
+        <a:scrgbClr r="0" g="0" b="0"/>
+      </a:effectRef>
+      <a:fontRef idx="minor">
+        <a:schemeClr val="lt1"/>
+      </a:fontRef>
+    </dgm:style>
+  </dgm:styleLbl>
+  <dgm:styleLbl name="parChTrans2D1">
+    <dgm:scene3d>
+      <a:camera prst="orthographicFront"/>
+      <a:lightRig rig="threePt" dir="t"/>
+    </dgm:scene3d>
+    <dgm:sp3d/>
+    <dgm:txPr/>
+    <dgm:style>
+      <a:lnRef idx="0">
+        <a:scrgbClr r="0" g="0" b="0"/>
+      </a:lnRef>
+      <a:fillRef idx="3">
+        <a:scrgbClr r="0" g="0" b="0"/>
+      </a:fillRef>
+      <a:effectRef idx="2">
+        <a:scrgbClr r="0" g="0" b="0"/>
+      </a:effectRef>
+      <a:fontRef idx="minor">
+        <a:schemeClr val="lt1"/>
+      </a:fontRef>
+    </dgm:style>
+  </dgm:styleLbl>
+  <dgm:styleLbl name="parChTrans2D2">
+    <dgm:scene3d>
+      <a:camera prst="orthographicFront"/>
+      <a:lightRig rig="threePt" dir="t"/>
+    </dgm:scene3d>
+    <dgm:sp3d/>
+    <dgm:txPr/>
+    <dgm:style>
+      <a:lnRef idx="0">
+        <a:scrgbClr r="0" g="0" b="0"/>
+      </a:lnRef>
+      <a:fillRef idx="3">
+        <a:scrgbClr r="0" g="0" b="0"/>
+      </a:fillRef>
+      <a:effectRef idx="2">
+        <a:scrgbClr r="0" g="0" b="0"/>
+      </a:effectRef>
+      <a:fontRef idx="minor">
+        <a:schemeClr val="lt1"/>
+      </a:fontRef>
+    </dgm:style>
+  </dgm:styleLbl>
+  <dgm:styleLbl name="parChTrans2D3">
+    <dgm:scene3d>
+      <a:camera prst="orthographicFront"/>
+      <a:lightRig rig="threePt" dir="t"/>
+    </dgm:scene3d>
+    <dgm:sp3d/>
+    <dgm:txPr/>
+    <dgm:style>
+      <a:lnRef idx="1">
+        <a:scrgbClr r="0" g="0" b="0"/>
+      </a:lnRef>
+      <a:fillRef idx="3">
+        <a:scrgbClr r="0" g="0" b="0"/>
+      </a:fillRef>
+      <a:effectRef idx="2">
+        <a:scrgbClr r="0" g="0" b="0"/>
+      </a:effectRef>
+      <a:fontRef idx="minor">
+        <a:schemeClr val="lt1"/>
+      </a:fontRef>
+    </dgm:style>
+  </dgm:styleLbl>
+  <dgm:styleLbl name="parChTrans2D4">
+    <dgm:scene3d>
+      <a:camera prst="orthographicFront"/>
+      <a:lightRig rig="threePt" dir="t"/>
+    </dgm:scene3d>
+    <dgm:sp3d/>
+    <dgm:txPr/>
+    <dgm:style>
+      <a:lnRef idx="1">
+        <a:scrgbClr r="0" g="0" b="0"/>
+      </a:lnRef>
+      <a:fillRef idx="3">
+        <a:scrgbClr r="0" g="0" b="0"/>
+      </a:fillRef>
+      <a:effectRef idx="2">
+        <a:scrgbClr r="0" g="0" b="0"/>
+      </a:effectRef>
+      <a:fontRef idx="minor">
+        <a:schemeClr val="lt1"/>
+      </a:fontRef>
+    </dgm:style>
+  </dgm:styleLbl>
+  <dgm:styleLbl name="parChTrans1D1">
+    <dgm:scene3d>
+      <a:camera prst="orthographicFront"/>
+      <a:lightRig rig="threePt" dir="t"/>
+    </dgm:scene3d>
+    <dgm:sp3d/>
+    <dgm:txPr/>
+    <dgm:style>
+      <a:lnRef idx="1">
+        <a:scrgbClr r="0" g="0" b="0"/>
+      </a:lnRef>
+      <a:fillRef idx="0">
+        <a:scrgbClr r="0" g="0" b="0"/>
+      </a:fillRef>
+      <a:effectRef idx="0">
+        <a:scrgbClr r="0" g="0" b="0"/>
+      </a:effectRef>
+      <a:fontRef idx="minor"/>
+    </dgm:style>
+  </dgm:styleLbl>
+  <dgm:styleLbl name="parChTrans1D2">
+    <dgm:scene3d>
+      <a:camera prst="orthographicFront"/>
+      <a:lightRig rig="threePt" dir="t"/>
+    </dgm:scene3d>
+    <dgm:sp3d/>
+    <dgm:txPr/>
+    <dgm:style>
+      <a:lnRef idx="1">
+        <a:scrgbClr r="0" g="0" b="0"/>
+      </a:lnRef>
+      <a:fillRef idx="0">
+        <a:scrgbClr r="0" g="0" b="0"/>
+      </a:fillRef>
+      <a:effectRef idx="0">
+        <a:scrgbClr r="0" g="0" b="0"/>
+      </a:effectRef>
+      <a:fontRef idx="minor"/>
+    </dgm:style>
+  </dgm:styleLbl>
+  <dgm:styleLbl name="parChTrans1D3">
+    <dgm:scene3d>
+      <a:camera prst="orthographicFront"/>
+      <a:lightRig rig="threePt" dir="t"/>
+    </dgm:scene3d>
+    <dgm:sp3d/>
+    <dgm:txPr/>
+    <dgm:style>
+      <a:lnRef idx="1">
+        <a:scrgbClr r="0" g="0" b="0"/>
+      </a:lnRef>
+      <a:fillRef idx="0">
+        <a:scrgbClr r="0" g="0" b="0"/>
+      </a:fillRef>
+      <a:effectRef idx="0">
+        <a:scrgbClr r="0" g="0" b="0"/>
+      </a:effectRef>
+      <a:fontRef idx="minor"/>
+    </dgm:style>
+  </dgm:styleLbl>
+  <dgm:styleLbl name="parChTrans1D4">
+    <dgm:scene3d>
+      <a:camera prst="orthographicFront"/>
+      <a:lightRig rig="threePt" dir="t"/>
+    </dgm:scene3d>
+    <dgm:sp3d/>
+    <dgm:txPr/>
+    <dgm:style>
+      <a:lnRef idx="1">
+        <a:scrgbClr r="0" g="0" b="0"/>
+      </a:lnRef>
+      <a:fillRef idx="0">
+        <a:scrgbClr r="0" g="0" b="0"/>
+      </a:fillRef>
+      <a:effectRef idx="0">
+        <a:scrgbClr r="0" g="0" b="0"/>
+      </a:effectRef>
+      <a:fontRef idx="minor"/>
+    </dgm:style>
+  </dgm:styleLbl>
+  <dgm:styleLbl name="fgAcc1">
+    <dgm:scene3d>
+      <a:camera prst="orthographicFront"/>
+      <a:lightRig rig="threePt" dir="t"/>
+    </dgm:scene3d>
+    <dgm:sp3d/>
+    <dgm:txPr/>
+    <dgm:style>
+      <a:lnRef idx="1">
+        <a:scrgbClr r="0" g="0" b="0"/>
+      </a:lnRef>
+      <a:fillRef idx="1">
+        <a:scrgbClr r="0" g="0" b="0"/>
+      </a:fillRef>
+      <a:effectRef idx="0">
+        <a:scrgbClr r="0" g="0" b="0"/>
+      </a:effectRef>
+      <a:fontRef idx="minor"/>
+    </dgm:style>
+  </dgm:styleLbl>
+  <dgm:styleLbl name="conFgAcc1">
+    <dgm:scene3d>
+      <a:camera prst="orthographicFront"/>
+      <a:lightRig rig="threePt" dir="t"/>
+    </dgm:scene3d>
+    <dgm:sp3d/>
+    <dgm:txPr/>
+    <dgm:style>
+      <a:lnRef idx="1">
+        <a:scrgbClr r="0" g="0" b="0"/>
+      </a:lnRef>
+      <a:fillRef idx="1">
+        <a:scrgbClr r="0" g="0" b="0"/>
+      </a:fillRef>
+      <a:effectRef idx="0">
+        <a:scrgbClr r="0" g="0" b="0"/>
+      </a:effectRef>
+      <a:fontRef idx="minor"/>
+    </dgm:style>
+  </dgm:styleLbl>
+  <dgm:styleLbl name="alignAcc1">
+    <dgm:scene3d>
+      <a:camera prst="orthographicFront"/>
+      <a:lightRig rig="threePt" dir="t"/>
+    </dgm:scene3d>
+    <dgm:sp3d/>
+    <dgm:txPr/>
+    <dgm:style>
+      <a:lnRef idx="1">
+        <a:scrgbClr r="0" g="0" b="0"/>
+      </a:lnRef>
+      <a:fillRef idx="1">
+        <a:scrgbClr r="0" g="0" b="0"/>
+      </a:fillRef>
+      <a:effectRef idx="0">
+        <a:scrgbClr r="0" g="0" b="0"/>
+      </a:effectRef>
+      <a:fontRef idx="minor"/>
+    </dgm:style>
+  </dgm:styleLbl>
+  <dgm:styleLbl name="trAlignAcc1">
+    <dgm:scene3d>
+      <a:camera prst="orthographicFront"/>
+      <a:lightRig rig="threePt" dir="t"/>
+    </dgm:scene3d>
+    <dgm:sp3d/>
+    <dgm:txPr/>
+    <dgm:style>
+      <a:lnRef idx="1">
+        <a:scrgbClr r="0" g="0" b="0"/>
+      </a:lnRef>
+      <a:fillRef idx="1">
+        <a:scrgbClr r="0" g="0" b="0"/>
+      </a:fillRef>
+      <a:effectRef idx="0">
+        <a:scrgbClr r="0" g="0" b="0"/>
+      </a:effectRef>
+      <a:fontRef idx="minor"/>
+    </dgm:style>
+  </dgm:styleLbl>
+  <dgm:styleLbl name="bgAcc1">
+    <dgm:scene3d>
+      <a:camera prst="orthographicFront"/>
+      <a:lightRig rig="threePt" dir="t"/>
+    </dgm:scene3d>
+    <dgm:sp3d/>
+    <dgm:txPr/>
+    <dgm:style>
+      <a:lnRef idx="1">
+        <a:scrgbClr r="0" g="0" b="0"/>
+      </a:lnRef>
+      <a:fillRef idx="1">
+        <a:scrgbClr r="0" g="0" b="0"/>
+      </a:fillRef>
+      <a:effectRef idx="0">
+        <a:scrgbClr r="0" g="0" b="0"/>
+      </a:effectRef>
+      <a:fontRef idx="minor"/>
+    </dgm:style>
+  </dgm:styleLbl>
+  <dgm:styleLbl name="solidFgAcc1">
+    <dgm:scene3d>
+      <a:camera prst="orthographicFront"/>
+      <a:lightRig rig="threePt" dir="t"/>
+    </dgm:scene3d>
+    <dgm:sp3d/>
+    <dgm:txPr/>
+    <dgm:style>
+      <a:lnRef idx="1">
+        <a:scrgbClr r="0" g="0" b="0"/>
+      </a:lnRef>
+      <a:fillRef idx="1">
+        <a:scrgbClr r="0" g="0" b="0"/>
+      </a:fillRef>
+      <a:effectRef idx="0">
+        <a:scrgbClr r="0" g="0" b="0"/>
+      </a:effectRef>
+      <a:fontRef idx="minor"/>
+    </dgm:style>
+  </dgm:styleLbl>
+  <dgm:styleLbl name="solidAlignAcc1">
+    <dgm:scene3d>
+      <a:camera prst="orthographicFront"/>
+      <a:lightRig rig="threePt" dir="t"/>
+    </dgm:scene3d>
+    <dgm:sp3d/>
+    <dgm:txPr/>
+    <dgm:style>
+      <a:lnRef idx="1">
+        <a:scrgbClr r="0" g="0" b="0"/>
+      </a:lnRef>
+      <a:fillRef idx="1">
+        <a:scrgbClr r="0" g="0" b="0"/>
+      </a:fillRef>
+      <a:effectRef idx="0">
+        <a:scrgbClr r="0" g="0" b="0"/>
+      </a:effectRef>
+      <a:fontRef idx="minor"/>
+    </dgm:style>
+  </dgm:styleLbl>
+  <dgm:styleLbl name="solidBgAcc1">
+    <dgm:scene3d>
+      <a:camera prst="orthographicFront"/>
+      <a:lightRig rig="threePt" dir="t"/>
+    </dgm:scene3d>
+    <dgm:sp3d/>
+    <dgm:txPr/>
+    <dgm:style>
+      <a:lnRef idx="1">
+        <a:scrgbClr r="0" g="0" b="0"/>
+      </a:lnRef>
+      <a:fillRef idx="1">
+        <a:scrgbClr r="0" g="0" b="0"/>
+      </a:fillRef>
+      <a:effectRef idx="0">
+        <a:scrgbClr r="0" g="0" b="0"/>
+      </a:effectRef>
+      <a:fontRef idx="minor"/>
+    </dgm:style>
+  </dgm:styleLbl>
+  <dgm:styleLbl name="fgAccFollowNode1">
+    <dgm:scene3d>
+      <a:camera prst="orthographicFront"/>
+      <a:lightRig rig="threePt" dir="t"/>
+    </dgm:scene3d>
+    <dgm:sp3d/>
+    <dgm:txPr/>
+    <dgm:style>
+      <a:lnRef idx="1">
+        <a:scrgbClr r="0" g="0" b="0"/>
+      </a:lnRef>
+      <a:fillRef idx="1">
+        <a:scrgbClr r="0" g="0" b="0"/>
+      </a:fillRef>
+      <a:effectRef idx="0">
+        <a:scrgbClr r="0" g="0" b="0"/>
+      </a:effectRef>
+      <a:fontRef idx="minor"/>
+    </dgm:style>
+  </dgm:styleLbl>
+  <dgm:styleLbl name="alignAccFollowNode1">
+    <dgm:scene3d>
+      <a:camera prst="orthographicFront"/>
+      <a:lightRig rig="threePt" dir="t"/>
+    </dgm:scene3d>
+    <dgm:sp3d/>
+    <dgm:txPr/>
+    <dgm:style>
+      <a:lnRef idx="1">
+        <a:scrgbClr r="0" g="0" b="0"/>
+      </a:lnRef>
+      <a:fillRef idx="1">
+        <a:scrgbClr r="0" g="0" b="0"/>
+      </a:fillRef>
+      <a:effectRef idx="0">
+        <a:scrgbClr r="0" g="0" b="0"/>
+      </a:effectRef>
+      <a:fontRef idx="minor"/>
+    </dgm:style>
+  </dgm:styleLbl>
+  <dgm:styleLbl name="bgAccFollowNode1">
+    <dgm:scene3d>
+      <a:camera prst="orthographicFront"/>
+      <a:lightRig rig="threePt" dir="t"/>
+    </dgm:scene3d>
+    <dgm:sp3d/>
+    <dgm:txPr/>
+    <dgm:style>
+      <a:lnRef idx="1">
+        <a:scrgbClr r="0" g="0" b="0"/>
+      </a:lnRef>
+      <a:fillRef idx="1">
+        <a:scrgbClr r="0" g="0" b="0"/>
+      </a:fillRef>
+      <a:effectRef idx="0">
+        <a:scrgbClr r="0" g="0" b="0"/>
+      </a:effectRef>
+      <a:fontRef idx="minor"/>
+    </dgm:style>
+  </dgm:styleLbl>
+  <dgm:styleLbl name="fgAcc0">
+    <dgm:scene3d>
+      <a:camera prst="orthographicFront"/>
+      <a:lightRig rig="threePt" dir="t"/>
+    </dgm:scene3d>
+    <dgm:sp3d/>
+    <dgm:txPr/>
+    <dgm:style>
+      <a:lnRef idx="1">
+        <a:scrgbClr r="0" g="0" b="0"/>
+      </a:lnRef>
+      <a:fillRef idx="1">
+        <a:scrgbClr r="0" g="0" b="0"/>
+      </a:fillRef>
+      <a:effectRef idx="0">
+        <a:scrgbClr r="0" g="0" b="0"/>
+      </a:effectRef>
+      <a:fontRef idx="minor"/>
+    </dgm:style>
+  </dgm:styleLbl>
+  <dgm:styleLbl name="fgAcc2">
+    <dgm:scene3d>
+      <a:camera prst="orthographicFront"/>
+      <a:lightRig rig="threePt" dir="t"/>
+    </dgm:scene3d>
+    <dgm:sp3d/>
+    <dgm:txPr/>
+    <dgm:style>
+      <a:lnRef idx="1">
+        <a:scrgbClr r="0" g="0" b="0"/>
+      </a:lnRef>
+      <a:fillRef idx="1">
+        <a:scrgbClr r="0" g="0" b="0"/>
+      </a:fillRef>
+      <a:effectRef idx="0">
+        <a:scrgbClr r="0" g="0" b="0"/>
+      </a:effectRef>
+      <a:fontRef idx="minor"/>
+    </dgm:style>
+  </dgm:styleLbl>
+  <dgm:styleLbl name="fgAcc3">
+    <dgm:scene3d>
+      <a:camera prst="orthographicFront"/>
+      <a:lightRig rig="threePt" dir="t"/>
+    </dgm:scene3d>
+    <dgm:sp3d/>
+    <dgm:txPr/>
+    <dgm:style>
+      <a:lnRef idx="1">
+        <a:scrgbClr r="0" g="0" b="0"/>
+      </a:lnRef>
+      <a:fillRef idx="1">
+        <a:scrgbClr r="0" g="0" b="0"/>
+      </a:fillRef>
+      <a:effectRef idx="0">
+        <a:scrgbClr r="0" g="0" b="0"/>
+      </a:effectRef>
+      <a:fontRef idx="minor"/>
+    </dgm:style>
+  </dgm:styleLbl>
+  <dgm:styleLbl name="fgAcc4">
+    <dgm:scene3d>
+      <a:camera prst="orthographicFront"/>
+      <a:lightRig rig="threePt" dir="t"/>
+    </dgm:scene3d>
+    <dgm:sp3d/>
+    <dgm:txPr/>
+    <dgm:style>
+      <a:lnRef idx="1">
+        <a:scrgbClr r="0" g="0" b="0"/>
+      </a:lnRef>
+      <a:fillRef idx="1">
+        <a:scrgbClr r="0" g="0" b="0"/>
+      </a:fillRef>
+      <a:effectRef idx="0">
+        <a:scrgbClr r="0" g="0" b="0"/>
+      </a:effectRef>
+      <a:fontRef idx="minor"/>
+    </dgm:style>
+  </dgm:styleLbl>
+  <dgm:styleLbl name="bgShp">
+    <dgm:scene3d>
+      <a:camera prst="orthographicFront"/>
+      <a:lightRig rig="threePt" dir="t"/>
+    </dgm:scene3d>
+    <dgm:sp3d/>
+    <dgm:txPr/>
+    <dgm:style>
+      <a:lnRef idx="0">
+        <a:scrgbClr r="0" g="0" b="0"/>
+      </a:lnRef>
+      <a:fillRef idx="1">
+        <a:scrgbClr r="0" g="0" b="0"/>
+      </a:fillRef>
+      <a:effectRef idx="2">
+        <a:scrgbClr r="0" g="0" b="0"/>
+      </a:effectRef>
+      <a:fontRef idx="minor"/>
+    </dgm:style>
+  </dgm:styleLbl>
+  <dgm:styleLbl name="dkBgShp">
+    <dgm:scene3d>
+      <a:camera prst="orthographicFront"/>
+      <a:lightRig rig="threePt" dir="t"/>
+    </dgm:scene3d>
+    <dgm:sp3d/>
+    <dgm:txPr/>
+    <dgm:style>
+      <a:lnRef idx="0">
+        <a:scrgbClr r="0" g="0" b="0"/>
+      </a:lnRef>
+      <a:fillRef idx="1">
+        <a:scrgbClr r="0" g="0" b="0"/>
+      </a:fillRef>
+      <a:effectRef idx="2">
+        <a:scrgbClr r="0" g="0" b="0"/>
+      </a:effectRef>
+      <a:fontRef idx="minor"/>
+    </dgm:style>
+  </dgm:styleLbl>
+  <dgm:styleLbl name="trBgShp">
+    <dgm:scene3d>
+      <a:camera prst="orthographicFront"/>
+      <a:lightRig rig="threePt" dir="t"/>
+    </dgm:scene3d>
+    <dgm:sp3d/>
+    <dgm:txPr/>
+    <dgm:style>
+      <a:lnRef idx="0">
+        <a:scrgbClr r="0" g="0" b="0"/>
+      </a:lnRef>
+      <a:fillRef idx="1">
+        <a:scrgbClr r="0" g="0" b="0"/>
+      </a:fillRef>
+      <a:effectRef idx="0">
+        <a:scrgbClr r="0" g="0" b="0"/>
+      </a:effectRef>
+      <a:fontRef idx="minor"/>
+    </dgm:style>
+  </dgm:styleLbl>
+  <dgm:styleLbl name="fgShp">
+    <dgm:scene3d>
+      <a:camera prst="orthographicFront"/>
+      <a:lightRig rig="threePt" dir="t"/>
+    </dgm:scene3d>
+    <dgm:sp3d/>
+    <dgm:txPr/>
+    <dgm:style>
+      <a:lnRef idx="0">
+        <a:scrgbClr r="0" g="0" b="0"/>
+      </a:lnRef>
+      <a:fillRef idx="3">
+        <a:scrgbClr r="0" g="0" b="0"/>
+      </a:fillRef>
+      <a:effectRef idx="2">
         <a:scrgbClr r="0" g="0" b="0"/>
       </a:effectRef>
       <a:fontRef idx="minor"/>
@@ -6101,7 +9584,7 @@
           <a:p>
             <a:fld id="{044BAF1F-8C39-4414-8C74-C895C5798F0A}" type="datetimeFigureOut">
               <a:rPr lang="de-CH" smtClean="0"/>
-              <a:t>27.06.2025</a:t>
+              <a:t>03.07.2025</a:t>
             </a:fld>
             <a:endParaRPr lang="de-CH"/>
           </a:p>
@@ -6295,7 +9778,7 @@
           <a:p>
             <a:fld id="{FE0A5E45-F3FD-470B-A6F8-568D89AC2C4F}" type="datetimeFigureOut">
               <a:rPr lang="de-CH" smtClean="0"/>
-              <a:t>27.06.2025</a:t>
+              <a:t>03.07.2025</a:t>
             </a:fld>
             <a:endParaRPr lang="de-CH"/>
           </a:p>
@@ -6608,96 +10091,78 @@
           <a:bodyPr/>
           <a:lstStyle/>
           <a:p>
-            <a:pPr marL="171450" indent="-171450" algn="l">
-              <a:buFont typeface="Symbol" panose="05050102010706020507" pitchFamily="18" charset="2"/>
-              <a:buChar char="-"/>
-            </a:pPr>
-            <a:r>
-              <a:rPr lang="de-DE" b="0" i="0" dirty="0">
-                <a:effectLst/>
-                <a:latin typeface="-apple-system"/>
-              </a:rPr>
-              <a:t>Thema</a:t>
-            </a:r>
-          </a:p>
-          <a:p>
-            <a:pPr marL="171450" indent="-171450" algn="l">
-              <a:buFont typeface="Symbol" panose="05050102010706020507" pitchFamily="18" charset="2"/>
-              <a:buChar char="-"/>
-            </a:pPr>
-            <a:r>
-              <a:rPr lang="de-DE" b="0" i="0" dirty="0">
-                <a:effectLst/>
-                <a:latin typeface="-apple-system"/>
-              </a:rPr>
-              <a:t>Ziele</a:t>
-            </a:r>
-          </a:p>
-          <a:p>
-            <a:pPr marL="171450" indent="-171450" algn="l">
-              <a:buFont typeface="Symbol" panose="05050102010706020507" pitchFamily="18" charset="2"/>
-              <a:buChar char="-"/>
-            </a:pPr>
-            <a:r>
-              <a:rPr lang="de-DE" b="0" i="0" dirty="0">
-                <a:effectLst/>
-                <a:latin typeface="-apple-system"/>
-              </a:rPr>
-              <a:t>Zwischenziele</a:t>
-            </a:r>
-          </a:p>
-          <a:p>
-            <a:pPr marL="171450" indent="-171450" algn="l">
-              <a:buFont typeface="Symbol" panose="05050102010706020507" pitchFamily="18" charset="2"/>
-              <a:buChar char="-"/>
-            </a:pPr>
-            <a:r>
-              <a:rPr lang="de-DE" b="0" i="0" dirty="0">
-                <a:effectLst/>
-                <a:latin typeface="-apple-system"/>
-              </a:rPr>
-              <a:t>Demonstration</a:t>
-            </a:r>
-          </a:p>
-          <a:p>
-            <a:pPr marL="171450" indent="-171450" algn="l">
-              <a:buFont typeface="Symbol" panose="05050102010706020507" pitchFamily="18" charset="2"/>
-              <a:buChar char="-"/>
-            </a:pPr>
-            <a:r>
-              <a:rPr lang="de-DE" b="0" i="0" dirty="0">
-                <a:effectLst/>
-                <a:latin typeface="-apple-system"/>
-              </a:rPr>
-              <a:t>Pros/Contras - was lief gut, was lief schlecht</a:t>
-            </a:r>
-          </a:p>
-          <a:p>
-            <a:pPr marL="171450" indent="-171450" algn="l">
-              <a:buFont typeface="Symbol" panose="05050102010706020507" pitchFamily="18" charset="2"/>
-              <a:buChar char="-"/>
-            </a:pPr>
-            <a:r>
-              <a:rPr lang="de-DE" b="0" i="0" dirty="0">
-                <a:effectLst/>
-                <a:latin typeface="-apple-system"/>
-              </a:rPr>
-              <a:t>Fazit</a:t>
-            </a:r>
-          </a:p>
-          <a:p>
-            <a:pPr marL="171450" indent="-171450" algn="l">
-              <a:buFont typeface="Symbol" panose="05050102010706020507" pitchFamily="18" charset="2"/>
-              <a:buChar char="-"/>
-            </a:pPr>
-            <a:r>
-              <a:rPr lang="de-DE" b="0" i="0" dirty="0">
-                <a:effectLst/>
-                <a:latin typeface="-apple-system"/>
-              </a:rPr>
-              <a:t>Quellenverzeichnis</a:t>
-            </a:r>
-            <a:endParaRPr lang="de-CH" dirty="0"/>
+            <a:r>
+              <a:rPr lang="de-DE" b="1" dirty="0"/>
+              <a:t>"</a:t>
+            </a:r>
+            <a:r>
+              <a:rPr lang="de-DE" b="1" dirty="0" err="1"/>
+              <a:t>NooThesi</a:t>
+            </a:r>
+            <a:r>
+              <a:rPr lang="de-DE" b="1" dirty="0"/>
+              <a:t>„</a:t>
+            </a:r>
+          </a:p>
+          <a:p>
+            <a:r>
+              <a:rPr lang="de-DE" b="1" dirty="0"/>
+              <a:t>"</a:t>
+            </a:r>
+            <a:r>
+              <a:rPr lang="de-DE" b="1" dirty="0" err="1"/>
+              <a:t>Νους</a:t>
+            </a:r>
+            <a:r>
+              <a:rPr lang="de-DE" b="1" dirty="0"/>
+              <a:t>" (Nous)</a:t>
+            </a:r>
+            <a:r>
+              <a:rPr lang="de-DE" dirty="0"/>
+              <a:t>: Dies bedeutet "Geist", "Verstand", "Intelligenz" oder </a:t>
+            </a:r>
+            <a:r>
+              <a:rPr lang="de-DE" b="1" dirty="0"/>
+              <a:t>"Wissen". </a:t>
+            </a:r>
+          </a:p>
+          <a:p>
+            <a:r>
+              <a:rPr lang="de-DE" b="1" dirty="0"/>
+              <a:t>"</a:t>
+            </a:r>
+            <a:r>
+              <a:rPr lang="de-DE" b="1" dirty="0" err="1"/>
+              <a:t>Θέσις</a:t>
+            </a:r>
+            <a:r>
+              <a:rPr lang="de-DE" b="1" dirty="0"/>
+              <a:t>" (Thesis)</a:t>
+            </a:r>
+            <a:r>
+              <a:rPr lang="de-DE" dirty="0"/>
+              <a:t>: Dies bedeutet "Platzierung", "Anordnung", "Position" oder </a:t>
+            </a:r>
+            <a:r>
+              <a:rPr lang="de-DE" b="1" dirty="0"/>
+              <a:t>"Festsetzung".</a:t>
+            </a:r>
+          </a:p>
+          <a:p>
+            <a:endParaRPr lang="de-DE" dirty="0"/>
+          </a:p>
+          <a:p>
+            <a:r>
+              <a:rPr lang="de-DE" b="1" dirty="0"/>
+              <a:t>Zusammen</a:t>
+            </a:r>
+            <a:r>
+              <a:rPr lang="de-DE" dirty="0"/>
+              <a:t>: Wissen Festsetzen</a:t>
+            </a:r>
+          </a:p>
+          <a:p>
+            <a:endParaRPr lang="de-DE" dirty="0"/>
           </a:p>
           <a:p>
             <a:endParaRPr lang="de-CH" dirty="0"/>
@@ -6721,7 +10186,7 @@
           <a:p>
             <a:fld id="{C62896A1-7A7D-4D4A-9D13-6BD00B7CA0F7}" type="slidenum">
               <a:rPr lang="de-CH" smtClean="0"/>
-              <a:t>2</a:t>
+              <a:t>1</a:t>
             </a:fld>
             <a:endParaRPr lang="de-CH"/>
           </a:p>
@@ -6730,7 +10195,108 @@
     </p:spTree>
     <p:extLst>
       <p:ext uri="{BB962C8B-B14F-4D97-AF65-F5344CB8AC3E}">
-        <p14:creationId xmlns:p14="http://schemas.microsoft.com/office/powerpoint/2010/main" val="3223689841"/>
+        <p14:creationId xmlns:p14="http://schemas.microsoft.com/office/powerpoint/2010/main" val="1813636759"/>
+      </p:ext>
+    </p:extLst>
+  </p:cSld>
+  <p:clrMapOvr>
+    <a:masterClrMapping/>
+  </p:clrMapOvr>
+</p:notes>
+</file>
+
+<file path=ppt/notesSlides/notesSlide10.xml><?xml version="1.0" encoding="utf-8"?>
+<p:notes xmlns:a="http://schemas.openxmlformats.org/drawingml/2006/main" xmlns:r="http://schemas.openxmlformats.org/officeDocument/2006/relationships" xmlns:p="http://schemas.openxmlformats.org/presentationml/2006/main">
+  <p:cSld>
+    <p:spTree>
+      <p:nvGrpSpPr>
+        <p:cNvPr id="1" name=""/>
+        <p:cNvGrpSpPr/>
+        <p:nvPr/>
+      </p:nvGrpSpPr>
+      <p:grpSpPr>
+        <a:xfrm>
+          <a:off x="0" y="0"/>
+          <a:ext cx="0" cy="0"/>
+          <a:chOff x="0" y="0"/>
+          <a:chExt cx="0" cy="0"/>
+        </a:xfrm>
+      </p:grpSpPr>
+      <p:sp>
+        <p:nvSpPr>
+          <p:cNvPr id="2" name="Folienbildplatzhalter 1"/>
+          <p:cNvSpPr>
+            <a:spLocks noGrp="1" noRot="1" noChangeAspect="1"/>
+          </p:cNvSpPr>
+          <p:nvPr>
+            <p:ph type="sldImg"/>
+          </p:nvPr>
+        </p:nvSpPr>
+        <p:spPr/>
+      </p:sp>
+      <p:sp>
+        <p:nvSpPr>
+          <p:cNvPr id="3" name="Notizenplatzhalter 2"/>
+          <p:cNvSpPr>
+            <a:spLocks noGrp="1"/>
+          </p:cNvSpPr>
+          <p:nvPr>
+            <p:ph type="body" idx="1"/>
+          </p:nvPr>
+        </p:nvSpPr>
+        <p:spPr/>
+        <p:txBody>
+          <a:bodyPr/>
+          <a:lstStyle/>
+          <a:p>
+            <a:pPr marL="171450" indent="-171450">
+              <a:buFont typeface="Symbol" panose="05050102010706020507" pitchFamily="18" charset="2"/>
+              <a:buChar char="-"/>
+            </a:pPr>
+            <a:r>
+              <a:rPr lang="de-CH" dirty="0"/>
+              <a:t>Das wars nun mit der Präsentation.</a:t>
+            </a:r>
+          </a:p>
+          <a:p>
+            <a:pPr marL="171450" indent="-171450">
+              <a:buFont typeface="Symbol" panose="05050102010706020507" pitchFamily="18" charset="2"/>
+              <a:buChar char="-"/>
+            </a:pPr>
+            <a:r>
+              <a:rPr lang="de-CH" dirty="0"/>
+              <a:t>Hat noch jemand eine Frage?</a:t>
+            </a:r>
+          </a:p>
+        </p:txBody>
+      </p:sp>
+      <p:sp>
+        <p:nvSpPr>
+          <p:cNvPr id="4" name="Foliennummernplatzhalter 3"/>
+          <p:cNvSpPr>
+            <a:spLocks noGrp="1"/>
+          </p:cNvSpPr>
+          <p:nvPr>
+            <p:ph type="sldNum" sz="quarter" idx="5"/>
+          </p:nvPr>
+        </p:nvSpPr>
+        <p:spPr/>
+        <p:txBody>
+          <a:bodyPr/>
+          <a:lstStyle/>
+          <a:p>
+            <a:fld id="{C62896A1-7A7D-4D4A-9D13-6BD00B7CA0F7}" type="slidenum">
+              <a:rPr lang="de-CH" smtClean="0"/>
+              <a:t>10</a:t>
+            </a:fld>
+            <a:endParaRPr lang="de-CH"/>
+          </a:p>
+        </p:txBody>
+      </p:sp>
+    </p:spTree>
+    <p:extLst>
+      <p:ext uri="{BB962C8B-B14F-4D97-AF65-F5344CB8AC3E}">
+        <p14:creationId xmlns:p14="http://schemas.microsoft.com/office/powerpoint/2010/main" val="2581706083"/>
       </p:ext>
     </p:extLst>
   </p:cSld>
@@ -6784,47 +10350,98 @@
           <a:bodyPr/>
           <a:lstStyle/>
           <a:p>
-            <a:pPr marL="171450" indent="-171450">
+            <a:pPr marL="171450" indent="-171450" algn="l">
               <a:buFont typeface="Symbol" panose="05050102010706020507" pitchFamily="18" charset="2"/>
               <a:buChar char="-"/>
             </a:pPr>
             <a:r>
-              <a:rPr lang="de-CH" dirty="0"/>
-              <a:t>Flashcard App für Mobile gemacht</a:t>
-            </a:r>
-          </a:p>
-          <a:p>
-            <a:pPr marL="171450" indent="-171450">
+              <a:rPr lang="de-DE" b="0" i="0" dirty="0">
+                <a:effectLst/>
+                <a:latin typeface="-apple-system"/>
+              </a:rPr>
+              <a:t>Thema</a:t>
+            </a:r>
+          </a:p>
+          <a:p>
+            <a:pPr marL="171450" indent="-171450" algn="l">
               <a:buFont typeface="Symbol" panose="05050102010706020507" pitchFamily="18" charset="2"/>
               <a:buChar char="-"/>
             </a:pPr>
             <a:r>
-              <a:rPr lang="de-CH" dirty="0"/>
-              <a:t>Erweiterung für Desktop mit verschiedenen Funktionalitäten</a:t>
-            </a:r>
-          </a:p>
-          <a:p>
-            <a:pPr marL="171450" indent="-171450">
+              <a:rPr lang="de-DE" b="0" i="0" dirty="0">
+                <a:effectLst/>
+                <a:latin typeface="-apple-system"/>
+              </a:rPr>
+              <a:t>Ziele</a:t>
+            </a:r>
+          </a:p>
+          <a:p>
+            <a:pPr marL="171450" indent="-171450" algn="l">
               <a:buFont typeface="Symbol" panose="05050102010706020507" pitchFamily="18" charset="2"/>
               <a:buChar char="-"/>
             </a:pPr>
             <a:r>
-              <a:rPr lang="de-CH" dirty="0"/>
-              <a:t>Relationale Datenbank im Backend für mehr Möglichkeiten</a:t>
-            </a:r>
-          </a:p>
-          <a:p>
-            <a:pPr marL="171450" indent="-171450">
+              <a:rPr lang="de-DE" b="0" i="0" dirty="0">
+                <a:effectLst/>
+                <a:latin typeface="-apple-system"/>
+              </a:rPr>
+              <a:t>Pros/Contras </a:t>
+            </a:r>
+          </a:p>
+          <a:p>
+            <a:pPr marL="171450" indent="-171450" algn="l">
               <a:buFont typeface="Symbol" panose="05050102010706020507" pitchFamily="18" charset="2"/>
               <a:buChar char="-"/>
             </a:pPr>
-            <a:endParaRPr lang="de-CH" dirty="0"/>
-          </a:p>
-          <a:p>
-            <a:pPr marL="171450" indent="-171450">
+            <a:r>
+              <a:rPr lang="de-DE" b="0" i="0" dirty="0">
+                <a:effectLst/>
+                <a:latin typeface="-apple-system"/>
+              </a:rPr>
+              <a:t>Datenbank</a:t>
+            </a:r>
+          </a:p>
+          <a:p>
+            <a:pPr marL="171450" indent="-171450" algn="l">
               <a:buFont typeface="Symbol" panose="05050102010706020507" pitchFamily="18" charset="2"/>
               <a:buChar char="-"/>
             </a:pPr>
+            <a:r>
+              <a:rPr lang="de-DE" b="0" i="0" dirty="0">
+                <a:effectLst/>
+                <a:latin typeface="-apple-system"/>
+              </a:rPr>
+              <a:t>Demonstration</a:t>
+            </a:r>
+          </a:p>
+          <a:p>
+            <a:pPr marL="171450" indent="-171450" algn="l">
+              <a:buFont typeface="Symbol" panose="05050102010706020507" pitchFamily="18" charset="2"/>
+              <a:buChar char="-"/>
+            </a:pPr>
+            <a:r>
+              <a:rPr lang="de-DE" b="0" i="0" dirty="0">
+                <a:effectLst/>
+                <a:latin typeface="-apple-system"/>
+              </a:rPr>
+              <a:t>Fazit</a:t>
+            </a:r>
+          </a:p>
+          <a:p>
+            <a:pPr marL="171450" indent="-171450" algn="l">
+              <a:buFont typeface="Symbol" panose="05050102010706020507" pitchFamily="18" charset="2"/>
+              <a:buChar char="-"/>
+            </a:pPr>
+            <a:r>
+              <a:rPr lang="de-DE" b="0" i="0" dirty="0">
+                <a:effectLst/>
+                <a:latin typeface="-apple-system"/>
+              </a:rPr>
+              <a:t>Quellenverzeichnis</a:t>
+            </a:r>
+            <a:endParaRPr lang="de-CH" dirty="0"/>
+          </a:p>
+          <a:p>
             <a:endParaRPr lang="de-CH" dirty="0"/>
           </a:p>
         </p:txBody>
@@ -6846,7 +10463,7 @@
           <a:p>
             <a:fld id="{C62896A1-7A7D-4D4A-9D13-6BD00B7CA0F7}" type="slidenum">
               <a:rPr lang="de-CH" smtClean="0"/>
-              <a:t>3</a:t>
+              <a:t>2</a:t>
             </a:fld>
             <a:endParaRPr lang="de-CH"/>
           </a:p>
@@ -6855,7 +10472,7 @@
     </p:spTree>
     <p:extLst>
       <p:ext uri="{BB962C8B-B14F-4D97-AF65-F5344CB8AC3E}">
-        <p14:creationId xmlns:p14="http://schemas.microsoft.com/office/powerpoint/2010/main" val="186188710"/>
+        <p14:creationId xmlns:p14="http://schemas.microsoft.com/office/powerpoint/2010/main" val="3223689841"/>
       </p:ext>
     </p:extLst>
   </p:cSld>
@@ -6915,8 +10532,314 @@
             </a:pPr>
             <a:r>
               <a:rPr lang="de-CH" dirty="0"/>
-              <a:t>3 Hauptziele</a:t>
-            </a:r>
+              <a:t>Im ZLI-Flashcard-App mit React Native &amp; </a:t>
+            </a:r>
+            <a:r>
+              <a:rPr lang="de-CH" dirty="0" err="1"/>
+              <a:t>TypeScript</a:t>
+            </a:r>
+            <a:r>
+              <a:rPr lang="de-CH" dirty="0"/>
+              <a:t> → viel Freude gemacht</a:t>
+            </a:r>
+          </a:p>
+          <a:p>
+            <a:pPr marL="171450" indent="-171450">
+              <a:buFont typeface="Symbol" panose="05050102010706020507" pitchFamily="18" charset="2"/>
+              <a:buChar char="-"/>
+            </a:pPr>
+            <a:r>
+              <a:rPr lang="de-CH" dirty="0"/>
+              <a:t>Idee fürs Abschlussprojekt: Flashcard-Desktop-App</a:t>
+            </a:r>
+          </a:p>
+          <a:p>
+            <a:pPr marL="171450" indent="-171450">
+              <a:buFont typeface="Symbol" panose="05050102010706020507" pitchFamily="18" charset="2"/>
+              <a:buChar char="-"/>
+            </a:pPr>
+            <a:r>
+              <a:rPr lang="de-CH" dirty="0"/>
+              <a:t>Ziel: mit C# arbeiten, Erfahrung sammeln</a:t>
+            </a:r>
+          </a:p>
+          <a:p>
+            <a:pPr marL="171450" indent="-171450">
+              <a:buFont typeface="Symbol" panose="05050102010706020507" pitchFamily="18" charset="2"/>
+              <a:buChar char="-"/>
+            </a:pPr>
+            <a:r>
+              <a:rPr lang="de-CH" dirty="0"/>
+              <a:t>App kombiniert: Datenbank + nützliches Tool für Schüler</a:t>
+            </a:r>
+          </a:p>
+          <a:p>
+            <a:pPr marL="171450" indent="-171450">
+              <a:buFont typeface="Symbol" panose="05050102010706020507" pitchFamily="18" charset="2"/>
+              <a:buChar char="-"/>
+            </a:pPr>
+            <a:r>
+              <a:rPr lang="de-CH" dirty="0"/>
+              <a:t>Viele Möglichkeiten mit Relationaler Datenbank</a:t>
+            </a:r>
+          </a:p>
+          <a:p>
+            <a:pPr marL="171450" indent="-171450">
+              <a:buFont typeface="Symbol" panose="05050102010706020507" pitchFamily="18" charset="2"/>
+              <a:buChar char="-"/>
+            </a:pPr>
+            <a:endParaRPr lang="de-CH" dirty="0"/>
+          </a:p>
+          <a:p>
+            <a:pPr marL="171450" indent="-171450">
+              <a:buFont typeface="Symbol" panose="05050102010706020507" pitchFamily="18" charset="2"/>
+              <a:buChar char="-"/>
+            </a:pPr>
+            <a:endParaRPr lang="de-CH" dirty="0"/>
+          </a:p>
+          <a:p>
+            <a:r>
+              <a:rPr lang="de-DE" b="1" dirty="0"/>
+              <a:t>"</a:t>
+            </a:r>
+            <a:r>
+              <a:rPr lang="de-DE" b="1" dirty="0" err="1"/>
+              <a:t>NooThesi</a:t>
+            </a:r>
+            <a:r>
+              <a:rPr lang="de-DE" b="1" dirty="0"/>
+              <a:t>„</a:t>
+            </a:r>
+          </a:p>
+          <a:p>
+            <a:r>
+              <a:rPr lang="de-DE" b="1" dirty="0"/>
+              <a:t>"</a:t>
+            </a:r>
+            <a:r>
+              <a:rPr lang="de-DE" b="1" dirty="0" err="1"/>
+              <a:t>Νους</a:t>
+            </a:r>
+            <a:r>
+              <a:rPr lang="de-DE" b="1" dirty="0"/>
+              <a:t>" (Nous)</a:t>
+            </a:r>
+            <a:r>
+              <a:rPr lang="de-DE" dirty="0"/>
+              <a:t>: Dies bedeutet "Geist", "Verstand", "Intelligenz" oder </a:t>
+            </a:r>
+            <a:r>
+              <a:rPr lang="de-DE" b="1" dirty="0"/>
+              <a:t>"Wissen". </a:t>
+            </a:r>
+          </a:p>
+          <a:p>
+            <a:r>
+              <a:rPr lang="de-DE" b="1" dirty="0"/>
+              <a:t>"</a:t>
+            </a:r>
+            <a:r>
+              <a:rPr lang="de-DE" b="1" dirty="0" err="1"/>
+              <a:t>Θέσις</a:t>
+            </a:r>
+            <a:r>
+              <a:rPr lang="de-DE" b="1" dirty="0"/>
+              <a:t>" (Thesis)</a:t>
+            </a:r>
+            <a:r>
+              <a:rPr lang="de-DE" dirty="0"/>
+              <a:t>: Dies bedeutet "Platzierung", "Anordnung", "Position" oder </a:t>
+            </a:r>
+            <a:r>
+              <a:rPr lang="de-DE" b="1" dirty="0"/>
+              <a:t>"Festsetzung".</a:t>
+            </a:r>
+          </a:p>
+          <a:p>
+            <a:endParaRPr lang="de-DE" dirty="0"/>
+          </a:p>
+          <a:p>
+            <a:r>
+              <a:rPr lang="de-DE" b="1" dirty="0"/>
+              <a:t>Zusammen</a:t>
+            </a:r>
+            <a:r>
+              <a:rPr lang="de-DE" dirty="0"/>
+              <a:t>: Wissen Festsetzen</a:t>
+            </a:r>
+          </a:p>
+          <a:p>
+            <a:endParaRPr lang="de-DE" dirty="0"/>
+          </a:p>
+          <a:p>
+            <a:pPr marL="0" indent="0">
+              <a:buFont typeface="Symbol" panose="05050102010706020507" pitchFamily="18" charset="2"/>
+              <a:buNone/>
+            </a:pPr>
+            <a:endParaRPr lang="de-CH" dirty="0"/>
+          </a:p>
+          <a:p>
+            <a:pPr marL="171450" indent="-171450">
+              <a:buFont typeface="Symbol" panose="05050102010706020507" pitchFamily="18" charset="2"/>
+              <a:buChar char="-"/>
+            </a:pPr>
+            <a:endParaRPr lang="de-CH" dirty="0"/>
+          </a:p>
+          <a:p>
+            <a:pPr marL="171450" indent="-171450">
+              <a:buFont typeface="Symbol" panose="05050102010706020507" pitchFamily="18" charset="2"/>
+              <a:buChar char="-"/>
+            </a:pPr>
+            <a:endParaRPr lang="de-CH" dirty="0"/>
+          </a:p>
+          <a:p>
+            <a:pPr marL="171450" indent="-171450">
+              <a:buFont typeface="Symbol" panose="05050102010706020507" pitchFamily="18" charset="2"/>
+              <a:buChar char="-"/>
+            </a:pPr>
+            <a:endParaRPr lang="de-CH" dirty="0"/>
+          </a:p>
+          <a:p>
+            <a:pPr marL="171450" indent="-171450">
+              <a:buFont typeface="Symbol" panose="05050102010706020507" pitchFamily="18" charset="2"/>
+              <a:buChar char="-"/>
+            </a:pPr>
+            <a:endParaRPr lang="de-CH" dirty="0"/>
+          </a:p>
+          <a:p>
+            <a:pPr marL="171450" indent="-171450">
+              <a:buFont typeface="Symbol" panose="05050102010706020507" pitchFamily="18" charset="2"/>
+              <a:buChar char="-"/>
+            </a:pPr>
+            <a:endParaRPr lang="de-CH" dirty="0"/>
+          </a:p>
+          <a:p>
+            <a:pPr marL="171450" indent="-171450">
+              <a:buFont typeface="Symbol" panose="05050102010706020507" pitchFamily="18" charset="2"/>
+              <a:buChar char="-"/>
+            </a:pPr>
+            <a:endParaRPr lang="de-CH" dirty="0"/>
+          </a:p>
+          <a:p>
+            <a:pPr marL="171450" indent="-171450">
+              <a:buFont typeface="Symbol" panose="05050102010706020507" pitchFamily="18" charset="2"/>
+              <a:buChar char="-"/>
+            </a:pPr>
+            <a:endParaRPr lang="de-CH" dirty="0"/>
+          </a:p>
+          <a:p>
+            <a:pPr marL="171450" indent="-171450">
+              <a:buFont typeface="Symbol" panose="05050102010706020507" pitchFamily="18" charset="2"/>
+              <a:buChar char="-"/>
+            </a:pPr>
+            <a:endParaRPr lang="de-CH" dirty="0"/>
+          </a:p>
+          <a:p>
+            <a:pPr marL="171450" indent="-171450">
+              <a:buFont typeface="Symbol" panose="05050102010706020507" pitchFamily="18" charset="2"/>
+              <a:buChar char="-"/>
+            </a:pPr>
+            <a:endParaRPr lang="de-CH" dirty="0"/>
+          </a:p>
+          <a:p>
+            <a:pPr marL="171450" indent="-171450">
+              <a:buFont typeface="Symbol" panose="05050102010706020507" pitchFamily="18" charset="2"/>
+              <a:buChar char="-"/>
+            </a:pPr>
+            <a:endParaRPr lang="de-CH" dirty="0"/>
+          </a:p>
+          <a:p>
+            <a:pPr marL="171450" indent="-171450">
+              <a:buFont typeface="Symbol" panose="05050102010706020507" pitchFamily="18" charset="2"/>
+              <a:buChar char="-"/>
+            </a:pPr>
+            <a:endParaRPr lang="de-CH" dirty="0"/>
+          </a:p>
+          <a:p>
+            <a:pPr marL="171450" indent="-171450">
+              <a:buFont typeface="Symbol" panose="05050102010706020507" pitchFamily="18" charset="2"/>
+              <a:buChar char="-"/>
+            </a:pPr>
+            <a:endParaRPr lang="de-CH" dirty="0"/>
+          </a:p>
+          <a:p>
+            <a:pPr marL="171450" indent="-171450">
+              <a:buFont typeface="Symbol" panose="05050102010706020507" pitchFamily="18" charset="2"/>
+              <a:buChar char="-"/>
+            </a:pPr>
+            <a:endParaRPr lang="de-CH" dirty="0"/>
+          </a:p>
+          <a:p>
+            <a:pPr marL="0" indent="0">
+              <a:buFont typeface="Symbol" panose="05050102010706020507" pitchFamily="18" charset="2"/>
+              <a:buNone/>
+            </a:pPr>
+            <a:r>
+              <a:rPr lang="de-CH" dirty="0"/>
+              <a:t>Vor kurzem haben wir im ZLI eine </a:t>
+            </a:r>
+            <a:r>
+              <a:rPr lang="de-CH" dirty="0" err="1"/>
+              <a:t>FlashCard</a:t>
+            </a:r>
+            <a:r>
+              <a:rPr lang="de-CH" dirty="0"/>
+              <a:t>-App, ähnlich wie </a:t>
+            </a:r>
+            <a:r>
+              <a:rPr lang="de-CH" dirty="0" err="1"/>
+              <a:t>Quizlet</a:t>
+            </a:r>
+            <a:r>
+              <a:rPr lang="de-CH" dirty="0"/>
+              <a:t>, für Mobile-Geräte programmiert. Dies setzten wir mit React-Native und </a:t>
+            </a:r>
+            <a:r>
+              <a:rPr lang="de-CH" dirty="0" err="1"/>
+              <a:t>Typescript</a:t>
+            </a:r>
+            <a:r>
+              <a:rPr lang="de-CH" dirty="0"/>
+              <a:t> um. Mir machte es sehr </a:t>
+            </a:r>
+            <a:r>
+              <a:rPr lang="de-CH" dirty="0" err="1"/>
+              <a:t>freude</a:t>
+            </a:r>
+            <a:r>
+              <a:rPr lang="de-CH" dirty="0"/>
+              <a:t> an diesem </a:t>
+            </a:r>
+            <a:r>
+              <a:rPr lang="de-CH" dirty="0" err="1"/>
+              <a:t>Projektchen</a:t>
+            </a:r>
+            <a:r>
+              <a:rPr lang="de-CH" dirty="0"/>
+              <a:t> zu arbeiten, auch weil das Endprodukt ein Nützliches Tool für Schüler sein kann. Als das Abschlussprojekt bevor stand, musste ich mich für eine Idee entscheiden. Für mich war bereits klar, dass ich eine Windows-Desktop-App realisieren werde, da ich Erfahrung mit C# sammeln wollte und dies gut dazu passt. Eine Flashcard-App als Desktop-Applikation war also die Perfekte </a:t>
+            </a:r>
+            <a:r>
+              <a:rPr lang="de-CH" dirty="0" err="1"/>
+              <a:t>idee</a:t>
+            </a:r>
+            <a:r>
+              <a:rPr lang="de-CH" dirty="0"/>
+              <a:t>. Die ganze App konnte ich dann gut mit Erfahrung mit Datenbanken kombinieren.</a:t>
+            </a:r>
+          </a:p>
+          <a:p>
+            <a:pPr marL="171450" indent="-171450">
+              <a:buFont typeface="Symbol" panose="05050102010706020507" pitchFamily="18" charset="2"/>
+              <a:buChar char="-"/>
+            </a:pPr>
+            <a:endParaRPr lang="de-CH" dirty="0"/>
+          </a:p>
+          <a:p>
+            <a:pPr marL="171450" indent="-171450">
+              <a:buFont typeface="Symbol" panose="05050102010706020507" pitchFamily="18" charset="2"/>
+              <a:buChar char="-"/>
+            </a:pPr>
+            <a:endParaRPr lang="de-CH" dirty="0"/>
           </a:p>
         </p:txBody>
       </p:sp>
@@ -6937,7 +10860,7 @@
           <a:p>
             <a:fld id="{C62896A1-7A7D-4D4A-9D13-6BD00B7CA0F7}" type="slidenum">
               <a:rPr lang="de-CH" smtClean="0"/>
-              <a:t>4</a:t>
+              <a:t>3</a:t>
             </a:fld>
             <a:endParaRPr lang="de-CH"/>
           </a:p>
@@ -6946,7 +10869,7 @@
     </p:spTree>
     <p:extLst>
       <p:ext uri="{BB962C8B-B14F-4D97-AF65-F5344CB8AC3E}">
-        <p14:creationId xmlns:p14="http://schemas.microsoft.com/office/powerpoint/2010/main" val="2207297141"/>
+        <p14:creationId xmlns:p14="http://schemas.microsoft.com/office/powerpoint/2010/main" val="186188710"/>
       </p:ext>
     </p:extLst>
   </p:cSld>
@@ -7000,23 +10923,17 @@
           <a:bodyPr/>
           <a:lstStyle/>
           <a:p>
-            <a:pPr marL="0" indent="0">
-              <a:buFont typeface="Symbol" panose="05050102010706020507" pitchFamily="18" charset="2"/>
-              <a:buNone/>
-            </a:pPr>
-            <a:r>
-              <a:rPr lang="de-DE" b="1" dirty="0"/>
-              <a:t>GUT</a:t>
-            </a:r>
-          </a:p>
-          <a:p>
             <a:pPr marL="171450" indent="-171450">
               <a:buFont typeface="Symbol" panose="05050102010706020507" pitchFamily="18" charset="2"/>
               <a:buChar char="-"/>
             </a:pPr>
             <a:r>
-              <a:rPr lang="de-DE" dirty="0"/>
-              <a:t>Ich denke, mir sind die Multiplayerfunktion gut gelungen ist.</a:t>
+              <a:rPr lang="de-CH" b="1" dirty="0"/>
+              <a:t>3 Hauptziele</a:t>
+            </a:r>
+            <a:r>
+              <a:rPr lang="de-CH" dirty="0"/>
+              <a:t>: Benutzerverwaltung, Import/Export, Lernen</a:t>
             </a:r>
           </a:p>
           <a:p>
@@ -7025,8 +10942,8 @@
               <a:buChar char="-"/>
             </a:pPr>
             <a:r>
-              <a:rPr lang="de-DE" dirty="0"/>
-              <a:t>Zuerst habe ich die Random Zahlen für die Würfel im JavaScript generieren lassen.</a:t>
+              <a:rPr lang="de-CH" dirty="0"/>
+              <a:t>Benutzer: eigene Decks, nicht sichtbar für andere</a:t>
             </a:r>
           </a:p>
           <a:p>
@@ -7035,8 +10952,8 @@
               <a:buChar char="-"/>
             </a:pPr>
             <a:r>
-              <a:rPr lang="de-DE" dirty="0"/>
-              <a:t>Somit hat jeder User andere Würfelzahlen, da JavaScript im Browser ausgeführt wird.</a:t>
+              <a:rPr lang="de-CH" dirty="0"/>
+              <a:t>Mitarbeitende beim Erstellen hinzufügen → nur Follower</a:t>
             </a:r>
           </a:p>
           <a:p>
@@ -7045,16 +10962,8 @@
               <a:buChar char="-"/>
             </a:pPr>
             <a:r>
-              <a:rPr lang="de-DE" dirty="0"/>
-              <a:t>Um dies zu ändern, generierte ich die Zahlen in einem PHP-</a:t>
-            </a:r>
-            <a:r>
-              <a:rPr lang="de-DE" dirty="0" err="1"/>
-              <a:t>Script</a:t>
-            </a:r>
-            <a:r>
-              <a:rPr lang="de-DE" dirty="0"/>
-              <a:t>.</a:t>
+              <a:rPr lang="de-CH" dirty="0"/>
+              <a:t>Import/Export: CSV + JSON möglich → z. B. passende Struktur via ChatGPT</a:t>
             </a:r>
           </a:p>
           <a:p>
@@ -7063,24 +10972,8 @@
               <a:buChar char="-"/>
             </a:pPr>
             <a:r>
-              <a:rPr lang="de-DE" dirty="0"/>
-              <a:t>Danke dem, dass PHP eine Serverseitige Programmiersprache ist, konnte ich von jedem </a:t>
-            </a:r>
-            <a:r>
-              <a:rPr lang="de-DE" dirty="0" err="1"/>
-              <a:t>client</a:t>
-            </a:r>
-            <a:r>
-              <a:rPr lang="de-DE" dirty="0"/>
-              <a:t> mit einem http-</a:t>
-            </a:r>
-            <a:r>
-              <a:rPr lang="de-DE" dirty="0" err="1"/>
-              <a:t>request</a:t>
-            </a:r>
-            <a:r>
-              <a:rPr lang="de-DE" dirty="0"/>
-              <a:t> auf dieselben Würfelwerte Zugreifen.</a:t>
+              <a:rPr lang="de-CH" dirty="0"/>
+              <a:t>Lernen:</a:t>
             </a:r>
           </a:p>
           <a:p>
@@ -7089,8 +10982,8 @@
               <a:buChar char="-"/>
             </a:pPr>
             <a:r>
-              <a:rPr lang="de-DE" dirty="0"/>
-              <a:t>Nun könnten die Spieler auch in verschiedenen Kontinenten sein und Trotzdem miteinander das Spiel spielen.</a:t>
+              <a:rPr lang="de-CH" dirty="0"/>
+              <a:t>Normale Karten = Freitextfeld</a:t>
             </a:r>
           </a:p>
           <a:p>
@@ -7098,7 +10991,10 @@
               <a:buFont typeface="Symbol" panose="05050102010706020507" pitchFamily="18" charset="2"/>
               <a:buChar char="-"/>
             </a:pPr>
-            <a:endParaRPr lang="de-DE" dirty="0"/>
+            <a:r>
+              <a:rPr lang="de-CH" dirty="0"/>
+              <a:t>Quiz-Karten = Single-Choice</a:t>
+            </a:r>
           </a:p>
           <a:p>
             <a:pPr marL="171450" indent="-171450">
@@ -7106,8 +11002,8 @@
               <a:buChar char="-"/>
             </a:pPr>
             <a:r>
-              <a:rPr lang="de-DE" dirty="0"/>
-              <a:t>Auch die Benutzeroberfläche ansprechen aussieht und auch selbsterklärend ist, wenn man das Spiel kennt.</a:t>
+              <a:rPr lang="de-CH" dirty="0"/>
+              <a:t>Ergebnisse werden ausgewertet</a:t>
             </a:r>
           </a:p>
           <a:p>
@@ -7115,184 +11011,10 @@
               <a:buFont typeface="Symbol" panose="05050102010706020507" pitchFamily="18" charset="2"/>
               <a:buChar char="-"/>
             </a:pPr>
-            <a:endParaRPr lang="de-DE" dirty="0"/>
-          </a:p>
-          <a:p>
-            <a:pPr marL="171450" indent="-171450">
-              <a:buFont typeface="Symbol" panose="05050102010706020507" pitchFamily="18" charset="2"/>
-              <a:buChar char="-"/>
-            </a:pPr>
-            <a:r>
-              <a:rPr lang="de-DE" dirty="0"/>
-              <a:t>Ich habe viel gelernt, vor allem, was http-</a:t>
-            </a:r>
-            <a:r>
-              <a:rPr lang="de-DE" dirty="0" err="1"/>
-              <a:t>requests</a:t>
-            </a:r>
-            <a:r>
-              <a:rPr lang="de-DE" dirty="0"/>
-              <a:t> und json angeht.</a:t>
-            </a:r>
-          </a:p>
-          <a:p>
-            <a:pPr marL="171450" indent="-171450">
-              <a:buFont typeface="Symbol" panose="05050102010706020507" pitchFamily="18" charset="2"/>
-              <a:buChar char="-"/>
-            </a:pPr>
-            <a:endParaRPr lang="de-DE" dirty="0"/>
-          </a:p>
-          <a:p>
-            <a:pPr marL="0" indent="0">
-              <a:buFont typeface="Symbol" panose="05050102010706020507" pitchFamily="18" charset="2"/>
-              <a:buNone/>
-            </a:pPr>
-            <a:r>
-              <a:rPr lang="de-DE" b="1" dirty="0"/>
-              <a:t>SCHLECHT</a:t>
-            </a:r>
-          </a:p>
-          <a:p>
-            <a:pPr marL="171450" indent="-171450">
-              <a:buFont typeface="Symbol" panose="05050102010706020507" pitchFamily="18" charset="2"/>
-              <a:buChar char="-"/>
-            </a:pPr>
-            <a:r>
-              <a:rPr lang="de-DE" dirty="0"/>
-              <a:t>Ich habe mich bei der Planung ziemlich vertan.</a:t>
-            </a:r>
-          </a:p>
-          <a:p>
-            <a:pPr marL="171450" indent="-171450">
-              <a:buFont typeface="Symbol" panose="05050102010706020507" pitchFamily="18" charset="2"/>
-              <a:buChar char="-"/>
-            </a:pPr>
-            <a:r>
-              <a:rPr lang="de-DE" dirty="0"/>
-              <a:t>Ich wollte in der Zeit viel mehr machen, was für mich leider nicht möglich war.</a:t>
-            </a:r>
-          </a:p>
-          <a:p>
-            <a:pPr marL="171450" indent="-171450">
-              <a:buFont typeface="Symbol" panose="05050102010706020507" pitchFamily="18" charset="2"/>
-              <a:buChar char="-"/>
-            </a:pPr>
-            <a:r>
-              <a:rPr lang="de-DE" dirty="0"/>
-              <a:t>Ich denke jedoch, wenn wir etwa 3 Tage mehr Zeit bekommen hätten, hätte ich auch </a:t>
-            </a:r>
-            <a:r>
-              <a:rPr lang="de-DE" dirty="0" err="1"/>
-              <a:t>KrissKross</a:t>
-            </a:r>
-            <a:r>
-              <a:rPr lang="de-DE" dirty="0"/>
-              <a:t> umsetzen können und hätte somit alle Ziele erreicht.</a:t>
-            </a:r>
-          </a:p>
-          <a:p>
-            <a:pPr marL="171450" indent="-171450">
-              <a:buFont typeface="Symbol" panose="05050102010706020507" pitchFamily="18" charset="2"/>
-              <a:buChar char="-"/>
-            </a:pPr>
-            <a:endParaRPr lang="de-DE" dirty="0"/>
-          </a:p>
-          <a:p>
-            <a:pPr marL="171450" indent="-171450">
-              <a:buFont typeface="Symbol" panose="05050102010706020507" pitchFamily="18" charset="2"/>
-              <a:buChar char="-"/>
-            </a:pPr>
-            <a:r>
-              <a:rPr lang="de-DE" dirty="0"/>
-              <a:t>Die beiden Spiele haben noch einige fehlende Features, mit denen ich das Spiel noch optimieren könnte.</a:t>
-            </a:r>
-          </a:p>
-          <a:p>
-            <a:pPr marL="171450" indent="-171450">
-              <a:buFont typeface="Symbol" panose="05050102010706020507" pitchFamily="18" charset="2"/>
-              <a:buChar char="-"/>
-            </a:pPr>
-            <a:r>
-              <a:rPr lang="de-DE" dirty="0"/>
-              <a:t>z.B. Bei allen Mitspielern anzeigen, sobald das Spiel fertig ist.</a:t>
-            </a:r>
-          </a:p>
-          <a:p>
-            <a:pPr marL="171450" indent="-171450">
-              <a:buFont typeface="Symbol" panose="05050102010706020507" pitchFamily="18" charset="2"/>
-              <a:buChar char="-"/>
-            </a:pPr>
-            <a:r>
-              <a:rPr lang="de-DE" dirty="0"/>
-              <a:t>Aus Zeitlichen gründen, musste ich auf dieses Verzichten.</a:t>
-            </a:r>
-          </a:p>
-          <a:p>
-            <a:pPr marL="171450" indent="-171450">
-              <a:buFont typeface="Symbol" panose="05050102010706020507" pitchFamily="18" charset="2"/>
-              <a:buChar char="-"/>
-            </a:pPr>
-            <a:endParaRPr lang="de-DE" dirty="0"/>
-          </a:p>
-          <a:p>
-            <a:pPr marL="171450" indent="-171450">
-              <a:buFont typeface="Symbol" panose="05050102010706020507" pitchFamily="18" charset="2"/>
-              <a:buChar char="-"/>
-            </a:pPr>
-            <a:r>
-              <a:rPr lang="de-DE" dirty="0"/>
-              <a:t>Leider ist nicht alles durchgehend responsive.</a:t>
-            </a:r>
-          </a:p>
-          <a:p>
-            <a:pPr marL="171450" indent="-171450">
-              <a:buFont typeface="Symbol" panose="05050102010706020507" pitchFamily="18" charset="2"/>
-              <a:buChar char="-"/>
-            </a:pPr>
-            <a:r>
-              <a:rPr lang="de-DE" dirty="0"/>
-              <a:t>Das Spiel Twenty-</a:t>
-            </a:r>
-            <a:r>
-              <a:rPr lang="de-DE" dirty="0" err="1"/>
-              <a:t>One</a:t>
-            </a:r>
-            <a:r>
-              <a:rPr lang="de-DE" dirty="0"/>
-              <a:t> hat ein SVG als Spielfeld im Hintergrund.</a:t>
-            </a:r>
-          </a:p>
-          <a:p>
-            <a:pPr marL="171450" indent="-171450">
-              <a:buFont typeface="Symbol" panose="05050102010706020507" pitchFamily="18" charset="2"/>
-              <a:buChar char="-"/>
-            </a:pPr>
-            <a:r>
-              <a:rPr lang="de-DE" dirty="0"/>
-              <a:t>Es ist Schwierig, dieses SVG Proportional zu </a:t>
-            </a:r>
-            <a:r>
-              <a:rPr lang="de-DE" dirty="0" err="1"/>
-              <a:t>vergrössern</a:t>
-            </a:r>
-            <a:r>
-              <a:rPr lang="de-DE" dirty="0"/>
-              <a:t> bzw. verkleinern.</a:t>
-            </a:r>
-          </a:p>
-          <a:p>
-            <a:pPr marL="171450" indent="-171450">
-              <a:buFont typeface="Symbol" panose="05050102010706020507" pitchFamily="18" charset="2"/>
-              <a:buChar char="-"/>
-            </a:pPr>
-            <a:endParaRPr lang="de-DE" dirty="0"/>
-          </a:p>
-          <a:p>
-            <a:pPr marL="171450" indent="-171450">
-              <a:buFont typeface="Symbol" panose="05050102010706020507" pitchFamily="18" charset="2"/>
-              <a:buChar char="-"/>
-            </a:pPr>
-            <a:endParaRPr lang="de-DE" dirty="0"/>
+            <a:r>
+              <a:rPr lang="de-CH" dirty="0"/>
+              <a:t>Alle Ziele erreicht</a:t>
+            </a:r>
           </a:p>
           <a:p>
             <a:pPr marL="171450" indent="-171450">
@@ -7300,6 +11022,149 @@
               <a:buChar char="-"/>
             </a:pPr>
             <a:endParaRPr lang="de-CH" dirty="0"/>
+          </a:p>
+          <a:p>
+            <a:pPr marL="171450" indent="-171450">
+              <a:buFont typeface="Symbol" panose="05050102010706020507" pitchFamily="18" charset="2"/>
+              <a:buChar char="-"/>
+            </a:pPr>
+            <a:endParaRPr lang="de-CH" dirty="0"/>
+          </a:p>
+          <a:p>
+            <a:pPr marL="171450" indent="-171450">
+              <a:buFont typeface="Symbol" panose="05050102010706020507" pitchFamily="18" charset="2"/>
+              <a:buChar char="-"/>
+            </a:pPr>
+            <a:endParaRPr lang="de-CH" dirty="0"/>
+          </a:p>
+          <a:p>
+            <a:pPr marL="171450" indent="-171450">
+              <a:buFont typeface="Symbol" panose="05050102010706020507" pitchFamily="18" charset="2"/>
+              <a:buChar char="-"/>
+            </a:pPr>
+            <a:endParaRPr lang="de-CH" dirty="0"/>
+          </a:p>
+          <a:p>
+            <a:pPr marL="171450" indent="-171450">
+              <a:buFont typeface="Symbol" panose="05050102010706020507" pitchFamily="18" charset="2"/>
+              <a:buChar char="-"/>
+            </a:pPr>
+            <a:endParaRPr lang="de-CH" dirty="0"/>
+          </a:p>
+          <a:p>
+            <a:pPr marL="171450" indent="-171450">
+              <a:buFont typeface="Symbol" panose="05050102010706020507" pitchFamily="18" charset="2"/>
+              <a:buChar char="-"/>
+            </a:pPr>
+            <a:endParaRPr lang="de-CH" dirty="0"/>
+          </a:p>
+          <a:p>
+            <a:pPr marL="171450" indent="-171450">
+              <a:buFont typeface="Symbol" panose="05050102010706020507" pitchFamily="18" charset="2"/>
+              <a:buChar char="-"/>
+            </a:pPr>
+            <a:endParaRPr lang="de-CH" dirty="0"/>
+          </a:p>
+          <a:p>
+            <a:pPr marL="171450" indent="-171450">
+              <a:buFont typeface="Symbol" panose="05050102010706020507" pitchFamily="18" charset="2"/>
+              <a:buChar char="-"/>
+            </a:pPr>
+            <a:endParaRPr lang="de-CH" dirty="0"/>
+          </a:p>
+          <a:p>
+            <a:pPr marL="171450" indent="-171450">
+              <a:buFont typeface="Symbol" panose="05050102010706020507" pitchFamily="18" charset="2"/>
+              <a:buChar char="-"/>
+            </a:pPr>
+            <a:endParaRPr lang="de-CH" dirty="0"/>
+          </a:p>
+          <a:p>
+            <a:pPr marL="171450" indent="-171450">
+              <a:buFont typeface="Symbol" panose="05050102010706020507" pitchFamily="18" charset="2"/>
+              <a:buChar char="-"/>
+            </a:pPr>
+            <a:endParaRPr lang="de-CH" dirty="0"/>
+          </a:p>
+          <a:p>
+            <a:pPr marL="0" indent="0">
+              <a:buFont typeface="Symbol" panose="05050102010706020507" pitchFamily="18" charset="2"/>
+              <a:buNone/>
+            </a:pPr>
+            <a:r>
+              <a:rPr lang="de-CH" dirty="0"/>
+              <a:t>Ich setzte mir 3 Hauptziele für das Projekt. Die Benutzerverwaltung, den Import und Export von Karten und ganz klar das Lernen von den Karten. Bei der Benutzerverwaltung ging es vor allem um das auseinanderhalten von den verschiedenen Decks. Ein Benutzer kann für sich Decks und darin enthaltene Karten erstellen, welche die anderen Benutzer nicht sehen können. Es sollte jedoch möglich sein, dass man beim Erstellen des Decks Mitarbeiter hinzufügen kann, welche das Deck gleich lernen und Bearbeiten können. Dies hängt mit einer </a:t>
+            </a:r>
+            <a:r>
+              <a:rPr lang="de-CH" dirty="0" err="1"/>
+              <a:t>Following</a:t>
+            </a:r>
+            <a:r>
+              <a:rPr lang="de-CH" dirty="0"/>
+              <a:t>-funktion zusammen, denn man kann nur diese Benutzer hinzufügen, welche einem Folgen.</a:t>
+            </a:r>
+          </a:p>
+          <a:p>
+            <a:pPr marL="0" indent="0">
+              <a:buFont typeface="Symbol" panose="05050102010706020507" pitchFamily="18" charset="2"/>
+              <a:buNone/>
+            </a:pPr>
+            <a:r>
+              <a:rPr lang="de-CH" dirty="0"/>
+              <a:t>Beim Import und Export war das Ziel, dass man CSV und JSON-Dateien Importieren bzw. exportieren kann. Der Gedanke dahinter war, dass man eine Voci-Liste nicht manuell eintippen muss, sondern dass zum Beispiel ChatGPT verwendet werden kann, um Lernkarten zu erstellen oder umformatieren für den </a:t>
+            </a:r>
+            <a:r>
+              <a:rPr lang="de-CH" dirty="0" err="1"/>
+              <a:t>import</a:t>
+            </a:r>
+            <a:r>
+              <a:rPr lang="de-CH" dirty="0"/>
+              <a:t>.</a:t>
+            </a:r>
+          </a:p>
+          <a:p>
+            <a:pPr marL="0" indent="0">
+              <a:buFont typeface="Symbol" panose="05050102010706020507" pitchFamily="18" charset="2"/>
+              <a:buNone/>
+            </a:pPr>
+            <a:r>
+              <a:rPr lang="de-CH" dirty="0"/>
+              <a:t>Die Hauptfunktion, dass es eine Karteikarten-App ist, ist natürlich das lernen. Ich wollte, dass man die normalen Karten in einem Inputfeld schreiben kann und die </a:t>
+            </a:r>
+            <a:r>
+              <a:rPr lang="de-CH" dirty="0" err="1"/>
+              <a:t>quizcards</a:t>
+            </a:r>
+            <a:r>
+              <a:rPr lang="de-CH" dirty="0"/>
+              <a:t> eine single-</a:t>
+            </a:r>
+            <a:r>
+              <a:rPr lang="de-CH" dirty="0" err="1"/>
+              <a:t>choise</a:t>
+            </a:r>
+            <a:r>
+              <a:rPr lang="de-CH" dirty="0"/>
+              <a:t>-Antwort erfordert. Das ganze sollte dann auch ausgewertet werden.</a:t>
+            </a:r>
+          </a:p>
+          <a:p>
+            <a:pPr marL="0" indent="0">
+              <a:buFont typeface="Symbol" panose="05050102010706020507" pitchFamily="18" charset="2"/>
+              <a:buNone/>
+            </a:pPr>
+            <a:r>
+              <a:rPr lang="de-CH" dirty="0"/>
+              <a:t>Ich konnte alle meine </a:t>
+            </a:r>
+            <a:r>
+              <a:rPr lang="de-CH" dirty="0" err="1"/>
+              <a:t>gesetzen</a:t>
+            </a:r>
+            <a:r>
+              <a:rPr lang="de-CH" dirty="0"/>
+              <a:t> Ziele erreichen.</a:t>
+            </a:r>
           </a:p>
         </p:txBody>
       </p:sp>
@@ -7320,6 +11185,130 @@
           <a:p>
             <a:fld id="{C62896A1-7A7D-4D4A-9D13-6BD00B7CA0F7}" type="slidenum">
               <a:rPr lang="de-CH" smtClean="0"/>
+              <a:t>4</a:t>
+            </a:fld>
+            <a:endParaRPr lang="de-CH"/>
+          </a:p>
+        </p:txBody>
+      </p:sp>
+    </p:spTree>
+    <p:extLst>
+      <p:ext uri="{BB962C8B-B14F-4D97-AF65-F5344CB8AC3E}">
+        <p14:creationId xmlns:p14="http://schemas.microsoft.com/office/powerpoint/2010/main" val="2207297141"/>
+      </p:ext>
+    </p:extLst>
+  </p:cSld>
+  <p:clrMapOvr>
+    <a:masterClrMapping/>
+  </p:clrMapOvr>
+</p:notes>
+</file>
+
+<file path=ppt/notesSlides/notesSlide5.xml><?xml version="1.0" encoding="utf-8"?>
+<p:notes xmlns:a="http://schemas.openxmlformats.org/drawingml/2006/main" xmlns:r="http://schemas.openxmlformats.org/officeDocument/2006/relationships" xmlns:p="http://schemas.openxmlformats.org/presentationml/2006/main">
+  <p:cSld>
+    <p:spTree>
+      <p:nvGrpSpPr>
+        <p:cNvPr id="1" name=""/>
+        <p:cNvGrpSpPr/>
+        <p:nvPr/>
+      </p:nvGrpSpPr>
+      <p:grpSpPr>
+        <a:xfrm>
+          <a:off x="0" y="0"/>
+          <a:ext cx="0" cy="0"/>
+          <a:chOff x="0" y="0"/>
+          <a:chExt cx="0" cy="0"/>
+        </a:xfrm>
+      </p:grpSpPr>
+      <p:sp>
+        <p:nvSpPr>
+          <p:cNvPr id="2" name="Folienbildplatzhalter 1"/>
+          <p:cNvSpPr>
+            <a:spLocks noGrp="1" noRot="1" noChangeAspect="1"/>
+          </p:cNvSpPr>
+          <p:nvPr>
+            <p:ph type="sldImg"/>
+          </p:nvPr>
+        </p:nvSpPr>
+        <p:spPr/>
+      </p:sp>
+      <p:sp>
+        <p:nvSpPr>
+          <p:cNvPr id="3" name="Notizenplatzhalter 2"/>
+          <p:cNvSpPr>
+            <a:spLocks noGrp="1"/>
+          </p:cNvSpPr>
+          <p:nvPr>
+            <p:ph type="body" idx="1"/>
+          </p:nvPr>
+        </p:nvSpPr>
+        <p:spPr/>
+        <p:txBody>
+          <a:bodyPr/>
+          <a:lstStyle/>
+          <a:p>
+            <a:pPr rtl="0" eaLnBrk="1" latinLnBrk="0" hangingPunct="1"/>
+            <a:r>
+              <a:rPr lang="de-DE" sz="1200" kern="1200" dirty="0">
+                <a:solidFill>
+                  <a:schemeClr val="tx1"/>
+                </a:solidFill>
+                <a:effectLst/>
+                <a:latin typeface="+mn-lt"/>
+                <a:ea typeface="+mn-ea"/>
+                <a:cs typeface="+mn-cs"/>
+              </a:rPr>
+              <a:t>PHP-Script lange Datei mit allen Funktionen </a:t>
+            </a:r>
+            <a:r>
+              <a:rPr lang="de-DE" sz="1200" kern="1200" dirty="0">
+                <a:solidFill>
+                  <a:schemeClr val="tx1"/>
+                </a:solidFill>
+                <a:effectLst/>
+                <a:latin typeface="+mn-lt"/>
+                <a:ea typeface="+mn-ea"/>
+                <a:cs typeface="+mn-cs"/>
+                <a:sym typeface="Wingdings" panose="05000000000000000000" pitchFamily="2" charset="2"/>
+              </a:rPr>
+              <a:t></a:t>
+            </a:r>
+            <a:r>
+              <a:rPr lang="de-DE" sz="1200" kern="1200" dirty="0">
+                <a:solidFill>
+                  <a:schemeClr val="tx1"/>
+                </a:solidFill>
+                <a:effectLst/>
+                <a:latin typeface="+mn-lt"/>
+                <a:ea typeface="+mn-ea"/>
+                <a:cs typeface="+mn-cs"/>
+              </a:rPr>
+              <a:t> Einzelne Dateien für z.B. jeden CRUD-Operator</a:t>
+            </a:r>
+            <a:endParaRPr lang="de-CH" dirty="0">
+              <a:effectLst/>
+            </a:endParaRPr>
+          </a:p>
+        </p:txBody>
+      </p:sp>
+      <p:sp>
+        <p:nvSpPr>
+          <p:cNvPr id="4" name="Foliennummernplatzhalter 3"/>
+          <p:cNvSpPr>
+            <a:spLocks noGrp="1"/>
+          </p:cNvSpPr>
+          <p:nvPr>
+            <p:ph type="sldNum" sz="quarter" idx="5"/>
+          </p:nvPr>
+        </p:nvSpPr>
+        <p:spPr/>
+        <p:txBody>
+          <a:bodyPr/>
+          <a:lstStyle/>
+          <a:p>
+            <a:fld id="{C62896A1-7A7D-4D4A-9D13-6BD00B7CA0F7}" type="slidenum">
+              <a:rPr lang="de-CH" smtClean="0"/>
               <a:t>5</a:t>
             </a:fld>
             <a:endParaRPr lang="de-CH"/>
@@ -7339,7 +11328,7 @@
 </p:notes>
 </file>
 
-<file path=ppt/notesSlides/notesSlide5.xml><?xml version="1.0" encoding="utf-8"?>
+<file path=ppt/notesSlides/notesSlide6.xml><?xml version="1.0" encoding="utf-8"?>
 <p:notes xmlns:a="http://schemas.openxmlformats.org/drawingml/2006/main" xmlns:r="http://schemas.openxmlformats.org/officeDocument/2006/relationships" xmlns:p="http://schemas.openxmlformats.org/presentationml/2006/main">
   <p:cSld>
     <p:spTree>
@@ -7405,6 +11394,307 @@
               <a:buFont typeface="Symbol" panose="05050102010706020507" pitchFamily="18" charset="2"/>
               <a:buChar char="-"/>
             </a:pPr>
+            <a:r>
+              <a:rPr lang="de-CH" dirty="0"/>
+              <a:t>DB nur im lokalen Netzwerk → Lösung: PHP-Backend + HTTP-</a:t>
+            </a:r>
+            <a:r>
+              <a:rPr lang="de-CH" dirty="0" err="1"/>
+              <a:t>Requests</a:t>
+            </a:r>
+            <a:endParaRPr lang="de-CH" dirty="0"/>
+          </a:p>
+          <a:p>
+            <a:pPr marL="171450" indent="-171450">
+              <a:buFont typeface="Symbol" panose="05050102010706020507" pitchFamily="18" charset="2"/>
+              <a:buChar char="-"/>
+            </a:pPr>
+            <a:r>
+              <a:rPr lang="de-CH" dirty="0"/>
+              <a:t>Authentifizierungssystem mit Token, Hash und Salt</a:t>
+            </a:r>
+          </a:p>
+          <a:p>
+            <a:pPr marL="171450" indent="-171450">
+              <a:buFont typeface="Symbol" panose="05050102010706020507" pitchFamily="18" charset="2"/>
+              <a:buChar char="-"/>
+            </a:pPr>
+            <a:r>
+              <a:rPr lang="de-CH" dirty="0"/>
+              <a:t>Ablauf:</a:t>
+            </a:r>
+          </a:p>
+          <a:p>
+            <a:pPr marL="171450" indent="-171450">
+              <a:buFont typeface="Symbol" panose="05050102010706020507" pitchFamily="18" charset="2"/>
+              <a:buChar char="-"/>
+            </a:pPr>
+            <a:r>
+              <a:rPr lang="de-CH" dirty="0"/>
+              <a:t>Client fordert Token</a:t>
+            </a:r>
+          </a:p>
+          <a:p>
+            <a:pPr marL="171450" indent="-171450">
+              <a:buFont typeface="Symbol" panose="05050102010706020507" pitchFamily="18" charset="2"/>
+              <a:buChar char="-"/>
+            </a:pPr>
+            <a:r>
+              <a:rPr lang="de-CH" dirty="0"/>
+              <a:t>Server bildet 10-Stelligen Token</a:t>
+            </a:r>
+          </a:p>
+          <a:p>
+            <a:pPr marL="171450" indent="-171450">
+              <a:buFont typeface="Symbol" panose="05050102010706020507" pitchFamily="18" charset="2"/>
+              <a:buChar char="-"/>
+            </a:pPr>
+            <a:r>
+              <a:rPr lang="de-CH" dirty="0"/>
+              <a:t>Client bildet Hash (Token + Passwort + Salt)</a:t>
+            </a:r>
+          </a:p>
+          <a:p>
+            <a:pPr marL="171450" indent="-171450">
+              <a:buFont typeface="Symbol" panose="05050102010706020507" pitchFamily="18" charset="2"/>
+              <a:buChar char="-"/>
+            </a:pPr>
+            <a:r>
+              <a:rPr lang="de-CH" dirty="0"/>
+              <a:t>Salt </a:t>
+            </a:r>
+            <a:r>
+              <a:rPr lang="de-CH" dirty="0">
+                <a:sym typeface="Wingdings" panose="05000000000000000000" pitchFamily="2" charset="2"/>
+              </a:rPr>
+              <a:t> Fixer Wert bei jedem Client gleich</a:t>
+            </a:r>
+          </a:p>
+          <a:p>
+            <a:pPr marL="171450" indent="-171450">
+              <a:buFont typeface="Symbol" panose="05050102010706020507" pitchFamily="18" charset="2"/>
+              <a:buChar char="-"/>
+            </a:pPr>
+            <a:r>
+              <a:rPr lang="de-CH" dirty="0">
+                <a:sym typeface="Wingdings" panose="05000000000000000000" pitchFamily="2" charset="2"/>
+              </a:rPr>
+              <a:t>Client sendet Hash, Benutzername, abfrage</a:t>
+            </a:r>
+            <a:endParaRPr lang="de-CH" dirty="0"/>
+          </a:p>
+          <a:p>
+            <a:pPr marL="171450" indent="-171450">
+              <a:buFont typeface="Symbol" panose="05050102010706020507" pitchFamily="18" charset="2"/>
+              <a:buChar char="-"/>
+            </a:pPr>
+            <a:r>
+              <a:rPr lang="de-CH" dirty="0"/>
+              <a:t>Backend prüft durch Vergleich mit DB-Hash</a:t>
+            </a:r>
+          </a:p>
+          <a:p>
+            <a:pPr marL="171450" indent="-171450">
+              <a:buFont typeface="Symbol" panose="05050102010706020507" pitchFamily="18" charset="2"/>
+              <a:buChar char="-"/>
+            </a:pPr>
+            <a:r>
+              <a:rPr lang="de-CH" dirty="0"/>
+              <a:t>Registrierung: kein DB-Passwort → Passwort im Body mitsenden → Hash-Vergleich mit Body-Wert</a:t>
+            </a:r>
+          </a:p>
+          <a:p>
+            <a:pPr marL="0" indent="0">
+              <a:buFont typeface="Symbol" panose="05050102010706020507" pitchFamily="18" charset="2"/>
+              <a:buNone/>
+            </a:pPr>
+            <a:endParaRPr lang="de-CH" dirty="0"/>
+          </a:p>
+          <a:p>
+            <a:pPr marL="0" indent="0">
+              <a:buFont typeface="Symbol" panose="05050102010706020507" pitchFamily="18" charset="2"/>
+              <a:buNone/>
+            </a:pPr>
+            <a:endParaRPr lang="de-CH" dirty="0"/>
+          </a:p>
+          <a:p>
+            <a:pPr marL="0" indent="0">
+              <a:buFont typeface="Symbol" panose="05050102010706020507" pitchFamily="18" charset="2"/>
+              <a:buNone/>
+            </a:pPr>
+            <a:endParaRPr lang="de-CH" dirty="0"/>
+          </a:p>
+          <a:p>
+            <a:pPr marL="0" indent="0">
+              <a:buFont typeface="Symbol" panose="05050102010706020507" pitchFamily="18" charset="2"/>
+              <a:buNone/>
+            </a:pPr>
+            <a:endParaRPr lang="de-CH" dirty="0"/>
+          </a:p>
+          <a:p>
+            <a:pPr marL="0" indent="0">
+              <a:buFont typeface="Symbol" panose="05050102010706020507" pitchFamily="18" charset="2"/>
+              <a:buNone/>
+            </a:pPr>
+            <a:endParaRPr lang="de-CH" dirty="0"/>
+          </a:p>
+          <a:p>
+            <a:pPr marL="0" indent="0">
+              <a:buFont typeface="Symbol" panose="05050102010706020507" pitchFamily="18" charset="2"/>
+              <a:buNone/>
+            </a:pPr>
+            <a:endParaRPr lang="de-CH" dirty="0"/>
+          </a:p>
+          <a:p>
+            <a:pPr marL="0" indent="0">
+              <a:buFont typeface="Symbol" panose="05050102010706020507" pitchFamily="18" charset="2"/>
+              <a:buNone/>
+            </a:pPr>
+            <a:endParaRPr lang="de-CH" dirty="0"/>
+          </a:p>
+          <a:p>
+            <a:pPr marL="0" indent="0">
+              <a:buFont typeface="Symbol" panose="05050102010706020507" pitchFamily="18" charset="2"/>
+              <a:buNone/>
+            </a:pPr>
+            <a:endParaRPr lang="de-CH" dirty="0"/>
+          </a:p>
+          <a:p>
+            <a:pPr marL="0" indent="0">
+              <a:buFont typeface="Symbol" panose="05050102010706020507" pitchFamily="18" charset="2"/>
+              <a:buNone/>
+            </a:pPr>
+            <a:endParaRPr lang="de-CH" dirty="0"/>
+          </a:p>
+          <a:p>
+            <a:pPr marL="0" indent="0">
+              <a:buFont typeface="Symbol" panose="05050102010706020507" pitchFamily="18" charset="2"/>
+              <a:buNone/>
+            </a:pPr>
+            <a:endParaRPr lang="de-CH" dirty="0"/>
+          </a:p>
+          <a:p>
+            <a:pPr marL="0" indent="0">
+              <a:buFont typeface="Symbol" panose="05050102010706020507" pitchFamily="18" charset="2"/>
+              <a:buNone/>
+            </a:pPr>
+            <a:endParaRPr lang="de-CH" dirty="0"/>
+          </a:p>
+          <a:p>
+            <a:pPr marL="0" indent="0">
+              <a:buFont typeface="Symbol" panose="05050102010706020507" pitchFamily="18" charset="2"/>
+              <a:buNone/>
+            </a:pPr>
+            <a:endParaRPr lang="de-CH" dirty="0"/>
+          </a:p>
+          <a:p>
+            <a:pPr marL="0" indent="0">
+              <a:buFont typeface="Symbol" panose="05050102010706020507" pitchFamily="18" charset="2"/>
+              <a:buNone/>
+            </a:pPr>
+            <a:endParaRPr lang="de-CH" dirty="0"/>
+          </a:p>
+          <a:p>
+            <a:pPr marL="0" indent="0">
+              <a:buFont typeface="Symbol" panose="05050102010706020507" pitchFamily="18" charset="2"/>
+              <a:buNone/>
+            </a:pPr>
+            <a:endParaRPr lang="de-CH" dirty="0"/>
+          </a:p>
+          <a:p>
+            <a:pPr marL="0" indent="0">
+              <a:buFont typeface="Symbol" panose="05050102010706020507" pitchFamily="18" charset="2"/>
+              <a:buNone/>
+            </a:pPr>
+            <a:r>
+              <a:rPr lang="de-CH" dirty="0"/>
+              <a:t>Nun zum Fachlichen Teil:</a:t>
+            </a:r>
+          </a:p>
+          <a:p>
+            <a:pPr marL="0" indent="0">
+              <a:buFont typeface="Symbol" panose="05050102010706020507" pitchFamily="18" charset="2"/>
+              <a:buNone/>
+            </a:pPr>
+            <a:endParaRPr lang="de-CH" dirty="0"/>
+          </a:p>
+          <a:p>
+            <a:pPr marL="0" indent="0">
+              <a:buFont typeface="Symbol" panose="05050102010706020507" pitchFamily="18" charset="2"/>
+              <a:buNone/>
+            </a:pPr>
+            <a:r>
+              <a:rPr lang="de-DE" b="0" dirty="0"/>
+              <a:t>Auf die Datenbank kann man nur aus dem lokalen Netzwerk </a:t>
+            </a:r>
+            <a:r>
+              <a:rPr lang="de-DE" b="0" dirty="0" err="1"/>
+              <a:t>zugreiffen</a:t>
+            </a:r>
+            <a:r>
+              <a:rPr lang="de-DE" b="0" dirty="0"/>
+              <a:t>. Dies erforderte dem entsprechend einer Lösung von mir, da die Desktop-Applikation von jedem Netzwerk aus nutzbar sein sollte. Die passende Lösung für mich war also ein PHP-Script im Backend, welches auf dem Server liegt. Von dort aus können dann alle Abfragen organisiert werden. Die Kommunikation zwischen dem Frontend und dem Backend läuft über http-</a:t>
+            </a:r>
+            <a:r>
+              <a:rPr lang="de-DE" b="0" dirty="0" err="1"/>
+              <a:t>requests</a:t>
+            </a:r>
+            <a:r>
+              <a:rPr lang="de-DE" b="0" dirty="0"/>
+              <a:t>. Damit jedoch nicht jeder Datenbank-Interaktionen oder die Endpunkte nutzen kann, dachte ich mir ein Sicherungssystem aus, welches </a:t>
+            </a:r>
+            <a:r>
+              <a:rPr lang="de-DE" b="0" dirty="0" err="1"/>
+              <a:t>wiefolgt</a:t>
+            </a:r>
+            <a:r>
+              <a:rPr lang="de-DE" b="0" dirty="0"/>
+              <a:t> aufgebaut ist:</a:t>
+            </a:r>
+          </a:p>
+          <a:p>
+            <a:pPr marL="0" indent="0">
+              <a:buFont typeface="Symbol" panose="05050102010706020507" pitchFamily="18" charset="2"/>
+              <a:buNone/>
+            </a:pPr>
+            <a:r>
+              <a:rPr lang="de-DE" b="0" dirty="0"/>
+              <a:t>Der Client sendet eine </a:t>
+            </a:r>
+            <a:r>
+              <a:rPr lang="de-DE" b="0" dirty="0" err="1"/>
+              <a:t>Get-Anfforderung</a:t>
+            </a:r>
+            <a:r>
+              <a:rPr lang="de-DE" b="0" dirty="0"/>
+              <a:t>, welches einen Token vom Backend anfordert, welches ein Zufälliger, zehnstelliger String aus gross, klein Buchstaben und Zahlen generiert. Dieser Token kann von jedem abgefragt werden. Der Client berechnet mit diesem Token, dem Passwort des aktuell registrierten Benutzers und einem Salt-Wert einen SHA-256 Hash. Der Salt ist eine Fixe Zeichenfolge, welche bei jedem Client und beim Server gleich abgespeichert ist. Der Hash wird mit der gewünschten Abfrage und dem Benutzernamen des aktuellen Benutzers zurück ans Backend gesendet. Dort wird aus der Datenbank das Passwort des mitgegebenen Benutzers abgefragt und mit denselben drei Komponenten ein Hash erstellt, welcher verglichen wird. Wenn diese beiden Hashes gleich sind, wird die Datenbank-Interaktion ausgeführt. </a:t>
+            </a:r>
+          </a:p>
+          <a:p>
+            <a:pPr marL="0" indent="0">
+              <a:buFont typeface="Symbol" panose="05050102010706020507" pitchFamily="18" charset="2"/>
+              <a:buNone/>
+            </a:pPr>
+            <a:r>
+              <a:rPr lang="de-DE" b="0" dirty="0"/>
+              <a:t>Eine </a:t>
+            </a:r>
+            <a:r>
+              <a:rPr lang="de-DE" b="0" dirty="0" err="1"/>
+              <a:t>Herausvorderung</a:t>
+            </a:r>
+            <a:r>
+              <a:rPr lang="de-DE" b="0" dirty="0"/>
+              <a:t> war es, die Sicherheit auch zu </a:t>
+            </a:r>
+            <a:r>
+              <a:rPr lang="de-DE" b="0" dirty="0" err="1"/>
+              <a:t>gewährliestern</a:t>
+            </a:r>
+            <a:r>
+              <a:rPr lang="de-DE" b="0" dirty="0"/>
+              <a:t>, wenn sich ein neuer Benutzer registrieren wollte. Hier gibt es noch kein Passwort, welches aus der Datenbank abgerufen werden kann. Ich entschied mich für die Lösung, dass der Authentifizierungs-Hash aus denselben drei Komponenten besteht, wie bei einer normalen abfrage, dass jedoch im Post-Body ebenfalls das Passwort mitgesendet wird. Somit rechnet das Backend nicht mit dem Wert aus der Datenbank, sondern aus dem Body.</a:t>
+            </a:r>
             <a:endParaRPr lang="de-CH" dirty="0"/>
           </a:p>
         </p:txBody>
@@ -7442,94 +11732,6 @@
     <p:extLst>
       <p:ext uri="{BB962C8B-B14F-4D97-AF65-F5344CB8AC3E}">
         <p14:creationId xmlns:p14="http://schemas.microsoft.com/office/powerpoint/2010/main" val="2919009938"/>
-      </p:ext>
-    </p:extLst>
-  </p:cSld>
-  <p:clrMapOvr>
-    <a:masterClrMapping/>
-  </p:clrMapOvr>
-</p:notes>
-</file>
-
-<file path=ppt/notesSlides/notesSlide6.xml><?xml version="1.0" encoding="utf-8"?>
-<p:notes xmlns:a="http://schemas.openxmlformats.org/drawingml/2006/main" xmlns:r="http://schemas.openxmlformats.org/officeDocument/2006/relationships" xmlns:p="http://schemas.openxmlformats.org/presentationml/2006/main">
-  <p:cSld>
-    <p:spTree>
-      <p:nvGrpSpPr>
-        <p:cNvPr id="1" name=""/>
-        <p:cNvGrpSpPr/>
-        <p:nvPr/>
-      </p:nvGrpSpPr>
-      <p:grpSpPr>
-        <a:xfrm>
-          <a:off x="0" y="0"/>
-          <a:ext cx="0" cy="0"/>
-          <a:chOff x="0" y="0"/>
-          <a:chExt cx="0" cy="0"/>
-        </a:xfrm>
-      </p:grpSpPr>
-      <p:sp>
-        <p:nvSpPr>
-          <p:cNvPr id="2" name="Folienbildplatzhalter 1"/>
-          <p:cNvSpPr>
-            <a:spLocks noGrp="1" noRot="1" noChangeAspect="1"/>
-          </p:cNvSpPr>
-          <p:nvPr>
-            <p:ph type="sldImg"/>
-          </p:nvPr>
-        </p:nvSpPr>
-        <p:spPr/>
-      </p:sp>
-      <p:sp>
-        <p:nvSpPr>
-          <p:cNvPr id="3" name="Notizenplatzhalter 2"/>
-          <p:cNvSpPr>
-            <a:spLocks noGrp="1"/>
-          </p:cNvSpPr>
-          <p:nvPr>
-            <p:ph type="body" idx="1"/>
-          </p:nvPr>
-        </p:nvSpPr>
-        <p:spPr/>
-        <p:txBody>
-          <a:bodyPr/>
-          <a:lstStyle/>
-          <a:p>
-            <a:pPr marL="171450" indent="-171450">
-              <a:buFont typeface="Symbol" panose="05050102010706020507" pitchFamily="18" charset="2"/>
-              <a:buChar char="-"/>
-            </a:pPr>
-            <a:endParaRPr lang="de-CH" dirty="0"/>
-          </a:p>
-        </p:txBody>
-      </p:sp>
-      <p:sp>
-        <p:nvSpPr>
-          <p:cNvPr id="4" name="Foliennummernplatzhalter 3"/>
-          <p:cNvSpPr>
-            <a:spLocks noGrp="1"/>
-          </p:cNvSpPr>
-          <p:nvPr>
-            <p:ph type="sldNum" sz="quarter" idx="5"/>
-          </p:nvPr>
-        </p:nvSpPr>
-        <p:spPr/>
-        <p:txBody>
-          <a:bodyPr/>
-          <a:lstStyle/>
-          <a:p>
-            <a:fld id="{C62896A1-7A7D-4D4A-9D13-6BD00B7CA0F7}" type="slidenum">
-              <a:rPr lang="de-CH" smtClean="0"/>
-              <a:t>7</a:t>
-            </a:fld>
-            <a:endParaRPr lang="de-CH"/>
-          </a:p>
-        </p:txBody>
-      </p:sp>
-    </p:spTree>
-    <p:extLst>
-      <p:ext uri="{BB962C8B-B14F-4D97-AF65-F5344CB8AC3E}">
-        <p14:creationId xmlns:p14="http://schemas.microsoft.com/office/powerpoint/2010/main" val="600434766"/>
       </p:ext>
     </p:extLst>
   </p:cSld>
@@ -7583,7 +11785,125 @@
           <a:bodyPr/>
           <a:lstStyle/>
           <a:p>
+            <a:pPr marL="171450" indent="-171450">
+              <a:buFont typeface="Symbol" panose="05050102010706020507" pitchFamily="18" charset="2"/>
+              <a:buChar char="-"/>
+            </a:pPr>
+            <a:r>
+              <a:rPr lang="de-DE" dirty="0"/>
+              <a:t>Ziel: effiziente, erweiterbare DB</a:t>
+            </a:r>
+          </a:p>
+          <a:p>
+            <a:pPr marL="171450" indent="-171450">
+              <a:buFont typeface="Symbol" panose="05050102010706020507" pitchFamily="18" charset="2"/>
+              <a:buChar char="-"/>
+            </a:pPr>
+            <a:r>
+              <a:rPr lang="de-DE" dirty="0"/>
+              <a:t>Planung nach Funktionen → ERD nach Normalformen erstellt</a:t>
+            </a:r>
+          </a:p>
+          <a:p>
+            <a:pPr marL="0" indent="0">
+              <a:buFont typeface="Symbol" panose="05050102010706020507" pitchFamily="18" charset="2"/>
+              <a:buNone/>
+            </a:pPr>
             <a:endParaRPr lang="de-CH" dirty="0"/>
+          </a:p>
+          <a:p>
+            <a:pPr marL="0" indent="0">
+              <a:buFont typeface="Symbol" panose="05050102010706020507" pitchFamily="18" charset="2"/>
+              <a:buNone/>
+            </a:pPr>
+            <a:endParaRPr lang="de-CH" dirty="0"/>
+          </a:p>
+          <a:p>
+            <a:pPr marL="0" indent="0">
+              <a:buFont typeface="Symbol" panose="05050102010706020507" pitchFamily="18" charset="2"/>
+              <a:buNone/>
+            </a:pPr>
+            <a:endParaRPr lang="de-CH" dirty="0"/>
+          </a:p>
+          <a:p>
+            <a:pPr marL="0" indent="0">
+              <a:buFont typeface="Symbol" panose="05050102010706020507" pitchFamily="18" charset="2"/>
+              <a:buNone/>
+            </a:pPr>
+            <a:endParaRPr lang="de-CH" dirty="0"/>
+          </a:p>
+          <a:p>
+            <a:pPr marL="0" indent="0">
+              <a:buFont typeface="Symbol" panose="05050102010706020507" pitchFamily="18" charset="2"/>
+              <a:buNone/>
+            </a:pPr>
+            <a:endParaRPr lang="de-CH" dirty="0"/>
+          </a:p>
+          <a:p>
+            <a:pPr marL="0" indent="0">
+              <a:buFont typeface="Symbol" panose="05050102010706020507" pitchFamily="18" charset="2"/>
+              <a:buNone/>
+            </a:pPr>
+            <a:endParaRPr lang="de-CH" dirty="0"/>
+          </a:p>
+          <a:p>
+            <a:pPr marL="0" indent="0">
+              <a:buFont typeface="Symbol" panose="05050102010706020507" pitchFamily="18" charset="2"/>
+              <a:buNone/>
+            </a:pPr>
+            <a:endParaRPr lang="de-CH" dirty="0"/>
+          </a:p>
+          <a:p>
+            <a:pPr marL="0" indent="0">
+              <a:buFont typeface="Symbol" panose="05050102010706020507" pitchFamily="18" charset="2"/>
+              <a:buNone/>
+            </a:pPr>
+            <a:endParaRPr lang="de-CH" dirty="0"/>
+          </a:p>
+          <a:p>
+            <a:pPr marL="0" indent="0">
+              <a:buFont typeface="Symbol" panose="05050102010706020507" pitchFamily="18" charset="2"/>
+              <a:buNone/>
+            </a:pPr>
+            <a:endParaRPr lang="de-CH" dirty="0"/>
+          </a:p>
+          <a:p>
+            <a:pPr marL="0" indent="0">
+              <a:buFont typeface="Symbol" panose="05050102010706020507" pitchFamily="18" charset="2"/>
+              <a:buNone/>
+            </a:pPr>
+            <a:endParaRPr lang="de-CH" dirty="0"/>
+          </a:p>
+          <a:p>
+            <a:pPr marL="0" indent="0">
+              <a:buFont typeface="Symbol" panose="05050102010706020507" pitchFamily="18" charset="2"/>
+              <a:buNone/>
+            </a:pPr>
+            <a:endParaRPr lang="de-CH" dirty="0"/>
+          </a:p>
+          <a:p>
+            <a:pPr marL="0" indent="0">
+              <a:buFont typeface="Symbol" panose="05050102010706020507" pitchFamily="18" charset="2"/>
+              <a:buNone/>
+            </a:pPr>
+            <a:endParaRPr lang="de-CH" dirty="0"/>
+          </a:p>
+          <a:p>
+            <a:pPr marL="0" indent="0">
+              <a:buFont typeface="Symbol" panose="05050102010706020507" pitchFamily="18" charset="2"/>
+              <a:buNone/>
+            </a:pPr>
+            <a:endParaRPr lang="de-CH" dirty="0"/>
+          </a:p>
+          <a:p>
+            <a:pPr marL="0" indent="0">
+              <a:buFont typeface="Symbol" panose="05050102010706020507" pitchFamily="18" charset="2"/>
+              <a:buNone/>
+            </a:pPr>
+            <a:r>
+              <a:rPr lang="de-CH" dirty="0"/>
+              <a:t>Ein grosser Milestone war eine effiziente und erweiterbare Datenbank zu entwerfen und aufzusetzen. Ich überlegte mir alle Funktionen und zeichnete danach ein ERD nach allen Normalformen.</a:t>
+            </a:r>
           </a:p>
         </p:txBody>
       </p:sp>
@@ -7604,7 +11924,7 @@
           <a:p>
             <a:fld id="{C62896A1-7A7D-4D4A-9D13-6BD00B7CA0F7}" type="slidenum">
               <a:rPr lang="de-CH" smtClean="0"/>
-              <a:t>8</a:t>
+              <a:t>7</a:t>
             </a:fld>
             <a:endParaRPr lang="de-CH"/>
           </a:p>
@@ -7613,7 +11933,7 @@
     </p:spTree>
     <p:extLst>
       <p:ext uri="{BB962C8B-B14F-4D97-AF65-F5344CB8AC3E}">
-        <p14:creationId xmlns:p14="http://schemas.microsoft.com/office/powerpoint/2010/main" val="1408097858"/>
+        <p14:creationId xmlns:p14="http://schemas.microsoft.com/office/powerpoint/2010/main" val="600434766"/>
       </p:ext>
     </p:extLst>
   </p:cSld>
@@ -7667,13 +11987,97 @@
           <a:bodyPr/>
           <a:lstStyle/>
           <a:p>
+            <a:endParaRPr lang="de-CH" dirty="0"/>
+          </a:p>
+        </p:txBody>
+      </p:sp>
+      <p:sp>
+        <p:nvSpPr>
+          <p:cNvPr id="4" name="Foliennummernplatzhalter 3"/>
+          <p:cNvSpPr>
+            <a:spLocks noGrp="1"/>
+          </p:cNvSpPr>
+          <p:nvPr>
+            <p:ph type="sldNum" sz="quarter" idx="5"/>
+          </p:nvPr>
+        </p:nvSpPr>
+        <p:spPr/>
+        <p:txBody>
+          <a:bodyPr/>
+          <a:lstStyle/>
+          <a:p>
+            <a:fld id="{C62896A1-7A7D-4D4A-9D13-6BD00B7CA0F7}" type="slidenum">
+              <a:rPr lang="de-CH" smtClean="0"/>
+              <a:t>8</a:t>
+            </a:fld>
+            <a:endParaRPr lang="de-CH"/>
+          </a:p>
+        </p:txBody>
+      </p:sp>
+    </p:spTree>
+    <p:extLst>
+      <p:ext uri="{BB962C8B-B14F-4D97-AF65-F5344CB8AC3E}">
+        <p14:creationId xmlns:p14="http://schemas.microsoft.com/office/powerpoint/2010/main" val="1408097858"/>
+      </p:ext>
+    </p:extLst>
+  </p:cSld>
+  <p:clrMapOvr>
+    <a:masterClrMapping/>
+  </p:clrMapOvr>
+</p:notes>
+</file>
+
+<file path=ppt/notesSlides/notesSlide9.xml><?xml version="1.0" encoding="utf-8"?>
+<p:notes xmlns:a="http://schemas.openxmlformats.org/drawingml/2006/main" xmlns:r="http://schemas.openxmlformats.org/officeDocument/2006/relationships" xmlns:p="http://schemas.openxmlformats.org/presentationml/2006/main">
+  <p:cSld>
+    <p:spTree>
+      <p:nvGrpSpPr>
+        <p:cNvPr id="1" name=""/>
+        <p:cNvGrpSpPr/>
+        <p:nvPr/>
+      </p:nvGrpSpPr>
+      <p:grpSpPr>
+        <a:xfrm>
+          <a:off x="0" y="0"/>
+          <a:ext cx="0" cy="0"/>
+          <a:chOff x="0" y="0"/>
+          <a:chExt cx="0" cy="0"/>
+        </a:xfrm>
+      </p:grpSpPr>
+      <p:sp>
+        <p:nvSpPr>
+          <p:cNvPr id="2" name="Folienbildplatzhalter 1"/>
+          <p:cNvSpPr>
+            <a:spLocks noGrp="1" noRot="1" noChangeAspect="1"/>
+          </p:cNvSpPr>
+          <p:nvPr>
+            <p:ph type="sldImg"/>
+          </p:nvPr>
+        </p:nvSpPr>
+        <p:spPr/>
+      </p:sp>
+      <p:sp>
+        <p:nvSpPr>
+          <p:cNvPr id="3" name="Notizenplatzhalter 2"/>
+          <p:cNvSpPr>
+            <a:spLocks noGrp="1"/>
+          </p:cNvSpPr>
+          <p:nvPr>
+            <p:ph type="body" idx="1"/>
+          </p:nvPr>
+        </p:nvSpPr>
+        <p:spPr/>
+        <p:txBody>
+          <a:bodyPr/>
+          <a:lstStyle/>
+          <a:p>
             <a:pPr marL="171450" indent="-171450">
               <a:buFont typeface="Symbol" panose="05050102010706020507" pitchFamily="18" charset="2"/>
               <a:buChar char="-"/>
             </a:pPr>
             <a:r>
-              <a:rPr lang="de-CH" dirty="0"/>
-              <a:t>Abschliessend würde ich sagen, dass mir Projekt gut gelungen ist. </a:t>
+              <a:rPr lang="de-DE" dirty="0"/>
+              <a:t>Projekt gut gelungen, viel gelernt</a:t>
             </a:r>
           </a:p>
           <a:p>
@@ -7682,8 +12086,8 @@
               <a:buChar char="-"/>
             </a:pPr>
             <a:r>
-              <a:rPr lang="de-CH" dirty="0"/>
-              <a:t>Ich habe vieles gelernt und bin auch auf ein zufriedenstellendes Endprodukt gekommen.</a:t>
+              <a:rPr lang="de-DE" dirty="0"/>
+              <a:t>Zeitplan besser als beim Sportferienprojekt</a:t>
             </a:r>
           </a:p>
           <a:p>
@@ -7692,8 +12096,8 @@
               <a:buChar char="-"/>
             </a:pPr>
             <a:r>
-              <a:rPr lang="de-CH" dirty="0"/>
-              <a:t>Das nächste Mal muss ich mich besser auf die Zeitplanung achten.</a:t>
+              <a:rPr lang="de-DE" dirty="0"/>
+              <a:t>Die Dokumentation immer aktuell gehalten</a:t>
             </a:r>
           </a:p>
           <a:p>
@@ -7702,9 +12106,70 @@
               <a:buChar char="-"/>
             </a:pPr>
             <a:r>
-              <a:rPr lang="de-CH" dirty="0"/>
-              <a:t>Was auch jedes Mal eine Schwäche von mir ist, dass ich mich zu sehr auf Details fokussiere und viel Zeit dafür aufbringe.</a:t>
-            </a:r>
+              <a:rPr lang="de-DE" dirty="0"/>
+              <a:t>Ziele erreicht, Endprodukt zufriedenstellend</a:t>
+            </a:r>
+          </a:p>
+          <a:p>
+            <a:pPr marL="171450" indent="-171450">
+              <a:buFont typeface="Symbol" panose="05050102010706020507" pitchFamily="18" charset="2"/>
+              <a:buChar char="-"/>
+            </a:pPr>
+            <a:r>
+              <a:rPr lang="de-DE" b="1" dirty="0"/>
+              <a:t>Verbesserungspotenzial</a:t>
+            </a:r>
+            <a:r>
+              <a:rPr lang="de-DE" dirty="0"/>
+              <a:t>:</a:t>
+            </a:r>
+          </a:p>
+          <a:p>
+            <a:pPr marL="171450" indent="-171450">
+              <a:buFont typeface="Symbol" panose="05050102010706020507" pitchFamily="18" charset="2"/>
+              <a:buChar char="-"/>
+            </a:pPr>
+            <a:r>
+              <a:rPr lang="de-DE" dirty="0"/>
+              <a:t>Zeitmangel für tolle Erweiterungen</a:t>
+            </a:r>
+          </a:p>
+          <a:p>
+            <a:pPr marL="171450" indent="-171450">
+              <a:buFont typeface="Symbol" panose="05050102010706020507" pitchFamily="18" charset="2"/>
+              <a:buChar char="-"/>
+            </a:pPr>
+            <a:r>
+              <a:rPr lang="de-DE" dirty="0"/>
+              <a:t>Inkonsistenz bei HTTP-</a:t>
+            </a:r>
+            <a:r>
+              <a:rPr lang="de-DE" dirty="0" err="1"/>
+              <a:t>Requests</a:t>
+            </a:r>
+            <a:r>
+              <a:rPr lang="de-DE" dirty="0"/>
+              <a:t> (GET </a:t>
+            </a:r>
+            <a:r>
+              <a:rPr lang="de-DE" dirty="0" err="1"/>
+              <a:t>vs</a:t>
+            </a:r>
+            <a:r>
+              <a:rPr lang="de-DE" dirty="0"/>
+              <a:t> POST)</a:t>
+            </a:r>
+          </a:p>
+          <a:p>
+            <a:pPr marL="171450" indent="-171450">
+              <a:buFont typeface="Symbol" panose="05050102010706020507" pitchFamily="18" charset="2"/>
+              <a:buChar char="-"/>
+            </a:pPr>
+            <a:r>
+              <a:rPr lang="de-DE" dirty="0"/>
+              <a:t>Decks noch mit GET, später POST für Karten/Benutzer</a:t>
+            </a:r>
+            <a:endParaRPr lang="de-CH" dirty="0"/>
           </a:p>
           <a:p>
             <a:pPr marL="171450" indent="-171450">
@@ -7718,20 +12183,331 @@
               <a:buFont typeface="Symbol" panose="05050102010706020507" pitchFamily="18" charset="2"/>
               <a:buChar char="-"/>
             </a:pPr>
-            <a:r>
-              <a:rPr lang="de-CH" dirty="0"/>
-              <a:t>All in all hat es mir spass gemacht, das Projekt umzusetzen.</a:t>
-            </a:r>
+            <a:endParaRPr lang="de-CH" dirty="0"/>
           </a:p>
           <a:p>
             <a:pPr marL="171450" indent="-171450">
               <a:buFont typeface="Symbol" panose="05050102010706020507" pitchFamily="18" charset="2"/>
               <a:buChar char="-"/>
             </a:pPr>
+            <a:endParaRPr lang="de-CH" dirty="0"/>
+          </a:p>
+          <a:p>
+            <a:pPr marL="171450" indent="-171450">
+              <a:buFont typeface="Symbol" panose="05050102010706020507" pitchFamily="18" charset="2"/>
+              <a:buChar char="-"/>
+            </a:pPr>
+            <a:endParaRPr lang="de-CH" dirty="0"/>
+          </a:p>
+          <a:p>
+            <a:pPr marL="171450" indent="-171450">
+              <a:buFont typeface="Symbol" panose="05050102010706020507" pitchFamily="18" charset="2"/>
+              <a:buChar char="-"/>
+            </a:pPr>
+            <a:endParaRPr lang="de-CH" dirty="0"/>
+          </a:p>
+          <a:p>
+            <a:pPr marL="171450" indent="-171450">
+              <a:buFont typeface="Symbol" panose="05050102010706020507" pitchFamily="18" charset="2"/>
+              <a:buChar char="-"/>
+            </a:pPr>
+            <a:endParaRPr lang="de-CH" dirty="0"/>
+          </a:p>
+          <a:p>
+            <a:pPr marL="171450" indent="-171450">
+              <a:buFont typeface="Symbol" panose="05050102010706020507" pitchFamily="18" charset="2"/>
+              <a:buChar char="-"/>
+            </a:pPr>
+            <a:endParaRPr lang="de-CH" dirty="0"/>
+          </a:p>
+          <a:p>
+            <a:pPr marL="171450" indent="-171450">
+              <a:buFont typeface="Symbol" panose="05050102010706020507" pitchFamily="18" charset="2"/>
+              <a:buChar char="-"/>
+            </a:pPr>
+            <a:endParaRPr lang="de-CH" dirty="0"/>
+          </a:p>
+          <a:p>
+            <a:pPr marL="171450" indent="-171450">
+              <a:buFont typeface="Symbol" panose="05050102010706020507" pitchFamily="18" charset="2"/>
+              <a:buChar char="-"/>
+            </a:pPr>
+            <a:endParaRPr lang="de-CH" dirty="0"/>
+          </a:p>
+          <a:p>
+            <a:pPr marL="171450" indent="-171450">
+              <a:buFont typeface="Symbol" panose="05050102010706020507" pitchFamily="18" charset="2"/>
+              <a:buChar char="-"/>
+            </a:pPr>
+            <a:endParaRPr lang="de-CH" dirty="0"/>
+          </a:p>
+          <a:p>
+            <a:pPr marL="171450" indent="-171450">
+              <a:buFont typeface="Symbol" panose="05050102010706020507" pitchFamily="18" charset="2"/>
+              <a:buChar char="-"/>
+            </a:pPr>
+            <a:endParaRPr lang="de-CH" dirty="0"/>
+          </a:p>
+          <a:p>
+            <a:pPr marL="171450" indent="-171450">
+              <a:buFont typeface="Symbol" panose="05050102010706020507" pitchFamily="18" charset="2"/>
+              <a:buChar char="-"/>
+            </a:pPr>
+            <a:endParaRPr lang="de-CH" dirty="0"/>
+          </a:p>
+          <a:p>
+            <a:pPr marL="171450" indent="-171450">
+              <a:buFont typeface="Symbol" panose="05050102010706020507" pitchFamily="18" charset="2"/>
+              <a:buChar char="-"/>
+            </a:pPr>
+            <a:endParaRPr lang="de-CH" dirty="0"/>
+          </a:p>
+          <a:p>
+            <a:pPr marL="171450" indent="-171450">
+              <a:buFont typeface="Symbol" panose="05050102010706020507" pitchFamily="18" charset="2"/>
+              <a:buChar char="-"/>
+            </a:pPr>
+            <a:endParaRPr lang="de-CH" dirty="0"/>
+          </a:p>
+          <a:p>
+            <a:pPr marL="171450" indent="-171450">
+              <a:buFont typeface="Symbol" panose="05050102010706020507" pitchFamily="18" charset="2"/>
+              <a:buChar char="-"/>
+            </a:pPr>
+            <a:endParaRPr lang="de-CH" dirty="0"/>
+          </a:p>
+          <a:p>
+            <a:pPr marL="171450" indent="-171450">
+              <a:buFont typeface="Symbol" panose="05050102010706020507" pitchFamily="18" charset="2"/>
+              <a:buChar char="-"/>
+            </a:pPr>
+            <a:endParaRPr lang="de-CH" dirty="0"/>
+          </a:p>
+          <a:p>
+            <a:pPr marL="171450" indent="-171450">
+              <a:buFont typeface="Symbol" panose="05050102010706020507" pitchFamily="18" charset="2"/>
+              <a:buChar char="-"/>
+            </a:pPr>
+            <a:endParaRPr lang="de-CH" dirty="0"/>
+          </a:p>
+          <a:p>
+            <a:pPr marL="171450" indent="-171450">
+              <a:buFont typeface="Symbol" panose="05050102010706020507" pitchFamily="18" charset="2"/>
+              <a:buChar char="-"/>
+            </a:pPr>
             <a:r>
               <a:rPr lang="de-CH" dirty="0"/>
-              <a:t>Ich werde bestimmt dieses Projekt in meiner Freizeit verfeinern.</a:t>
-            </a:r>
+              <a:t>Abschliessend würde ich sagen, dass mir Projekt gut gelungen ist. </a:t>
+            </a:r>
+          </a:p>
+          <a:p>
+            <a:pPr marL="171450" indent="-171450">
+              <a:buFont typeface="Symbol" panose="05050102010706020507" pitchFamily="18" charset="2"/>
+              <a:buChar char="-"/>
+            </a:pPr>
+            <a:r>
+              <a:rPr lang="de-CH" dirty="0"/>
+              <a:t>Ich habe vieles gelernt und bin auch auf ein zufriedenstellendes Endprodukt gekommen.</a:t>
+            </a:r>
+          </a:p>
+          <a:p>
+            <a:pPr marL="171450" indent="-171450">
+              <a:buFont typeface="Symbol" panose="05050102010706020507" pitchFamily="18" charset="2"/>
+              <a:buChar char="-"/>
+            </a:pPr>
+            <a:r>
+              <a:rPr lang="de-CH" dirty="0"/>
+              <a:t>Im vergleich zum Sportferienprojekt, war der Zeitplan hier ziemlich realistisch. Ich hinkte zwar immer etwas hinten her, schlussendlich konnte ich jedoch alles wieder aufholen und erreichte alle ziele. Das Projekt hat noch sehr viel Erweiterungspotential, wofür ich leider keine Zeit mehr hatte. Auch gibt es eine </a:t>
+            </a:r>
+            <a:r>
+              <a:rPr lang="de-CH" dirty="0" err="1"/>
+              <a:t>Unkonsistente</a:t>
+            </a:r>
+            <a:r>
+              <a:rPr lang="de-CH" dirty="0"/>
+              <a:t> </a:t>
+            </a:r>
+            <a:r>
+              <a:rPr lang="de-CH" dirty="0" err="1"/>
+              <a:t>verwendung</a:t>
+            </a:r>
+            <a:r>
+              <a:rPr lang="de-CH" dirty="0"/>
+              <a:t> von den http-</a:t>
+            </a:r>
+            <a:r>
+              <a:rPr lang="de-CH" dirty="0" err="1"/>
+              <a:t>requests</a:t>
+            </a:r>
+            <a:r>
+              <a:rPr lang="de-CH" dirty="0"/>
+              <a:t>. Zuerst machte ich alles über GET-</a:t>
+            </a:r>
+            <a:r>
+              <a:rPr lang="de-CH" dirty="0" err="1"/>
+              <a:t>Requests</a:t>
+            </a:r>
+            <a:r>
+              <a:rPr lang="de-CH" dirty="0"/>
+              <a:t>, wie zum Beispiel das hinzufügen von den Decks. Alle nötigen Eckdaten werden über die URL-Parameter übergeben. Dies ist eine nicht sehr schöne Lösung. Beim hinzufügen von Karten und Benutzern kam ich dann auf die Idee mit POST zu arbeiten, wo ich alles als JSON bequem mitgeben konnte. Zeitlich hat es jedoch leider nicht gereicht, um das hinzufügen von Decks anzupassen.</a:t>
+            </a:r>
+          </a:p>
+          <a:p>
+            <a:pPr marL="171450" indent="-171450">
+              <a:buFont typeface="Symbol" panose="05050102010706020507" pitchFamily="18" charset="2"/>
+              <a:buChar char="-"/>
+            </a:pPr>
+            <a:endParaRPr lang="de-CH" dirty="0"/>
+          </a:p>
+          <a:p>
+            <a:pPr marL="171450" indent="-171450">
+              <a:buFont typeface="Symbol" panose="05050102010706020507" pitchFamily="18" charset="2"/>
+              <a:buChar char="-"/>
+            </a:pPr>
+            <a:endParaRPr lang="de-CH" dirty="0"/>
+          </a:p>
+          <a:p>
+            <a:pPr marL="171450" indent="-171450">
+              <a:buFont typeface="Symbol" panose="05050102010706020507" pitchFamily="18" charset="2"/>
+              <a:buChar char="-"/>
+            </a:pPr>
+            <a:endParaRPr lang="de-CH" dirty="0"/>
+          </a:p>
+          <a:p>
+            <a:pPr marL="171450" indent="-171450">
+              <a:buFont typeface="Symbol" panose="05050102010706020507" pitchFamily="18" charset="2"/>
+              <a:buChar char="-"/>
+            </a:pPr>
+            <a:endParaRPr lang="de-CH" dirty="0"/>
+          </a:p>
+          <a:p>
+            <a:pPr marL="171450" indent="-171450">
+              <a:buFont typeface="Symbol" panose="05050102010706020507" pitchFamily="18" charset="2"/>
+              <a:buChar char="-"/>
+            </a:pPr>
+            <a:endParaRPr lang="de-CH" dirty="0"/>
+          </a:p>
+          <a:p>
+            <a:pPr marL="171450" indent="-171450">
+              <a:buFont typeface="Symbol" panose="05050102010706020507" pitchFamily="18" charset="2"/>
+              <a:buChar char="-"/>
+            </a:pPr>
+            <a:endParaRPr lang="de-CH" dirty="0"/>
+          </a:p>
+          <a:p>
+            <a:pPr marL="171450" indent="-171450">
+              <a:buFont typeface="Symbol" panose="05050102010706020507" pitchFamily="18" charset="2"/>
+              <a:buChar char="-"/>
+            </a:pPr>
+            <a:endParaRPr lang="de-CH" dirty="0"/>
+          </a:p>
+          <a:p>
+            <a:pPr marL="171450" indent="-171450">
+              <a:buFont typeface="Symbol" panose="05050102010706020507" pitchFamily="18" charset="2"/>
+              <a:buChar char="-"/>
+            </a:pPr>
+            <a:endParaRPr lang="de-CH" dirty="0"/>
+          </a:p>
+          <a:p>
+            <a:r>
+              <a:rPr lang="de-DE" b="1" dirty="0"/>
+              <a:t>"</a:t>
+            </a:r>
+            <a:r>
+              <a:rPr lang="de-DE" b="1" dirty="0" err="1"/>
+              <a:t>NooThesi</a:t>
+            </a:r>
+            <a:r>
+              <a:rPr lang="de-DE" b="1" dirty="0"/>
+              <a:t>„</a:t>
+            </a:r>
+          </a:p>
+          <a:p>
+            <a:r>
+              <a:rPr lang="de-DE" b="1" dirty="0"/>
+              <a:t>"</a:t>
+            </a:r>
+            <a:r>
+              <a:rPr lang="de-DE" b="1" dirty="0" err="1"/>
+              <a:t>Νους</a:t>
+            </a:r>
+            <a:r>
+              <a:rPr lang="de-DE" b="1" dirty="0"/>
+              <a:t>" (Nous)</a:t>
+            </a:r>
+            <a:r>
+              <a:rPr lang="de-DE" dirty="0"/>
+              <a:t>: Dies bedeutet "Geist", "Verstand", "Intelligenz" oder </a:t>
+            </a:r>
+            <a:r>
+              <a:rPr lang="de-DE" b="1" dirty="0"/>
+              <a:t>"Wissen". </a:t>
+            </a:r>
+          </a:p>
+          <a:p>
+            <a:r>
+              <a:rPr lang="de-DE" b="1" dirty="0"/>
+              <a:t>"</a:t>
+            </a:r>
+            <a:r>
+              <a:rPr lang="de-DE" b="1" dirty="0" err="1"/>
+              <a:t>Θέσις</a:t>
+            </a:r>
+            <a:r>
+              <a:rPr lang="de-DE" b="1" dirty="0"/>
+              <a:t>" (Thesis)</a:t>
+            </a:r>
+            <a:r>
+              <a:rPr lang="de-DE" dirty="0"/>
+              <a:t>: Dies bedeutet "Platzierung", "Anordnung", "Position" oder </a:t>
+            </a:r>
+            <a:r>
+              <a:rPr lang="de-DE" b="1" dirty="0"/>
+              <a:t>"Festsetzung".</a:t>
+            </a:r>
+          </a:p>
+          <a:p>
+            <a:endParaRPr lang="de-DE" dirty="0"/>
+          </a:p>
+          <a:p>
+            <a:r>
+              <a:rPr lang="de-DE" b="1" dirty="0"/>
+              <a:t>Zusammen</a:t>
+            </a:r>
+            <a:r>
+              <a:rPr lang="de-DE" dirty="0"/>
+              <a:t>: Wissen Festsetzen</a:t>
+            </a:r>
+          </a:p>
+          <a:p>
+            <a:endParaRPr lang="de-DE" dirty="0"/>
+          </a:p>
+          <a:p>
+            <a:endParaRPr lang="de-DE" dirty="0"/>
+          </a:p>
+          <a:p>
+            <a:endParaRPr lang="de-DE" dirty="0"/>
+          </a:p>
+          <a:p>
+            <a:endParaRPr lang="de-DE" dirty="0"/>
+          </a:p>
+          <a:p>
+            <a:endParaRPr lang="de-DE" dirty="0"/>
+          </a:p>
+          <a:p>
+            <a:endParaRPr lang="de-DE" dirty="0"/>
+          </a:p>
+          <a:p>
+            <a:endParaRPr lang="de-DE" dirty="0"/>
+          </a:p>
+          <a:p>
+            <a:endParaRPr lang="de-DE" dirty="0"/>
+          </a:p>
+          <a:p>
+            <a:endParaRPr lang="de-DE" dirty="0"/>
+          </a:p>
+          <a:p>
+            <a:endParaRPr lang="de-CH" dirty="0"/>
           </a:p>
         </p:txBody>
       </p:sp>
@@ -7973,7 +12749,7 @@
           <a:p>
             <a:fld id="{CC1D23AB-E162-4861-9FAF-68D7E8098A19}" type="datetime1">
               <a:rPr lang="de-CH" smtClean="0"/>
-              <a:t>27.06.2025</a:t>
+              <a:t>03.07.2025</a:t>
             </a:fld>
             <a:endParaRPr lang="en-US" dirty="0"/>
           </a:p>
@@ -8280,7 +13056,7 @@
           <a:p>
             <a:fld id="{7CA9334F-A6F1-4D3D-BB69-73EA677B3B62}" type="datetime1">
               <a:rPr lang="de-CH" smtClean="0"/>
-              <a:t>27.06.2025</a:t>
+              <a:t>03.07.2025</a:t>
             </a:fld>
             <a:endParaRPr lang="en-US" dirty="0"/>
           </a:p>
@@ -8528,7 +13304,7 @@
           <a:p>
             <a:fld id="{6A42607B-8DED-4222-85B4-F230D767E3B6}" type="datetime1">
               <a:rPr lang="de-CH" smtClean="0"/>
-              <a:t>27.06.2025</a:t>
+              <a:t>03.07.2025</a:t>
             </a:fld>
             <a:endParaRPr lang="en-US" dirty="0"/>
           </a:p>
@@ -9064,7 +13840,7 @@
           <a:p>
             <a:fld id="{D0B7C34E-A140-42E0-94ED-9A45B65CB313}" type="datetime1">
               <a:rPr lang="de-CH" smtClean="0"/>
-              <a:t>27.06.2025</a:t>
+              <a:t>03.07.2025</a:t>
             </a:fld>
             <a:endParaRPr lang="en-US" dirty="0"/>
           </a:p>
@@ -9312,7 +14088,7 @@
           <a:p>
             <a:fld id="{23959522-A794-43E2-9293-53A2038AE9B9}" type="datetime1">
               <a:rPr lang="de-CH" smtClean="0"/>
-              <a:t>27.06.2025</a:t>
+              <a:t>03.07.2025</a:t>
             </a:fld>
             <a:endParaRPr lang="en-US" dirty="0"/>
           </a:p>
@@ -9855,7 +14631,7 @@
           <a:p>
             <a:fld id="{959B189F-9FBA-42D6-83F1-D5A5BF3B25E8}" type="datetime1">
               <a:rPr lang="de-CH" smtClean="0"/>
-              <a:t>27.06.2025</a:t>
+              <a:t>03.07.2025</a:t>
             </a:fld>
             <a:endParaRPr lang="en-US" dirty="0"/>
           </a:p>
@@ -10165,7 +14941,7 @@
           <a:p>
             <a:fld id="{E21F56C9-0F7A-4BEE-B5CE-AAC5472931A9}" type="datetime1">
               <a:rPr lang="de-CH" smtClean="0"/>
-              <a:t>27.06.2025</a:t>
+              <a:t>03.07.2025</a:t>
             </a:fld>
             <a:endParaRPr lang="en-US" dirty="0"/>
           </a:p>
@@ -10340,7 +15116,7 @@
           <a:p>
             <a:fld id="{FB6FAC3C-DC25-42A2-BF9A-74461CEF9291}" type="datetime1">
               <a:rPr lang="de-CH" smtClean="0"/>
-              <a:t>27.06.2025</a:t>
+              <a:t>03.07.2025</a:t>
             </a:fld>
             <a:endParaRPr lang="en-US" dirty="0"/>
           </a:p>
@@ -10520,7 +15296,7 @@
           <a:p>
             <a:fld id="{69365E01-A3B2-4FE9-81DA-E3AAB9DADE07}" type="datetime1">
               <a:rPr lang="de-CH" smtClean="0"/>
-              <a:t>27.06.2025</a:t>
+              <a:t>03.07.2025</a:t>
             </a:fld>
             <a:endParaRPr lang="en-US" dirty="0"/>
           </a:p>
@@ -10700,7 +15476,7 @@
           <a:p>
             <a:fld id="{78D294B7-902E-437D-B325-FF179A914589}" type="datetime1">
               <a:rPr lang="de-CH" smtClean="0"/>
-              <a:t>27.06.2025</a:t>
+              <a:t>03.07.2025</a:t>
             </a:fld>
             <a:endParaRPr lang="en-US" dirty="0"/>
           </a:p>
@@ -10961,7 +15737,7 @@
           <a:p>
             <a:fld id="{1032FBB3-D199-4DA6-90A5-5DD37B91CC37}" type="datetime1">
               <a:rPr lang="de-CH" smtClean="0"/>
-              <a:t>27.06.2025</a:t>
+              <a:t>03.07.2025</a:t>
             </a:fld>
             <a:endParaRPr lang="en-US" dirty="0"/>
           </a:p>
@@ -11253,7 +16029,7 @@
           <a:p>
             <a:fld id="{637E2632-9207-4E8E-9C85-A857E7B10DAB}" type="datetime1">
               <a:rPr lang="de-CH" smtClean="0"/>
-              <a:t>27.06.2025</a:t>
+              <a:t>03.07.2025</a:t>
             </a:fld>
             <a:endParaRPr lang="en-US" dirty="0"/>
           </a:p>
@@ -11683,7 +16459,7 @@
           <a:p>
             <a:fld id="{697F74A6-E8D0-49D5-A225-886F882B6A11}" type="datetime1">
               <a:rPr lang="de-CH" smtClean="0"/>
-              <a:t>27.06.2025</a:t>
+              <a:t>03.07.2025</a:t>
             </a:fld>
             <a:endParaRPr lang="en-US" dirty="0"/>
           </a:p>
@@ -11806,7 +16582,7 @@
           <a:p>
             <a:fld id="{AFF6271B-F1A6-40D4-AFA9-410F6BC5FFBE}" type="datetime1">
               <a:rPr lang="de-CH" smtClean="0"/>
-              <a:t>27.06.2025</a:t>
+              <a:t>03.07.2025</a:t>
             </a:fld>
             <a:endParaRPr lang="en-US" dirty="0"/>
           </a:p>
@@ -11901,7 +16677,7 @@
           <a:p>
             <a:fld id="{CA85907B-9E03-4C8B-80A8-8DB32ABA7443}" type="datetime1">
               <a:rPr lang="de-CH" smtClean="0"/>
-              <a:t>27.06.2025</a:t>
+              <a:t>03.07.2025</a:t>
             </a:fld>
             <a:endParaRPr lang="en-US" dirty="0"/>
           </a:p>
@@ -12184,7 +16960,7 @@
           <a:p>
             <a:fld id="{D8FBF752-A4AD-4387-9BFE-322906AB8065}" type="datetime1">
               <a:rPr lang="de-CH" smtClean="0"/>
-              <a:t>27.06.2025</a:t>
+              <a:t>03.07.2025</a:t>
             </a:fld>
             <a:endParaRPr lang="en-US" dirty="0"/>
           </a:p>
@@ -12475,7 +17251,7 @@
           <a:p>
             <a:fld id="{52F0BF35-0F67-48A5-B6BE-742A86A92D84}" type="datetime1">
               <a:rPr lang="de-CH" smtClean="0"/>
-              <a:t>27.06.2025</a:t>
+              <a:t>03.07.2025</a:t>
             </a:fld>
             <a:endParaRPr lang="en-US" dirty="0"/>
           </a:p>
@@ -12706,7 +17482,7 @@
           <a:p>
             <a:fld id="{ADF25151-14EB-4498-B760-BB48DCA65FF1}" type="datetime1">
               <a:rPr lang="de-CH" smtClean="0"/>
-              <a:t>27.06.2025</a:t>
+              <a:t>03.07.2025</a:t>
             </a:fld>
             <a:endParaRPr lang="en-US" dirty="0"/>
           </a:p>
@@ -13470,7 +18246,7 @@
           <a:p>
             <a:fld id="{8C4DC851-43CB-487F-B909-D45FDA963203}" type="datetime1">
               <a:rPr lang="de-CH" smtClean="0"/>
-              <a:t>27.06.2025</a:t>
+              <a:t>03.07.2025</a:t>
             </a:fld>
             <a:endParaRPr lang="en-US" dirty="0"/>
           </a:p>
@@ -13539,6 +18315,283 @@
     <p:extLst>
       <p:ext uri="{BB962C8B-B14F-4D97-AF65-F5344CB8AC3E}">
         <p14:creationId xmlns:p14="http://schemas.microsoft.com/office/powerpoint/2010/main" val="861586475"/>
+      </p:ext>
+    </p:extLst>
+  </p:cSld>
+  <p:clrMapOvr>
+    <a:masterClrMapping/>
+  </p:clrMapOvr>
+  <mc:AlternateContent xmlns:mc="http://schemas.openxmlformats.org/markup-compatibility/2006" xmlns:p159="http://schemas.microsoft.com/office/powerpoint/2015/09/main">
+    <mc:Choice Requires="p159">
+      <p:transition xmlns:p14="http://schemas.microsoft.com/office/powerpoint/2010/main" spd="slow" p14:dur="2000">
+        <p159:morph option="byObject"/>
+      </p:transition>
+    </mc:Choice>
+    <mc:Fallback xmlns="">
+      <p:transition spd="slow">
+        <p:fade/>
+      </p:transition>
+    </mc:Fallback>
+  </mc:AlternateContent>
+</p:sld>
+</file>
+
+<file path=ppt/slides/slide10.xml><?xml version="1.0" encoding="utf-8"?>
+<p:sld xmlns:a="http://schemas.openxmlformats.org/drawingml/2006/main" xmlns:r="http://schemas.openxmlformats.org/officeDocument/2006/relationships" xmlns:p="http://schemas.openxmlformats.org/presentationml/2006/main">
+  <p:cSld>
+    <p:spTree>
+      <p:nvGrpSpPr>
+        <p:cNvPr id="1" name=""/>
+        <p:cNvGrpSpPr/>
+        <p:nvPr/>
+      </p:nvGrpSpPr>
+      <p:grpSpPr>
+        <a:xfrm>
+          <a:off x="0" y="0"/>
+          <a:ext cx="0" cy="0"/>
+          <a:chOff x="0" y="0"/>
+          <a:chExt cx="0" cy="0"/>
+        </a:xfrm>
+      </p:grpSpPr>
+      <p:sp>
+        <p:nvSpPr>
+          <p:cNvPr id="2" name="Titel 1">
+            <a:extLst>
+              <a:ext uri="{FF2B5EF4-FFF2-40B4-BE49-F238E27FC236}">
+                <a16:creationId xmlns:a16="http://schemas.microsoft.com/office/drawing/2014/main" id="{A0A96B42-50F9-A59E-04FA-CAF71502BBCC}"/>
+              </a:ext>
+            </a:extLst>
+          </p:cNvPr>
+          <p:cNvSpPr>
+            <a:spLocks noGrp="1"/>
+          </p:cNvSpPr>
+          <p:nvPr>
+            <p:ph type="title"/>
+          </p:nvPr>
+        </p:nvSpPr>
+        <p:spPr>
+          <a:xfrm>
+            <a:off x="1141413" y="609600"/>
+            <a:ext cx="9905998" cy="1905000"/>
+          </a:xfrm>
+        </p:spPr>
+        <p:txBody>
+          <a:bodyPr>
+            <a:normAutofit/>
+          </a:bodyPr>
+          <a:lstStyle/>
+          <a:p>
+            <a:r>
+              <a:rPr lang="de-DE" b="0" i="0" dirty="0">
+                <a:effectLst/>
+                <a:latin typeface="-apple-system"/>
+              </a:rPr>
+              <a:t>Quellenverzeichnis</a:t>
+            </a:r>
+            <a:endParaRPr lang="de-DE" b="0" i="0">
+              <a:effectLst/>
+              <a:latin typeface="-apple-system"/>
+            </a:endParaRPr>
+          </a:p>
+        </p:txBody>
+      </p:sp>
+      <p:sp>
+        <p:nvSpPr>
+          <p:cNvPr id="5" name="Fußzeilenplatzhalter 4">
+            <a:extLst>
+              <a:ext uri="{FF2B5EF4-FFF2-40B4-BE49-F238E27FC236}">
+                <a16:creationId xmlns:a16="http://schemas.microsoft.com/office/drawing/2014/main" id="{31E092BB-4951-F2CB-ABCF-4CE3BAA448A7}"/>
+              </a:ext>
+            </a:extLst>
+          </p:cNvPr>
+          <p:cNvSpPr>
+            <a:spLocks noGrp="1"/>
+          </p:cNvSpPr>
+          <p:nvPr>
+            <p:ph type="ftr" sz="quarter" idx="11"/>
+          </p:nvPr>
+        </p:nvSpPr>
+        <p:spPr>
+          <a:xfrm>
+            <a:off x="1141412" y="5883275"/>
+            <a:ext cx="7543800" cy="365125"/>
+          </a:xfrm>
+        </p:spPr>
+        <p:txBody>
+          <a:bodyPr>
+            <a:normAutofit/>
+          </a:bodyPr>
+          <a:lstStyle/>
+          <a:p>
+            <a:pPr>
+              <a:spcAft>
+                <a:spcPts val="600"/>
+              </a:spcAft>
+            </a:pPr>
+            <a:r>
+              <a:rPr lang="en-US">
+                <a:solidFill>
+                  <a:prstClr val="white">
+                    <a:lumMod val="75000"/>
+                  </a:prstClr>
+                </a:solidFill>
+              </a:rPr>
+              <a:t>Bretscher Jan</a:t>
+            </a:r>
+          </a:p>
+        </p:txBody>
+      </p:sp>
+      <p:sp>
+        <p:nvSpPr>
+          <p:cNvPr id="4" name="Datumsplatzhalter 3">
+            <a:extLst>
+              <a:ext uri="{FF2B5EF4-FFF2-40B4-BE49-F238E27FC236}">
+                <a16:creationId xmlns:a16="http://schemas.microsoft.com/office/drawing/2014/main" id="{537E39B2-120C-D9B6-0A69-5457FE567059}"/>
+              </a:ext>
+            </a:extLst>
+          </p:cNvPr>
+          <p:cNvSpPr>
+            <a:spLocks noGrp="1"/>
+          </p:cNvSpPr>
+          <p:nvPr>
+            <p:ph type="dt" sz="half" idx="10"/>
+          </p:nvPr>
+        </p:nvSpPr>
+        <p:spPr>
+          <a:xfrm>
+            <a:off x="8837612" y="5883275"/>
+            <a:ext cx="1600200" cy="365125"/>
+          </a:xfrm>
+        </p:spPr>
+        <p:txBody>
+          <a:bodyPr>
+            <a:normAutofit/>
+          </a:bodyPr>
+          <a:lstStyle/>
+          <a:p>
+            <a:pPr>
+              <a:spcAft>
+                <a:spcPts val="600"/>
+              </a:spcAft>
+            </a:pPr>
+            <a:fld id="{AC987ADF-82B0-44B0-AD36-34160B6A502C}" type="datetime1">
+              <a:rPr lang="de-CH">
+                <a:solidFill>
+                  <a:prstClr val="white">
+                    <a:lumMod val="75000"/>
+                  </a:prstClr>
+                </a:solidFill>
+              </a:rPr>
+              <a:pPr>
+                <a:spcAft>
+                  <a:spcPts val="600"/>
+                </a:spcAft>
+              </a:pPr>
+              <a:t>03.07.2025</a:t>
+            </a:fld>
+            <a:endParaRPr lang="en-US">
+              <a:solidFill>
+                <a:prstClr val="white">
+                  <a:lumMod val="75000"/>
+                </a:prstClr>
+              </a:solidFill>
+            </a:endParaRPr>
+          </a:p>
+        </p:txBody>
+      </p:sp>
+      <p:sp>
+        <p:nvSpPr>
+          <p:cNvPr id="6" name="Foliennummernplatzhalter 5">
+            <a:extLst>
+              <a:ext uri="{FF2B5EF4-FFF2-40B4-BE49-F238E27FC236}">
+                <a16:creationId xmlns:a16="http://schemas.microsoft.com/office/drawing/2014/main" id="{05EC61BE-3167-4178-72EC-C0D47B335068}"/>
+              </a:ext>
+            </a:extLst>
+          </p:cNvPr>
+          <p:cNvSpPr>
+            <a:spLocks noGrp="1"/>
+          </p:cNvSpPr>
+          <p:nvPr>
+            <p:ph type="sldNum" sz="quarter" idx="12"/>
+          </p:nvPr>
+        </p:nvSpPr>
+        <p:spPr>
+          <a:xfrm>
+            <a:off x="10514012" y="5883275"/>
+            <a:ext cx="551167" cy="365125"/>
+          </a:xfrm>
+        </p:spPr>
+        <p:txBody>
+          <a:bodyPr>
+            <a:normAutofit/>
+          </a:bodyPr>
+          <a:lstStyle/>
+          <a:p>
+            <a:pPr>
+              <a:spcAft>
+                <a:spcPts val="600"/>
+              </a:spcAft>
+            </a:pPr>
+            <a:fld id="{D57F1E4F-1CFF-5643-939E-217C01CDF565}" type="slidenum">
+              <a:rPr lang="en-US">
+                <a:solidFill>
+                  <a:prstClr val="white">
+                    <a:lumMod val="75000"/>
+                  </a:prstClr>
+                </a:solidFill>
+              </a:rPr>
+              <a:pPr>
+                <a:spcAft>
+                  <a:spcPts val="600"/>
+                </a:spcAft>
+              </a:pPr>
+              <a:t>10</a:t>
+            </a:fld>
+            <a:endParaRPr lang="en-US">
+              <a:solidFill>
+                <a:prstClr val="white">
+                  <a:lumMod val="75000"/>
+                </a:prstClr>
+              </a:solidFill>
+            </a:endParaRPr>
+          </a:p>
+        </p:txBody>
+      </p:sp>
+      <p:graphicFrame>
+        <p:nvGraphicFramePr>
+          <p:cNvPr id="8" name="Inhaltsplatzhalter 2">
+            <a:extLst>
+              <a:ext uri="{FF2B5EF4-FFF2-40B4-BE49-F238E27FC236}">
+                <a16:creationId xmlns:a16="http://schemas.microsoft.com/office/drawing/2014/main" id="{7843B4E0-5328-8E49-974A-76A50189910D}"/>
+              </a:ext>
+            </a:extLst>
+          </p:cNvPr>
+          <p:cNvGraphicFramePr>
+            <a:graphicFrameLocks noGrp="1"/>
+          </p:cNvGraphicFramePr>
+          <p:nvPr>
+            <p:ph idx="1"/>
+            <p:extLst>
+              <p:ext uri="{D42A27DB-BD31-4B8C-83A1-F6EECF244321}">
+                <p14:modId xmlns:p14="http://schemas.microsoft.com/office/powerpoint/2010/main" val="787999955"/>
+              </p:ext>
+            </p:extLst>
+          </p:nvPr>
+        </p:nvGraphicFramePr>
+        <p:xfrm>
+          <a:off x="1064419" y="2571751"/>
+          <a:ext cx="9982992" cy="3219450"/>
+        </p:xfrm>
+        <a:graphic>
+          <a:graphicData uri="http://schemas.openxmlformats.org/drawingml/2006/diagram">
+            <dgm:relIds xmlns:dgm="http://schemas.openxmlformats.org/drawingml/2006/diagram" xmlns:r="http://schemas.openxmlformats.org/officeDocument/2006/relationships" r:dm="rId3" r:lo="rId4" r:qs="rId5" r:cs="rId6"/>
+          </a:graphicData>
+        </a:graphic>
+      </p:graphicFrame>
+    </p:spTree>
+    <p:extLst>
+      <p:ext uri="{BB962C8B-B14F-4D97-AF65-F5344CB8AC3E}">
+        <p14:creationId xmlns:p14="http://schemas.microsoft.com/office/powerpoint/2010/main" val="3340805558"/>
       </p:ext>
     </p:extLst>
   </p:cSld>
@@ -13652,10 +18705,6 @@
               </a:rPr>
               <a:t>Ziele</a:t>
             </a:r>
-            <a:endParaRPr lang="de-DE" dirty="0">
-              <a:effectLst/>
-              <a:latin typeface="-apple-system"/>
-            </a:endParaRPr>
           </a:p>
           <a:p>
             <a:pPr>
@@ -13667,11 +18716,15 @@
                 <a:effectLst/>
                 <a:latin typeface="-apple-system"/>
               </a:rPr>
-              <a:t>Pros/Contras - was lief gut, was lief schlecht</a:t>
-            </a:r>
-          </a:p>
-          <a:p>
-            <a:pPr algn="l">
+              <a:t>Pros/Contras</a:t>
+            </a:r>
+            <a:endParaRPr lang="de-DE" b="0" i="0" dirty="0">
+              <a:effectLst/>
+              <a:latin typeface="-apple-system"/>
+            </a:endParaRPr>
+          </a:p>
+          <a:p>
+            <a:pPr>
               <a:buFont typeface="Arial" panose="020B0604020202020204" pitchFamily="34" charset="0"/>
               <a:buChar char="•"/>
             </a:pPr>
@@ -13680,7 +18733,7 @@
                 <a:effectLst/>
                 <a:latin typeface="-apple-system"/>
               </a:rPr>
-              <a:t>Authentifizierung</a:t>
+              <a:t>Datenbankabfragen</a:t>
             </a:r>
           </a:p>
           <a:p>
@@ -13748,7 +18801,7 @@
           <a:p>
             <a:fld id="{AC987ADF-82B0-44B0-AD36-34160B6A502C}" type="datetime1">
               <a:rPr lang="de-CH" smtClean="0"/>
-              <a:t>27.06.2025</a:t>
+              <a:t>03.07.2025</a:t>
             </a:fld>
             <a:endParaRPr lang="en-US" dirty="0"/>
           </a:p>
@@ -14062,7 +19115,7 @@
                   <a:spcPts val="600"/>
                 </a:spcAft>
               </a:pPr>
-              <a:t>27.06.2025</a:t>
+              <a:t>03.07.2025</a:t>
             </a:fld>
             <a:endParaRPr lang="en-US"/>
           </a:p>
@@ -14492,7 +19545,7 @@
                   <a:spcPts val="600"/>
                 </a:spcAft>
               </a:pPr>
-              <a:t>27.06.2025</a:t>
+              <a:t>03.07.2025</a:t>
             </a:fld>
             <a:endParaRPr lang="en-US"/>
           </a:p>
@@ -14782,7 +19835,7 @@
                   <a:spcPts val="600"/>
                 </a:spcAft>
               </a:pPr>
-              <a:t>27.06.2025</a:t>
+              <a:t>03.07.2025</a:t>
             </a:fld>
             <a:endParaRPr lang="en-US"/>
           </a:p>
@@ -14850,7 +19903,7 @@
             <p:ph idx="1"/>
             <p:extLst>
               <p:ext uri="{D42A27DB-BD31-4B8C-83A1-F6EECF244321}">
-                <p14:modId xmlns:p14="http://schemas.microsoft.com/office/powerpoint/2010/main" val="4268000637"/>
+                <p14:modId xmlns:p14="http://schemas.microsoft.com/office/powerpoint/2010/main" val="2684208112"/>
               </p:ext>
             </p:extLst>
           </p:nvPr>
@@ -14875,13 +19928,13 @@
   <p:clrMapOvr>
     <a:masterClrMapping/>
   </p:clrMapOvr>
-  <mc:AlternateContent xmlns:mc="http://schemas.openxmlformats.org/markup-compatibility/2006" xmlns:p159="http://schemas.microsoft.com/office/powerpoint/2015/09/main">
-    <mc:Choice Requires="p159">
+  <mc:AlternateContent xmlns:mc="http://schemas.openxmlformats.org/markup-compatibility/2006">
+    <mc:Choice xmlns:p159="http://schemas.microsoft.com/office/powerpoint/2015/09/main" Requires="p159">
       <p:transition xmlns:p14="http://schemas.microsoft.com/office/powerpoint/2010/main" spd="slow" p14:dur="2000">
         <p159:morph option="byObject"/>
       </p:transition>
     </mc:Choice>
-    <mc:Fallback xmlns="">
+    <mc:Fallback>
       <p:transition spd="slow">
         <p:fade/>
       </p:transition>
@@ -14982,7 +20035,7 @@
                   </a:outerShdw>
                 </a:effectLst>
               </a:rPr>
-              <a:t>Authentifizierung</a:t>
+              <a:t>Datenbankabfragen</a:t>
             </a:r>
             <a:endParaRPr lang="en-US" sz="4800" dirty="0">
               <a:effectLst>
@@ -15082,7 +20135,7 @@
         <p:spPr>
           <a:xfrm>
             <a:off x="977275" y="1184474"/>
-            <a:ext cx="9604365" cy="4249930"/>
+            <a:ext cx="10087904" cy="4249930"/>
           </a:xfrm>
           <a:prstGeom prst="roundRect">
             <a:avLst>
@@ -15154,9 +20207,9 @@
                   <a:spcPts val="600"/>
                 </a:spcAft>
               </a:pPr>
-              <a:t>6/27/2025</a:t>
+              <a:t>7/3/2025</a:t>
             </a:fld>
-            <a:endParaRPr lang="en-US"/>
+            <a:endParaRPr lang="en-US" dirty="0"/>
           </a:p>
         </p:txBody>
       </p:sp>
@@ -15216,13 +20269,13 @@
   <p:clrMapOvr>
     <a:masterClrMapping/>
   </p:clrMapOvr>
-  <mc:AlternateContent xmlns:mc="http://schemas.openxmlformats.org/markup-compatibility/2006">
-    <mc:Choice xmlns:p159="http://schemas.microsoft.com/office/powerpoint/2015/09/main" Requires="p159">
+  <mc:AlternateContent xmlns:mc="http://schemas.openxmlformats.org/markup-compatibility/2006" xmlns:p159="http://schemas.microsoft.com/office/powerpoint/2015/09/main">
+    <mc:Choice Requires="p159">
       <p:transition xmlns:p14="http://schemas.microsoft.com/office/powerpoint/2010/main" spd="slow" p14:dur="2000">
         <p159:morph option="byObject"/>
       </p:transition>
     </mc:Choice>
-    <mc:Fallback>
+    <mc:Fallback xmlns="">
       <p:transition spd="slow">
         <p:fade/>
       </p:transition>
@@ -15489,7 +20542,7 @@
                   <a:spcPts val="600"/>
                 </a:spcAft>
               </a:pPr>
-              <a:t>6/27/2025</a:t>
+              <a:t>7/3/2025</a:t>
             </a:fld>
             <a:endParaRPr lang="en-US"/>
           </a:p>
@@ -15960,7 +21013,7 @@
                   <a:spcPts val="600"/>
                 </a:spcAft>
               </a:pPr>
-              <a:t>6/27/2025</a:t>
+              <a:t>7/3/2025</a:t>
             </a:fld>
             <a:endParaRPr lang="en-US"/>
           </a:p>
@@ -16231,7 +21284,7 @@
                   <a:spcPts val="600"/>
                 </a:spcAft>
               </a:pPr>
-              <a:t>27.06.2025</a:t>
+              <a:t>03.07.2025</a:t>
             </a:fld>
             <a:endParaRPr lang="en-US"/>
           </a:p>
